--- a/presentation/Balls_into_Bins_Cisco_Interview_Deck.pptx
+++ b/presentation/Balls_into_Bins_Cisco_Interview_Deck.pptx
@@ -10,10 +10,10 @@
   <p:sldIdLst>
     <p:sldId id="256" r:id="rId2"/>
     <p:sldId id="257" r:id="rId3"/>
-    <p:sldId id="258" r:id="rId4"/>
-    <p:sldId id="259" r:id="rId5"/>
-    <p:sldId id="260" r:id="rId6"/>
-    <p:sldId id="261" r:id="rId7"/>
+    <p:sldId id="261" r:id="rId4"/>
+    <p:sldId id="258" r:id="rId5"/>
+    <p:sldId id="259" r:id="rId6"/>
+    <p:sldId id="260" r:id="rId7"/>
     <p:sldId id="262" r:id="rId8"/>
     <p:sldId id="263" r:id="rId9"/>
     <p:sldId id="264" r:id="rId10"/>
@@ -21,7 +21,7 @@
     <p:sldId id="266" r:id="rId12"/>
     <p:sldId id="267" r:id="rId13"/>
     <p:sldId id="268" r:id="rId14"/>
-    <p:sldId id="269" r:id="rId15"/>
+    <p:sldId id="270" r:id="rId15"/>
   </p:sldIdLst>
   <p:sldSz cx="12192000" cy="6858000"/>
   <p:notesSz cx="6858000" cy="12192000"/>
@@ -150,7 +150,7 @@
     </p:spTree>
     <p:extLst>
       <p:ext uri="{BB962C8B-B14F-4D97-AF65-F5344CB8AC3E}">
-        <p14:creationId xmlns:p14="http://schemas.microsoft.com/office/powerpoint/2010/main" val="975104692"/>
+        <p14:creationId xmlns:p14="http://schemas.microsoft.com/office/powerpoint/2010/main" val="2973944364"/>
       </p:ext>
     </p:extLst>
   </p:cSld>
@@ -2399,7 +2399,7 @@
                 <a:ea typeface="Cambria" pitchFamily="34" charset="-122"/>
                 <a:cs typeface="Cambria" pitchFamily="34" charset="-120"/>
               </a:rPr>
-              <a:t>Stateful Heap: When Maintained State Helps</a:t>
+              <a:t>Weighted Balls Break Count Fairness</a:t>
             </a:r>
             <a:endParaRPr lang="en-US" sz="2900" dirty="0"/>
           </a:p>
@@ -2446,7 +2446,7 @@
       </p:sp>
       <p:pic>
         <p:nvPicPr>
-          <p:cNvPr id="4" name="Image 0" descr="/home/claude/work/assets/plot_heap_sweep.png"/>
+          <p:cNvPr id="4" name="Image 0" descr="/home/claude/work/assets/plot_weighted_breaks.png"/>
           <p:cNvPicPr>
             <a:picLocks noChangeAspect="1"/>
           </p:cNvPicPr>
@@ -2477,11 +2477,11 @@
         <p:spPr>
           <a:xfrm>
             <a:off x="7635240" y="1188720"/>
-            <a:ext cx="4007815" cy="1554480"/>
+            <a:ext cx="4007815" cy="1417320"/>
           </a:xfrm>
           <a:prstGeom prst="roundRect">
             <a:avLst>
-              <a:gd name="adj" fmla="val 4706"/>
+              <a:gd name="adj" fmla="val 5161"/>
             </a:avLst>
           </a:prstGeom>
           <a:solidFill>
@@ -2506,7 +2506,7 @@
         <p:spPr>
           <a:xfrm>
             <a:off x="7799832" y="1261872"/>
-            <a:ext cx="3678631" cy="901598"/>
+            <a:ext cx="3678631" cy="822046"/>
           </a:xfrm>
           <a:prstGeom prst="rect">
             <a:avLst/>
@@ -2524,13 +2524,13 @@
             <a:r>
               <a:rPr lang="en-US" sz="2200" b="1" dirty="0">
                 <a:solidFill>
-                  <a:srgbClr val="C2660D"/>
+                  <a:srgbClr val="15803D"/>
                 </a:solidFill>
                 <a:latin typeface="Cambria" pitchFamily="34" charset="0"/>
                 <a:ea typeface="Cambria" pitchFamily="34" charset="-122"/>
                 <a:cs typeface="Cambria" pitchFamily="34" charset="-120"/>
               </a:rPr>
-              <a:t>≈ 38.3  vs  ≈ 159</a:t>
+              <a:t>1812.6  vs  1731.6</a:t>
             </a:r>
             <a:endParaRPr lang="en-US" sz="2200" dirty="0"/>
           </a:p>
@@ -2544,8 +2544,8 @@
         </p:nvSpPr>
         <p:spPr>
           <a:xfrm>
-            <a:off x="7799832" y="2121408"/>
-            <a:ext cx="3678631" cy="559613"/>
+            <a:off x="7799832" y="2039112"/>
+            <a:ext cx="3678631" cy="510235"/>
           </a:xfrm>
           <a:prstGeom prst="rect">
             <a:avLst/>
@@ -2569,7 +2569,7 @@
                 <a:ea typeface="Calibri" pitchFamily="34" charset="-122"/>
                 <a:cs typeface="Calibri" pitchFamily="34" charset="-120"/>
               </a:rPr>
-              <a:t>COST PER BALL — FULL HEAP vs ABSOLUTE MINIMUM</a:t>
+              <a:t>MAX LOAD, WEIGHTED n=32 — ROUND-ROBIN vs POWER-2</a:t>
             </a:r>
             <a:endParaRPr lang="en-US" sz="1050" dirty="0"/>
           </a:p>
@@ -2583,8 +2583,8 @@
         </p:nvSpPr>
         <p:spPr>
           <a:xfrm>
-            <a:off x="7635240" y="2697480"/>
-            <a:ext cx="4007815" cy="822960"/>
+            <a:off x="7635240" y="2788920"/>
+            <a:ext cx="4007815" cy="1005840"/>
           </a:xfrm>
           <a:prstGeom prst="rect">
             <a:avLst/>
@@ -2603,7 +2603,7 @@
               <a:buNone/>
             </a:pPr>
             <a:r>
-              <a:rPr lang="en-US" sz="1250" dirty="0">
+              <a:rPr lang="en-US" sz="1300" dirty="0">
                 <a:solidFill>
                   <a:srgbClr val="1E293B"/>
                 </a:solidFill>
@@ -2611,9 +2611,9 @@
                 <a:ea typeface="Calibri" pitchFamily="34" charset="-122"/>
                 <a:cs typeface="Calibri" pitchFamily="34" charset="-120"/>
               </a:rPr>
-              <a:t>Full heap matches absolute-minimum quality (max load ≈ 1724.7) at a fraction of the cost.</a:t>
-            </a:r>
-            <a:endParaRPr lang="en-US" sz="1250" dirty="0"/>
+              <a:t>Fair by count can still be bad by load. Power-2 reads current load and adapts; round-robin does not.</a:t>
+            </a:r>
+            <a:endParaRPr lang="en-US" sz="1300" dirty="0"/>
           </a:p>
         </p:txBody>
       </p:sp>
@@ -2625,7 +2625,7 @@
         </p:nvSpPr>
         <p:spPr>
           <a:xfrm>
-            <a:off x="7635240" y="3611880"/>
+            <a:off x="7635240" y="3977640"/>
             <a:ext cx="4007815" cy="1005840"/>
           </a:xfrm>
           <a:prstGeom prst="rect">
@@ -2653,7 +2653,7 @@
                 <a:ea typeface="Calibri" pitchFamily="34" charset="-122"/>
                 <a:cs typeface="Calibri" pitchFamily="34" charset="-120"/>
               </a:rPr>
-              <a:t>Partial heap tracks s bins; full heap tracks all bins. More state steadily improves quality, at rising update cost.</a:t>
+              <a:t>The same pattern appears at n=16: round-robin's clean-case advantage disappears once balls carry weight.</a:t>
             </a:r>
             <a:endParaRPr lang="en-US" sz="1250" dirty="0"/>
           </a:p>
@@ -2721,7 +2721,7 @@
                 <a:ea typeface="Calibri" pitchFamily="34" charset="-122"/>
                 <a:cs typeface="Calibri" pitchFamily="34" charset="-120"/>
               </a:rPr>
-              <a:t>A maintained heap can approach global-min quality without scanning all bins every time.</a:t>
+              <a:t>Round-robin balances counts, not load — weighted balls expose that weakness.</a:t>
             </a:r>
             <a:endParaRPr lang="en-US" sz="1350" dirty="0"/>
           </a:p>
@@ -2793,7 +2793,7 @@
                 <a:ea typeface="Cambria" pitchFamily="34" charset="-122"/>
                 <a:cs typeface="Cambria" pitchFamily="34" charset="-120"/>
               </a:rPr>
-              <a:t>Initialization Tests Robustness</a:t>
+              <a:t>Stateful Heap: When Maintained State Helps</a:t>
             </a:r>
             <a:endParaRPr lang="en-US" sz="2900" dirty="0"/>
           </a:p>
@@ -2840,7 +2840,7 @@
       </p:sp>
       <p:pic>
         <p:nvPicPr>
-          <p:cNvPr id="4" name="Image 0" descr="/home/claude/work/assets/plot_initialized.png"/>
+          <p:cNvPr id="4" name="Image 0" descr="/home/claude/work/assets/plot_heap_sweep.png"/>
           <p:cNvPicPr>
             <a:picLocks noChangeAspect="1"/>
           </p:cNvPicPr>
@@ -2871,11 +2871,11 @@
         <p:spPr>
           <a:xfrm>
             <a:off x="7635240" y="1188720"/>
-            <a:ext cx="4007815" cy="1417320"/>
+            <a:ext cx="4007815" cy="1554480"/>
           </a:xfrm>
           <a:prstGeom prst="roundRect">
             <a:avLst>
-              <a:gd name="adj" fmla="val 5161"/>
+              <a:gd name="adj" fmla="val 4706"/>
             </a:avLst>
           </a:prstGeom>
           <a:solidFill>
@@ -2900,7 +2900,7 @@
         <p:spPr>
           <a:xfrm>
             <a:off x="7799832" y="1261872"/>
-            <a:ext cx="3678631" cy="822046"/>
+            <a:ext cx="3678631" cy="901598"/>
           </a:xfrm>
           <a:prstGeom prst="rect">
             <a:avLst/>
@@ -2918,13 +2918,13 @@
             <a:r>
               <a:rPr lang="en-US" sz="2200" b="1" dirty="0">
                 <a:solidFill>
-                  <a:srgbClr val="475569"/>
+                  <a:srgbClr val="C2660D"/>
                 </a:solidFill>
                 <a:latin typeface="Cambria" pitchFamily="34" charset="0"/>
                 <a:ea typeface="Cambria" pitchFamily="34" charset="-122"/>
                 <a:cs typeface="Cambria" pitchFamily="34" charset="-120"/>
               </a:rPr>
-              <a:t>679.3  vs  678.0</a:t>
+              <a:t>≈ 38.3  vs  ≈ 159</a:t>
             </a:r>
             <a:endParaRPr lang="en-US" sz="2200" dirty="0"/>
           </a:p>
@@ -2938,8 +2938,8 @@
         </p:nvSpPr>
         <p:spPr>
           <a:xfrm>
-            <a:off x="7799832" y="2039112"/>
-            <a:ext cx="3678631" cy="510235"/>
+            <a:off x="7799832" y="2121408"/>
+            <a:ext cx="3678631" cy="559613"/>
           </a:xfrm>
           <a:prstGeom prst="rect">
             <a:avLst/>
@@ -2963,7 +2963,7 @@
                 <a:ea typeface="Calibri" pitchFamily="34" charset="-122"/>
                 <a:cs typeface="Calibri" pitchFamily="34" charset="-120"/>
               </a:rPr>
-              <a:t>MAX LOAD, n=16 — POWER-2 vs REFERENCE</a:t>
+              <a:t>COST PER BALL — FULL HEAP vs ABSOLUTE MINIMUM</a:t>
             </a:r>
             <a:endParaRPr lang="en-US" sz="1050" dirty="0"/>
           </a:p>
@@ -2971,121 +2971,14 @@
       </p:sp>
       <p:sp>
         <p:nvSpPr>
-          <p:cNvPr id="8" name="Shape 5"/>
-          <p:cNvSpPr/>
-          <p:nvPr/>
-        </p:nvSpPr>
-        <p:spPr>
-          <a:xfrm>
-            <a:off x="7635240" y="2743200"/>
-            <a:ext cx="4007815" cy="1417320"/>
-          </a:xfrm>
-          <a:prstGeom prst="roundRect">
-            <a:avLst>
-              <a:gd name="adj" fmla="val 5161"/>
-            </a:avLst>
-          </a:prstGeom>
-          <a:solidFill>
-            <a:srgbClr val="F1F5F9"/>
-          </a:solidFill>
-          <a:ln/>
-        </p:spPr>
-        <p:txBody>
-          <a:bodyPr/>
-          <a:lstStyle/>
-          <a:p>
-            <a:endParaRPr lang="en-IL"/>
-          </a:p>
-        </p:txBody>
-      </p:sp>
-      <p:sp>
-        <p:nvSpPr>
-          <p:cNvPr id="9" name="Text 6"/>
-          <p:cNvSpPr/>
-          <p:nvPr/>
-        </p:nvSpPr>
-        <p:spPr>
-          <a:xfrm>
-            <a:off x="7799832" y="2816352"/>
-            <a:ext cx="3678631" cy="822046"/>
-          </a:xfrm>
-          <a:prstGeom prst="rect">
-            <a:avLst/>
-          </a:prstGeom>
-          <a:noFill/>
-          <a:ln/>
-        </p:spPr>
-        <p:txBody>
-          <a:bodyPr wrap="square" lIns="0" tIns="0" rIns="0" bIns="0" rtlCol="0" anchor="b"/>
-          <a:lstStyle/>
-          <a:p>
-            <a:pPr marL="0" indent="0" algn="l">
-              <a:buNone/>
-            </a:pPr>
-            <a:r>
-              <a:rPr lang="en-US" sz="2200" b="1" dirty="0">
-                <a:solidFill>
-                  <a:srgbClr val="475569"/>
-                </a:solidFill>
-                <a:latin typeface="Cambria" pitchFamily="34" charset="0"/>
-                <a:ea typeface="Cambria" pitchFamily="34" charset="-122"/>
-                <a:cs typeface="Cambria" pitchFamily="34" charset="-120"/>
-              </a:rPr>
-              <a:t>365.4  vs  364.0</a:t>
-            </a:r>
-            <a:endParaRPr lang="en-US" sz="2200" dirty="0"/>
-          </a:p>
-        </p:txBody>
-      </p:sp>
-      <p:sp>
-        <p:nvSpPr>
-          <p:cNvPr id="10" name="Text 7"/>
-          <p:cNvSpPr/>
-          <p:nvPr/>
-        </p:nvSpPr>
-        <p:spPr>
-          <a:xfrm>
-            <a:off x="7799832" y="3593592"/>
-            <a:ext cx="3678631" cy="510235"/>
-          </a:xfrm>
-          <a:prstGeom prst="rect">
-            <a:avLst/>
-          </a:prstGeom>
-          <a:noFill/>
-          <a:ln/>
-        </p:spPr>
-        <p:txBody>
-          <a:bodyPr wrap="square" lIns="0" tIns="0" rIns="0" bIns="0" rtlCol="0" anchor="t"/>
-          <a:lstStyle/>
-          <a:p>
-            <a:pPr marL="0" indent="0" algn="l">
-              <a:buNone/>
-            </a:pPr>
-            <a:r>
-              <a:rPr lang="en-US" sz="1050" dirty="0">
-                <a:solidFill>
-                  <a:srgbClr val="64748B"/>
-                </a:solidFill>
-                <a:latin typeface="Calibri" pitchFamily="34" charset="0"/>
-                <a:ea typeface="Calibri" pitchFamily="34" charset="-122"/>
-                <a:cs typeface="Calibri" pitchFamily="34" charset="-120"/>
-              </a:rPr>
-              <a:t>MAX LOAD, n=32 — POWER-2 vs REFERENCE</a:t>
-            </a:r>
-            <a:endParaRPr lang="en-US" sz="1050" dirty="0"/>
-          </a:p>
-        </p:txBody>
-      </p:sp>
-      <p:sp>
-        <p:nvSpPr>
-          <p:cNvPr id="11" name="Text 8"/>
-          <p:cNvSpPr/>
-          <p:nvPr/>
-        </p:nvSpPr>
-        <p:spPr>
-          <a:xfrm>
-            <a:off x="7635240" y="4343400"/>
-            <a:ext cx="4007815" cy="1097280"/>
+          <p:cNvPr id="8" name="Text 5"/>
+          <p:cNvSpPr/>
+          <p:nvPr/>
+        </p:nvSpPr>
+        <p:spPr>
+          <a:xfrm>
+            <a:off x="7635240" y="2697480"/>
+            <a:ext cx="4007815" cy="822960"/>
           </a:xfrm>
           <a:prstGeom prst="rect">
             <a:avLst/>
@@ -3104,6 +2997,48 @@
               <a:buNone/>
             </a:pPr>
             <a:r>
+              <a:rPr lang="en-US" sz="1250" dirty="0">
+                <a:solidFill>
+                  <a:srgbClr val="1E293B"/>
+                </a:solidFill>
+                <a:latin typeface="Calibri" pitchFamily="34" charset="0"/>
+                <a:ea typeface="Calibri" pitchFamily="34" charset="-122"/>
+                <a:cs typeface="Calibri" pitchFamily="34" charset="-120"/>
+              </a:rPr>
+              <a:t>Full heap matches absolute-minimum quality (max load ≈ 1724.7) at a fraction of the cost.</a:t>
+            </a:r>
+            <a:endParaRPr lang="en-US" sz="1250" dirty="0"/>
+          </a:p>
+        </p:txBody>
+      </p:sp>
+      <p:sp>
+        <p:nvSpPr>
+          <p:cNvPr id="9" name="Text 6"/>
+          <p:cNvSpPr/>
+          <p:nvPr/>
+        </p:nvSpPr>
+        <p:spPr>
+          <a:xfrm>
+            <a:off x="7635240" y="3611880"/>
+            <a:ext cx="4007815" cy="1005840"/>
+          </a:xfrm>
+          <a:prstGeom prst="rect">
+            <a:avLst/>
+          </a:prstGeom>
+          <a:noFill/>
+          <a:ln/>
+        </p:spPr>
+        <p:txBody>
+          <a:bodyPr wrap="square" lIns="0" tIns="0" rIns="0" bIns="0" rtlCol="0" anchor="t"/>
+          <a:lstStyle/>
+          <a:p>
+            <a:pPr marL="0" indent="0">
+              <a:lnSpc>
+                <a:spcPct val="115000"/>
+              </a:lnSpc>
+              <a:buNone/>
+            </a:pPr>
+            <a:r>
               <a:rPr lang="en-US" sz="1250" i="1" dirty="0">
                 <a:solidFill>
                   <a:srgbClr val="64748B"/>
@@ -3112,7 +3047,7 @@
                 <a:ea typeface="Calibri" pitchFamily="34" charset="-122"/>
                 <a:cs typeface="Calibri" pitchFamily="34" charset="-120"/>
               </a:rPr>
-              <a:t>Real systems rarely start from zero. Round-robin can preserve — rather than correct — initial imbalance.</a:t>
+              <a:t>Partial heap tracks s bins; full heap tracks all bins. More state steadily improves quality, at rising update cost.</a:t>
             </a:r>
             <a:endParaRPr lang="en-US" sz="1250" dirty="0"/>
           </a:p>
@@ -3120,7 +3055,7 @@
       </p:sp>
       <p:sp>
         <p:nvSpPr>
-          <p:cNvPr id="12" name="Shape 9"/>
+          <p:cNvPr id="10" name="Shape 7"/>
           <p:cNvSpPr/>
           <p:nvPr/>
         </p:nvSpPr>
@@ -3149,7 +3084,7 @@
       </p:sp>
       <p:sp>
         <p:nvSpPr>
-          <p:cNvPr id="13" name="Text 10"/>
+          <p:cNvPr id="11" name="Text 8"/>
           <p:cNvSpPr/>
           <p:nvPr/>
         </p:nvSpPr>
@@ -3180,7 +3115,7 @@
                 <a:ea typeface="Calibri" pitchFamily="34" charset="-122"/>
                 <a:cs typeface="Calibri" pitchFamily="34" charset="-120"/>
               </a:rPr>
-              <a:t>Starting from non-empty bins exposes whether a policy corrects imbalance or just preserves it.</a:t>
+              <a:t>A maintained heap can approach global-min quality without scanning all bins every time.</a:t>
             </a:r>
             <a:endParaRPr lang="en-US" sz="1350" dirty="0"/>
           </a:p>
@@ -3252,7 +3187,7 @@
                 <a:ea typeface="Cambria" pitchFamily="34" charset="-122"/>
                 <a:cs typeface="Cambria" pitchFamily="34" charset="-120"/>
               </a:rPr>
-              <a:t>Final Realistic Tradeoff: Weighted + Initialized</a:t>
+              <a:t>Initialization Tests Robustness</a:t>
             </a:r>
             <a:endParaRPr lang="en-US" sz="2900" dirty="0"/>
           </a:p>
@@ -3299,7 +3234,7 @@
       </p:sp>
       <p:pic>
         <p:nvPicPr>
-          <p:cNvPr id="4" name="Image 0" descr="/home/claude/work/assets/plot_cost_quality_final.png"/>
+          <p:cNvPr id="4" name="Image 0" descr="/home/claude/work/assets/plot_initialized.png"/>
           <p:cNvPicPr>
             <a:picLocks noChangeAspect="1"/>
           </p:cNvPicPr>
@@ -3313,8 +3248,8 @@
         </p:blipFill>
         <p:spPr>
           <a:xfrm>
-            <a:off x="1340968" y="1143000"/>
-            <a:ext cx="9509760" cy="4075611"/>
+            <a:off x="548640" y="1188720"/>
+            <a:ext cx="6858000" cy="4572000"/>
           </a:xfrm>
           <a:prstGeom prst="rect">
             <a:avLst/>
@@ -3329,12 +3264,12 @@
         </p:nvSpPr>
         <p:spPr>
           <a:xfrm>
-            <a:off x="548640" y="5440680"/>
-            <a:ext cx="2636444" cy="502920"/>
+            <a:off x="7635240" y="1188720"/>
+            <a:ext cx="4007815" cy="1417320"/>
           </a:xfrm>
           <a:prstGeom prst="roundRect">
             <a:avLst>
-              <a:gd name="adj" fmla="val 10909"/>
+              <a:gd name="adj" fmla="val 5161"/>
             </a:avLst>
           </a:prstGeom>
           <a:solidFill>
@@ -3358,43 +3293,59 @@
         </p:nvSpPr>
         <p:spPr>
           <a:xfrm>
-            <a:off x="685800" y="5440680"/>
-            <a:ext cx="2362124" cy="502920"/>
-          </a:xfrm>
-          <a:prstGeom prst="rect">
-            <a:avLst/>
-          </a:prstGeom>
-          <a:noFill/>
-          <a:ln/>
-        </p:spPr>
-        <p:txBody>
-          <a:bodyPr wrap="square" lIns="0" tIns="0" rIns="0" bIns="0" rtlCol="0" anchor="ctr"/>
-          <a:lstStyle/>
-          <a:p>
-            <a:pPr marL="0" indent="0">
-              <a:lnSpc>
-                <a:spcPct val="100000"/>
-              </a:lnSpc>
-              <a:buNone/>
-            </a:pPr>
-            <a:r>
-              <a:rPr lang="en-US" sz="1150" b="1" dirty="0">
+            <a:off x="7799832" y="1261872"/>
+            <a:ext cx="3678631" cy="822046"/>
+          </a:xfrm>
+          <a:prstGeom prst="rect">
+            <a:avLst/>
+          </a:prstGeom>
+          <a:noFill/>
+          <a:ln/>
+        </p:spPr>
+        <p:txBody>
+          <a:bodyPr wrap="square" lIns="0" tIns="0" rIns="0" bIns="0" rtlCol="0" anchor="b"/>
+          <a:lstStyle/>
+          <a:p>
+            <a:pPr marL="0" indent="0" algn="l">
+              <a:buNone/>
+            </a:pPr>
+            <a:r>
+              <a:rPr lang="en-US" sz="2200" b="1" dirty="0">
                 <a:solidFill>
                   <a:srgbClr val="475569"/>
                 </a:solidFill>
-                <a:latin typeface="Calibri" pitchFamily="34" charset="0"/>
-                <a:ea typeface="Calibri" pitchFamily="34" charset="-122"/>
-                <a:cs typeface="Calibri" pitchFamily="34" charset="-120"/>
-              </a:rPr>
-              <a:t>Random</a:t>
-            </a:r>
-            <a:endParaRPr lang="en-US" sz="1150" dirty="0"/>
-          </a:p>
-          <a:p>
-            <a:pPr marL="0" indent="0">
-              <a:lnSpc>
-                <a:spcPct val="100000"/>
-              </a:lnSpc>
+                <a:latin typeface="Cambria" pitchFamily="34" charset="0"/>
+                <a:ea typeface="Cambria" pitchFamily="34" charset="-122"/>
+                <a:cs typeface="Cambria" pitchFamily="34" charset="-120"/>
+              </a:rPr>
+              <a:t>679.3  vs  678.0</a:t>
+            </a:r>
+            <a:endParaRPr lang="en-US" sz="2200" dirty="0"/>
+          </a:p>
+        </p:txBody>
+      </p:sp>
+      <p:sp>
+        <p:nvSpPr>
+          <p:cNvPr id="7" name="Text 4"/>
+          <p:cNvSpPr/>
+          <p:nvPr/>
+        </p:nvSpPr>
+        <p:spPr>
+          <a:xfrm>
+            <a:off x="7799832" y="2039112"/>
+            <a:ext cx="3678631" cy="510235"/>
+          </a:xfrm>
+          <a:prstGeom prst="rect">
+            <a:avLst/>
+          </a:prstGeom>
+          <a:noFill/>
+          <a:ln/>
+        </p:spPr>
+        <p:txBody>
+          <a:bodyPr wrap="square" lIns="0" tIns="0" rIns="0" bIns="0" rtlCol="0" anchor="t"/>
+          <a:lstStyle/>
+          <a:p>
+            <a:pPr marL="0" indent="0" algn="l">
               <a:buNone/>
             </a:pPr>
             <a:r>
@@ -3406,26 +3357,26 @@
                 <a:ea typeface="Calibri" pitchFamily="34" charset="-122"/>
                 <a:cs typeface="Calibri" pitchFamily="34" charset="-120"/>
               </a:rPr>
-              <a:t>Too weak</a:t>
-            </a:r>
-            <a:endParaRPr lang="en-US" sz="1150" dirty="0"/>
-          </a:p>
-        </p:txBody>
-      </p:sp>
-      <p:sp>
-        <p:nvSpPr>
-          <p:cNvPr id="7" name="Shape 4"/>
-          <p:cNvSpPr/>
-          <p:nvPr/>
-        </p:nvSpPr>
-        <p:spPr>
-          <a:xfrm>
-            <a:off x="3367964" y="5440680"/>
-            <a:ext cx="2636444" cy="502920"/>
+              <a:t>MAX LOAD, n=16 — POWER-2 vs REFERENCE</a:t>
+            </a:r>
+            <a:endParaRPr lang="en-US" sz="1050" dirty="0"/>
+          </a:p>
+        </p:txBody>
+      </p:sp>
+      <p:sp>
+        <p:nvSpPr>
+          <p:cNvPr id="8" name="Shape 5"/>
+          <p:cNvSpPr/>
+          <p:nvPr/>
+        </p:nvSpPr>
+        <p:spPr>
+          <a:xfrm>
+            <a:off x="7635240" y="2743200"/>
+            <a:ext cx="4007815" cy="1417320"/>
           </a:xfrm>
           <a:prstGeom prst="roundRect">
             <a:avLst>
-              <a:gd name="adj" fmla="val 10909"/>
+              <a:gd name="adj" fmla="val 5161"/>
             </a:avLst>
           </a:prstGeom>
           <a:solidFill>
@@ -3443,53 +3394,111 @@
       </p:sp>
       <p:sp>
         <p:nvSpPr>
-          <p:cNvPr id="8" name="Text 5"/>
-          <p:cNvSpPr/>
-          <p:nvPr/>
-        </p:nvSpPr>
-        <p:spPr>
-          <a:xfrm>
-            <a:off x="3505124" y="5440680"/>
-            <a:ext cx="2362124" cy="502920"/>
-          </a:xfrm>
-          <a:prstGeom prst="rect">
-            <a:avLst/>
-          </a:prstGeom>
-          <a:noFill/>
-          <a:ln/>
-        </p:spPr>
-        <p:txBody>
-          <a:bodyPr wrap="square" lIns="0" tIns="0" rIns="0" bIns="0" rtlCol="0" anchor="ctr"/>
+          <p:cNvPr id="9" name="Text 6"/>
+          <p:cNvSpPr/>
+          <p:nvPr/>
+        </p:nvSpPr>
+        <p:spPr>
+          <a:xfrm>
+            <a:off x="7799832" y="2816352"/>
+            <a:ext cx="3678631" cy="822046"/>
+          </a:xfrm>
+          <a:prstGeom prst="rect">
+            <a:avLst/>
+          </a:prstGeom>
+          <a:noFill/>
+          <a:ln/>
+        </p:spPr>
+        <p:txBody>
+          <a:bodyPr wrap="square" lIns="0" tIns="0" rIns="0" bIns="0" rtlCol="0" anchor="b"/>
+          <a:lstStyle/>
+          <a:p>
+            <a:pPr marL="0" indent="0" algn="l">
+              <a:buNone/>
+            </a:pPr>
+            <a:r>
+              <a:rPr lang="en-US" sz="2200" b="1" dirty="0">
+                <a:solidFill>
+                  <a:srgbClr val="475569"/>
+                </a:solidFill>
+                <a:latin typeface="Cambria" pitchFamily="34" charset="0"/>
+                <a:ea typeface="Cambria" pitchFamily="34" charset="-122"/>
+                <a:cs typeface="Cambria" pitchFamily="34" charset="-120"/>
+              </a:rPr>
+              <a:t>365.4  vs  364.0</a:t>
+            </a:r>
+            <a:endParaRPr lang="en-US" sz="2200" dirty="0"/>
+          </a:p>
+        </p:txBody>
+      </p:sp>
+      <p:sp>
+        <p:nvSpPr>
+          <p:cNvPr id="10" name="Text 7"/>
+          <p:cNvSpPr/>
+          <p:nvPr/>
+        </p:nvSpPr>
+        <p:spPr>
+          <a:xfrm>
+            <a:off x="7799832" y="3593592"/>
+            <a:ext cx="3678631" cy="510235"/>
+          </a:xfrm>
+          <a:prstGeom prst="rect">
+            <a:avLst/>
+          </a:prstGeom>
+          <a:noFill/>
+          <a:ln/>
+        </p:spPr>
+        <p:txBody>
+          <a:bodyPr wrap="square" lIns="0" tIns="0" rIns="0" bIns="0" rtlCol="0" anchor="t"/>
+          <a:lstStyle/>
+          <a:p>
+            <a:pPr marL="0" indent="0" algn="l">
+              <a:buNone/>
+            </a:pPr>
+            <a:r>
+              <a:rPr lang="en-US" sz="1050" dirty="0">
+                <a:solidFill>
+                  <a:srgbClr val="64748B"/>
+                </a:solidFill>
+                <a:latin typeface="Calibri" pitchFamily="34" charset="0"/>
+                <a:ea typeface="Calibri" pitchFamily="34" charset="-122"/>
+                <a:cs typeface="Calibri" pitchFamily="34" charset="-120"/>
+              </a:rPr>
+              <a:t>MAX LOAD, n=32 — POWER-2 vs REFERENCE</a:t>
+            </a:r>
+            <a:endParaRPr lang="en-US" sz="1050" dirty="0"/>
+          </a:p>
+        </p:txBody>
+      </p:sp>
+      <p:sp>
+        <p:nvSpPr>
+          <p:cNvPr id="11" name="Text 8"/>
+          <p:cNvSpPr/>
+          <p:nvPr/>
+        </p:nvSpPr>
+        <p:spPr>
+          <a:xfrm>
+            <a:off x="7635240" y="4343400"/>
+            <a:ext cx="4007815" cy="1097280"/>
+          </a:xfrm>
+          <a:prstGeom prst="rect">
+            <a:avLst/>
+          </a:prstGeom>
+          <a:noFill/>
+          <a:ln/>
+        </p:spPr>
+        <p:txBody>
+          <a:bodyPr wrap="square" lIns="0" tIns="0" rIns="0" bIns="0" rtlCol="0" anchor="t"/>
           <a:lstStyle/>
           <a:p>
             <a:pPr marL="0" indent="0">
               <a:lnSpc>
-                <a:spcPct val="100000"/>
+                <a:spcPct val="115000"/>
               </a:lnSpc>
               <a:buNone/>
             </a:pPr>
             <a:r>
-              <a:rPr lang="en-US" sz="1150" b="1" dirty="0">
-                <a:solidFill>
-                  <a:srgbClr val="2563EB"/>
-                </a:solidFill>
-                <a:latin typeface="Calibri" pitchFamily="34" charset="0"/>
-                <a:ea typeface="Calibri" pitchFamily="34" charset="-122"/>
-                <a:cs typeface="Calibri" pitchFamily="34" charset="-120"/>
-              </a:rPr>
-              <a:t>Absolute minimum</a:t>
-            </a:r>
-            <a:endParaRPr lang="en-US" sz="1150" dirty="0"/>
-          </a:p>
-          <a:p>
-            <a:pPr marL="0" indent="0">
-              <a:lnSpc>
-                <a:spcPct val="100000"/>
-              </a:lnSpc>
-              <a:buNone/>
-            </a:pPr>
-            <a:r>
-              <a:rPr lang="en-US" sz="1050" dirty="0">
+              <a:rPr lang="en-US" sz="1250" i="1" dirty="0">
                 <a:solidFill>
                   <a:srgbClr val="64748B"/>
                 </a:solidFill>
@@ -3497,197 +3506,15 @@
                 <a:ea typeface="Calibri" pitchFamily="34" charset="-122"/>
                 <a:cs typeface="Calibri" pitchFamily="34" charset="-120"/>
               </a:rPr>
-              <a:t>Expensive</a:t>
-            </a:r>
-            <a:endParaRPr lang="en-US" sz="1150" dirty="0"/>
-          </a:p>
-        </p:txBody>
-      </p:sp>
-      <p:sp>
-        <p:nvSpPr>
-          <p:cNvPr id="9" name="Shape 6"/>
-          <p:cNvSpPr/>
-          <p:nvPr/>
-        </p:nvSpPr>
-        <p:spPr>
-          <a:xfrm>
-            <a:off x="6187288" y="5440680"/>
-            <a:ext cx="2636444" cy="502920"/>
-          </a:xfrm>
-          <a:prstGeom prst="roundRect">
-            <a:avLst>
-              <a:gd name="adj" fmla="val 10909"/>
-            </a:avLst>
-          </a:prstGeom>
-          <a:solidFill>
-            <a:srgbClr val="F1F5F9"/>
-          </a:solidFill>
-          <a:ln/>
-        </p:spPr>
-        <p:txBody>
-          <a:bodyPr/>
-          <a:lstStyle/>
-          <a:p>
-            <a:endParaRPr lang="en-IL"/>
-          </a:p>
-        </p:txBody>
-      </p:sp>
-      <p:sp>
-        <p:nvSpPr>
-          <p:cNvPr id="10" name="Text 7"/>
-          <p:cNvSpPr/>
-          <p:nvPr/>
-        </p:nvSpPr>
-        <p:spPr>
-          <a:xfrm>
-            <a:off x="6324448" y="5440680"/>
-            <a:ext cx="2362124" cy="502920"/>
-          </a:xfrm>
-          <a:prstGeom prst="rect">
-            <a:avLst/>
-          </a:prstGeom>
-          <a:noFill/>
-          <a:ln/>
-        </p:spPr>
-        <p:txBody>
-          <a:bodyPr wrap="square" lIns="0" tIns="0" rIns="0" bIns="0" rtlCol="0" anchor="ctr"/>
-          <a:lstStyle/>
-          <a:p>
-            <a:pPr marL="0" indent="0">
-              <a:lnSpc>
-                <a:spcPct val="100000"/>
-              </a:lnSpc>
-              <a:buNone/>
-            </a:pPr>
-            <a:r>
-              <a:rPr lang="en-US" sz="1150" b="1" dirty="0">
-                <a:solidFill>
-                  <a:srgbClr val="15803D"/>
-                </a:solidFill>
-                <a:latin typeface="Calibri" pitchFamily="34" charset="0"/>
-                <a:ea typeface="Calibri" pitchFamily="34" charset="-122"/>
-                <a:cs typeface="Calibri" pitchFamily="34" charset="-120"/>
-              </a:rPr>
-              <a:t>Round-robin</a:t>
-            </a:r>
-            <a:endParaRPr lang="en-US" sz="1150" dirty="0"/>
-          </a:p>
-          <a:p>
-            <a:pPr marL="0" indent="0">
-              <a:lnSpc>
-                <a:spcPct val="100000"/>
-              </a:lnSpc>
-              <a:buNone/>
-            </a:pPr>
-            <a:r>
-              <a:rPr lang="en-US" sz="1050" dirty="0">
-                <a:solidFill>
-                  <a:srgbClr val="64748B"/>
-                </a:solidFill>
-                <a:latin typeface="Calibri" pitchFamily="34" charset="0"/>
-                <a:ea typeface="Calibri" pitchFamily="34" charset="-122"/>
-                <a:cs typeface="Calibri" pitchFamily="34" charset="-120"/>
-              </a:rPr>
-              <a:t>Fragile</a:t>
-            </a:r>
-            <a:endParaRPr lang="en-US" sz="1150" dirty="0"/>
-          </a:p>
-        </p:txBody>
-      </p:sp>
-      <p:sp>
-        <p:nvSpPr>
-          <p:cNvPr id="11" name="Shape 8"/>
-          <p:cNvSpPr/>
-          <p:nvPr/>
-        </p:nvSpPr>
-        <p:spPr>
-          <a:xfrm>
-            <a:off x="9006611" y="5440680"/>
-            <a:ext cx="2636444" cy="502920"/>
-          </a:xfrm>
-          <a:prstGeom prst="roundRect">
-            <a:avLst>
-              <a:gd name="adj" fmla="val 10909"/>
-            </a:avLst>
-          </a:prstGeom>
-          <a:solidFill>
-            <a:srgbClr val="F1F5F9"/>
-          </a:solidFill>
-          <a:ln/>
-        </p:spPr>
-        <p:txBody>
-          <a:bodyPr/>
-          <a:lstStyle/>
-          <a:p>
-            <a:endParaRPr lang="en-IL"/>
-          </a:p>
-        </p:txBody>
-      </p:sp>
-      <p:sp>
-        <p:nvSpPr>
-          <p:cNvPr id="12" name="Text 9"/>
-          <p:cNvSpPr/>
-          <p:nvPr/>
-        </p:nvSpPr>
-        <p:spPr>
-          <a:xfrm>
-            <a:off x="9143771" y="5440680"/>
-            <a:ext cx="2362124" cy="502920"/>
-          </a:xfrm>
-          <a:prstGeom prst="rect">
-            <a:avLst/>
-          </a:prstGeom>
-          <a:noFill/>
-          <a:ln/>
-        </p:spPr>
-        <p:txBody>
-          <a:bodyPr wrap="square" lIns="0" tIns="0" rIns="0" bIns="0" rtlCol="0" anchor="ctr"/>
-          <a:lstStyle/>
-          <a:p>
-            <a:pPr marL="0" indent="0">
-              <a:lnSpc>
-                <a:spcPct val="100000"/>
-              </a:lnSpc>
-              <a:buNone/>
-            </a:pPr>
-            <a:r>
-              <a:rPr lang="en-US" sz="1150" b="1" dirty="0">
-                <a:solidFill>
-                  <a:srgbClr val="C2660D"/>
-                </a:solidFill>
-                <a:latin typeface="Calibri" pitchFamily="34" charset="0"/>
-                <a:ea typeface="Calibri" pitchFamily="34" charset="-122"/>
-                <a:cs typeface="Calibri" pitchFamily="34" charset="-120"/>
-              </a:rPr>
-              <a:t>Power-2</a:t>
-            </a:r>
-            <a:endParaRPr lang="en-US" sz="1150" dirty="0"/>
-          </a:p>
-          <a:p>
-            <a:pPr marL="0" indent="0">
-              <a:lnSpc>
-                <a:spcPct val="100000"/>
-              </a:lnSpc>
-              <a:buNone/>
-            </a:pPr>
-            <a:r>
-              <a:rPr lang="en-US" sz="1050" dirty="0">
-                <a:solidFill>
-                  <a:srgbClr val="64748B"/>
-                </a:solidFill>
-                <a:latin typeface="Calibri" pitchFamily="34" charset="0"/>
-                <a:ea typeface="Calibri" pitchFamily="34" charset="-122"/>
-                <a:cs typeface="Calibri" pitchFamily="34" charset="-120"/>
-              </a:rPr>
-              <a:t>Simple, stateless, robust</a:t>
-            </a:r>
-            <a:endParaRPr lang="en-US" sz="1150" dirty="0"/>
-          </a:p>
-        </p:txBody>
-      </p:sp>
-      <p:sp>
-        <p:nvSpPr>
-          <p:cNvPr id="13" name="Shape 10"/>
+              <a:t>Real systems rarely start from zero. Round-robin can preserve — rather than correct — initial imbalance.</a:t>
+            </a:r>
+            <a:endParaRPr lang="en-US" sz="1250" dirty="0"/>
+          </a:p>
+        </p:txBody>
+      </p:sp>
+      <p:sp>
+        <p:nvSpPr>
+          <p:cNvPr id="12" name="Shape 9"/>
           <p:cNvSpPr/>
           <p:nvPr/>
         </p:nvSpPr>
@@ -3716,7 +3543,7 @@
       </p:sp>
       <p:sp>
         <p:nvSpPr>
-          <p:cNvPr id="14" name="Text 11"/>
+          <p:cNvPr id="13" name="Text 10"/>
           <p:cNvSpPr/>
           <p:nvPr/>
         </p:nvSpPr>
@@ -3747,7 +3574,7 @@
                 <a:ea typeface="Calibri" pitchFamily="34" charset="-122"/>
                 <a:cs typeface="Calibri" pitchFamily="34" charset="-120"/>
               </a:rPr>
-              <a:t>Under weighted, initialized conditions, Power-2 is the strongest simple default.</a:t>
+              <a:t>Starting from non-empty bins exposes whether a policy corrects imbalance or just preserves it.</a:t>
             </a:r>
             <a:endParaRPr lang="en-US" sz="1350" dirty="0"/>
           </a:p>
@@ -3819,7 +3646,7 @@
                 <a:ea typeface="Cambria" pitchFamily="34" charset="-122"/>
                 <a:cs typeface="Cambria" pitchFamily="34" charset="-120"/>
               </a:rPr>
-              <a:t>C++ Implementation Overview</a:t>
+              <a:t>Final Realistic Tradeoff: Weighted + Initialized</a:t>
             </a:r>
             <a:endParaRPr lang="en-US" sz="2900" dirty="0"/>
           </a:p>
@@ -3864,31 +3691,50 @@
           </a:p>
         </p:txBody>
       </p:sp>
-      <p:sp>
-        <p:nvSpPr>
-          <p:cNvPr id="4" name="Shape 2"/>
-          <p:cNvSpPr/>
-          <p:nvPr/>
-        </p:nvSpPr>
-        <p:spPr>
-          <a:xfrm>
-            <a:off x="700888" y="1417320"/>
-            <a:ext cx="1828800" cy="777240"/>
+      <p:pic>
+        <p:nvPicPr>
+          <p:cNvPr id="4" name="Image 0" descr="/home/claude/work/assets/plot_cost_quality_final.png"/>
+          <p:cNvPicPr>
+            <a:picLocks noChangeAspect="1"/>
+          </p:cNvPicPr>
+          <p:nvPr/>
+        </p:nvPicPr>
+        <p:blipFill>
+          <a:blip r:embed="rId3"/>
+          <a:stretch>
+            <a:fillRect/>
+          </a:stretch>
+        </p:blipFill>
+        <p:spPr>
+          <a:xfrm>
+            <a:off x="1340968" y="1143000"/>
+            <a:ext cx="9509760" cy="4075611"/>
+          </a:xfrm>
+          <a:prstGeom prst="rect">
+            <a:avLst/>
+          </a:prstGeom>
+        </p:spPr>
+      </p:pic>
+      <p:sp>
+        <p:nvSpPr>
+          <p:cNvPr id="5" name="Shape 2"/>
+          <p:cNvSpPr/>
+          <p:nvPr/>
+        </p:nvSpPr>
+        <p:spPr>
+          <a:xfrm>
+            <a:off x="548640" y="5440680"/>
+            <a:ext cx="2636444" cy="502920"/>
           </a:xfrm>
           <a:prstGeom prst="roundRect">
             <a:avLst>
-              <a:gd name="adj" fmla="val 9412"/>
+              <a:gd name="adj" fmla="val 10909"/>
             </a:avLst>
           </a:prstGeom>
           <a:solidFill>
             <a:srgbClr val="F1F5F9"/>
           </a:solidFill>
-          <a:ln w="12700">
-            <a:solidFill>
-              <a:srgbClr val="E2E8F0"/>
-            </a:solidFill>
-            <a:prstDash val="solid"/>
-          </a:ln>
+          <a:ln/>
         </p:spPr>
         <p:txBody>
           <a:bodyPr/>
@@ -3900,14 +3746,14 @@
       </p:sp>
       <p:sp>
         <p:nvSpPr>
-          <p:cNvPr id="5" name="Text 3"/>
-          <p:cNvSpPr/>
-          <p:nvPr/>
-        </p:nvSpPr>
-        <p:spPr>
-          <a:xfrm>
-            <a:off x="700888" y="1417320"/>
-            <a:ext cx="1828800" cy="777240"/>
+          <p:cNvPr id="6" name="Text 3"/>
+          <p:cNvSpPr/>
+          <p:nvPr/>
+        </p:nvSpPr>
+        <p:spPr>
+          <a:xfrm>
+            <a:off x="685800" y="5440680"/>
+            <a:ext cx="2362124" cy="502920"/>
           </a:xfrm>
           <a:prstGeom prst="rect">
             <a:avLst/>
@@ -3919,80 +3765,67 @@
           <a:bodyPr wrap="square" lIns="0" tIns="0" rIns="0" bIns="0" rtlCol="0" anchor="ctr"/>
           <a:lstStyle/>
           <a:p>
-            <a:pPr marL="0" indent="0" algn="ctr">
-              <a:buNone/>
-            </a:pPr>
-            <a:r>
-              <a:rPr lang="en-US" sz="1300" b="1" dirty="0">
-                <a:solidFill>
-                  <a:srgbClr val="1E293B"/>
-                </a:solidFill>
-                <a:latin typeface="Calibri" pitchFamily="34" charset="0"/>
-                <a:ea typeface="Calibri" pitchFamily="34" charset="-122"/>
-                <a:cs typeface="Calibri" pitchFamily="34" charset="-120"/>
-              </a:rPr>
-              <a:t>Scenarios</a:t>
-            </a:r>
-            <a:endParaRPr lang="en-US" sz="1300" dirty="0"/>
-          </a:p>
-        </p:txBody>
-      </p:sp>
-      <p:sp>
-        <p:nvSpPr>
-          <p:cNvPr id="6" name="Shape 4"/>
-          <p:cNvSpPr/>
-          <p:nvPr/>
-        </p:nvSpPr>
-        <p:spPr>
-          <a:xfrm>
-            <a:off x="2529688" y="1805940"/>
-            <a:ext cx="411480" cy="0"/>
-          </a:xfrm>
-          <a:prstGeom prst="line">
-            <a:avLst/>
-          </a:prstGeom>
-          <a:noFill/>
-          <a:ln w="19050">
-            <a:solidFill>
-              <a:srgbClr val="64748B"/>
-            </a:solidFill>
-            <a:prstDash val="solid"/>
-            <a:tailEnd type="triangle"/>
-          </a:ln>
-        </p:spPr>
-        <p:txBody>
-          <a:bodyPr/>
-          <a:lstStyle/>
-          <a:p>
-            <a:endParaRPr lang="en-IL"/>
-          </a:p>
-        </p:txBody>
-      </p:sp>
-      <p:sp>
-        <p:nvSpPr>
-          <p:cNvPr id="7" name="Shape 5"/>
-          <p:cNvSpPr/>
-          <p:nvPr/>
-        </p:nvSpPr>
-        <p:spPr>
-          <a:xfrm>
-            <a:off x="2941168" y="1417320"/>
-            <a:ext cx="1828800" cy="777240"/>
+            <a:pPr marL="0" indent="0">
+              <a:lnSpc>
+                <a:spcPct val="100000"/>
+              </a:lnSpc>
+              <a:buNone/>
+            </a:pPr>
+            <a:r>
+              <a:rPr lang="en-US" sz="1150" b="1" dirty="0">
+                <a:solidFill>
+                  <a:srgbClr val="475569"/>
+                </a:solidFill>
+                <a:latin typeface="Calibri" pitchFamily="34" charset="0"/>
+                <a:ea typeface="Calibri" pitchFamily="34" charset="-122"/>
+                <a:cs typeface="Calibri" pitchFamily="34" charset="-120"/>
+              </a:rPr>
+              <a:t>Random</a:t>
+            </a:r>
+            <a:endParaRPr lang="en-US" sz="1150" dirty="0"/>
+          </a:p>
+          <a:p>
+            <a:pPr marL="0" indent="0">
+              <a:lnSpc>
+                <a:spcPct val="100000"/>
+              </a:lnSpc>
+              <a:buNone/>
+            </a:pPr>
+            <a:r>
+              <a:rPr lang="en-US" sz="1050" dirty="0">
+                <a:solidFill>
+                  <a:srgbClr val="64748B"/>
+                </a:solidFill>
+                <a:latin typeface="Calibri" pitchFamily="34" charset="0"/>
+                <a:ea typeface="Calibri" pitchFamily="34" charset="-122"/>
+                <a:cs typeface="Calibri" pitchFamily="34" charset="-120"/>
+              </a:rPr>
+              <a:t>Too weak</a:t>
+            </a:r>
+            <a:endParaRPr lang="en-US" sz="1150" dirty="0"/>
+          </a:p>
+        </p:txBody>
+      </p:sp>
+      <p:sp>
+        <p:nvSpPr>
+          <p:cNvPr id="7" name="Shape 4"/>
+          <p:cNvSpPr/>
+          <p:nvPr/>
+        </p:nvSpPr>
+        <p:spPr>
+          <a:xfrm>
+            <a:off x="3367964" y="5440680"/>
+            <a:ext cx="2636444" cy="502920"/>
           </a:xfrm>
           <a:prstGeom prst="roundRect">
             <a:avLst>
-              <a:gd name="adj" fmla="val 9412"/>
+              <a:gd name="adj" fmla="val 10909"/>
             </a:avLst>
           </a:prstGeom>
           <a:solidFill>
             <a:srgbClr val="F1F5F9"/>
           </a:solidFill>
-          <a:ln w="12700">
-            <a:solidFill>
-              <a:srgbClr val="E2E8F0"/>
-            </a:solidFill>
-            <a:prstDash val="solid"/>
-          </a:ln>
+          <a:ln/>
         </p:spPr>
         <p:txBody>
           <a:bodyPr/>
@@ -4004,14 +3837,14 @@
       </p:sp>
       <p:sp>
         <p:nvSpPr>
-          <p:cNvPr id="8" name="Text 6"/>
-          <p:cNvSpPr/>
-          <p:nvPr/>
-        </p:nvSpPr>
-        <p:spPr>
-          <a:xfrm>
-            <a:off x="2941168" y="1417320"/>
-            <a:ext cx="1828800" cy="777240"/>
+          <p:cNvPr id="8" name="Text 5"/>
+          <p:cNvSpPr/>
+          <p:nvPr/>
+        </p:nvSpPr>
+        <p:spPr>
+          <a:xfrm>
+            <a:off x="3505124" y="5440680"/>
+            <a:ext cx="2362124" cy="502920"/>
           </a:xfrm>
           <a:prstGeom prst="rect">
             <a:avLst/>
@@ -4023,184 +3856,67 @@
           <a:bodyPr wrap="square" lIns="0" tIns="0" rIns="0" bIns="0" rtlCol="0" anchor="ctr"/>
           <a:lstStyle/>
           <a:p>
-            <a:pPr marL="0" indent="0" algn="ctr">
-              <a:buNone/>
-            </a:pPr>
-            <a:r>
-              <a:rPr lang="en-US" sz="1300" b="1" dirty="0">
-                <a:solidFill>
-                  <a:srgbClr val="1E293B"/>
-                </a:solidFill>
-                <a:latin typeface="Calibri" pitchFamily="34" charset="0"/>
-                <a:ea typeface="Calibri" pitchFamily="34" charset="-122"/>
-                <a:cs typeface="Calibri" pitchFamily="34" charset="-120"/>
-              </a:rPr>
-              <a:t>Simulators</a:t>
-            </a:r>
-            <a:endParaRPr lang="en-US" sz="1300" dirty="0"/>
-          </a:p>
-        </p:txBody>
-      </p:sp>
-      <p:sp>
-        <p:nvSpPr>
-          <p:cNvPr id="9" name="Shape 7"/>
-          <p:cNvSpPr/>
-          <p:nvPr/>
-        </p:nvSpPr>
-        <p:spPr>
-          <a:xfrm>
-            <a:off x="4769968" y="1805940"/>
-            <a:ext cx="411480" cy="0"/>
-          </a:xfrm>
-          <a:prstGeom prst="line">
-            <a:avLst/>
-          </a:prstGeom>
-          <a:noFill/>
-          <a:ln w="19050">
-            <a:solidFill>
-              <a:srgbClr val="64748B"/>
-            </a:solidFill>
-            <a:prstDash val="solid"/>
-            <a:tailEnd type="triangle"/>
-          </a:ln>
-        </p:spPr>
-        <p:txBody>
-          <a:bodyPr/>
-          <a:lstStyle/>
-          <a:p>
-            <a:endParaRPr lang="en-IL"/>
-          </a:p>
-        </p:txBody>
-      </p:sp>
-      <p:sp>
-        <p:nvSpPr>
-          <p:cNvPr id="10" name="Shape 8"/>
-          <p:cNvSpPr/>
-          <p:nvPr/>
-        </p:nvSpPr>
-        <p:spPr>
-          <a:xfrm>
-            <a:off x="5181448" y="1417320"/>
-            <a:ext cx="1828800" cy="777240"/>
+            <a:pPr marL="0" indent="0">
+              <a:lnSpc>
+                <a:spcPct val="100000"/>
+              </a:lnSpc>
+              <a:buNone/>
+            </a:pPr>
+            <a:r>
+              <a:rPr lang="en-US" sz="1150" b="1" dirty="0">
+                <a:solidFill>
+                  <a:srgbClr val="2563EB"/>
+                </a:solidFill>
+                <a:latin typeface="Calibri" pitchFamily="34" charset="0"/>
+                <a:ea typeface="Calibri" pitchFamily="34" charset="-122"/>
+                <a:cs typeface="Calibri" pitchFamily="34" charset="-120"/>
+              </a:rPr>
+              <a:t>Absolute minimum</a:t>
+            </a:r>
+            <a:endParaRPr lang="en-US" sz="1150" dirty="0"/>
+          </a:p>
+          <a:p>
+            <a:pPr marL="0" indent="0">
+              <a:lnSpc>
+                <a:spcPct val="100000"/>
+              </a:lnSpc>
+              <a:buNone/>
+            </a:pPr>
+            <a:r>
+              <a:rPr lang="en-US" sz="1050" dirty="0">
+                <a:solidFill>
+                  <a:srgbClr val="64748B"/>
+                </a:solidFill>
+                <a:latin typeface="Calibri" pitchFamily="34" charset="0"/>
+                <a:ea typeface="Calibri" pitchFamily="34" charset="-122"/>
+                <a:cs typeface="Calibri" pitchFamily="34" charset="-120"/>
+              </a:rPr>
+              <a:t>Expensive</a:t>
+            </a:r>
+            <a:endParaRPr lang="en-US" sz="1150" dirty="0"/>
+          </a:p>
+        </p:txBody>
+      </p:sp>
+      <p:sp>
+        <p:nvSpPr>
+          <p:cNvPr id="9" name="Shape 6"/>
+          <p:cNvSpPr/>
+          <p:nvPr/>
+        </p:nvSpPr>
+        <p:spPr>
+          <a:xfrm>
+            <a:off x="6187288" y="5440680"/>
+            <a:ext cx="2636444" cy="502920"/>
           </a:xfrm>
           <a:prstGeom prst="roundRect">
             <a:avLst>
-              <a:gd name="adj" fmla="val 9412"/>
-            </a:avLst>
-          </a:prstGeom>
-          <a:solidFill>
-            <a:srgbClr val="E8EFFD"/>
-          </a:solidFill>
-          <a:ln w="12700">
-            <a:solidFill>
-              <a:srgbClr val="E2E8F0"/>
-            </a:solidFill>
-            <a:prstDash val="solid"/>
-          </a:ln>
-        </p:spPr>
-        <p:txBody>
-          <a:bodyPr/>
-          <a:lstStyle/>
-          <a:p>
-            <a:endParaRPr lang="en-IL"/>
-          </a:p>
-        </p:txBody>
-      </p:sp>
-      <p:sp>
-        <p:nvSpPr>
-          <p:cNvPr id="11" name="Text 9"/>
-          <p:cNvSpPr/>
-          <p:nvPr/>
-        </p:nvSpPr>
-        <p:spPr>
-          <a:xfrm>
-            <a:off x="5181448" y="1417320"/>
-            <a:ext cx="1828800" cy="777240"/>
-          </a:xfrm>
-          <a:prstGeom prst="rect">
-            <a:avLst/>
-          </a:prstGeom>
-          <a:noFill/>
-          <a:ln/>
-        </p:spPr>
-        <p:txBody>
-          <a:bodyPr wrap="square" lIns="0" tIns="0" rIns="0" bIns="0" rtlCol="0" anchor="ctr"/>
-          <a:lstStyle/>
-          <a:p>
-            <a:pPr marL="0" indent="0" algn="ctr">
-              <a:buNone/>
-            </a:pPr>
-            <a:r>
-              <a:rPr lang="en-US" sz="1300" b="1" dirty="0">
-                <a:solidFill>
-                  <a:srgbClr val="1E293B"/>
-                </a:solidFill>
-                <a:latin typeface="Calibri" pitchFamily="34" charset="0"/>
-                <a:ea typeface="Calibri" pitchFamily="34" charset="-122"/>
-                <a:cs typeface="Calibri" pitchFamily="34" charset="-120"/>
-              </a:rPr>
-              <a:t>Metrics CSV</a:t>
-            </a:r>
-            <a:endParaRPr lang="en-US" sz="1300" dirty="0"/>
-          </a:p>
-        </p:txBody>
-      </p:sp>
-      <p:sp>
-        <p:nvSpPr>
-          <p:cNvPr id="12" name="Shape 10"/>
-          <p:cNvSpPr/>
-          <p:nvPr/>
-        </p:nvSpPr>
-        <p:spPr>
-          <a:xfrm>
-            <a:off x="7010248" y="1805940"/>
-            <a:ext cx="411480" cy="0"/>
-          </a:xfrm>
-          <a:prstGeom prst="line">
-            <a:avLst/>
-          </a:prstGeom>
-          <a:noFill/>
-          <a:ln w="19050">
-            <a:solidFill>
-              <a:srgbClr val="64748B"/>
-            </a:solidFill>
-            <a:prstDash val="solid"/>
-            <a:tailEnd type="triangle"/>
-          </a:ln>
-        </p:spPr>
-        <p:txBody>
-          <a:bodyPr/>
-          <a:lstStyle/>
-          <a:p>
-            <a:endParaRPr lang="en-IL"/>
-          </a:p>
-        </p:txBody>
-      </p:sp>
-      <p:sp>
-        <p:nvSpPr>
-          <p:cNvPr id="13" name="Shape 11"/>
-          <p:cNvSpPr/>
-          <p:nvPr/>
-        </p:nvSpPr>
-        <p:spPr>
-          <a:xfrm>
-            <a:off x="7421728" y="1417320"/>
-            <a:ext cx="1828800" cy="777240"/>
-          </a:xfrm>
-          <a:prstGeom prst="roundRect">
-            <a:avLst>
-              <a:gd name="adj" fmla="val 9412"/>
+              <a:gd name="adj" fmla="val 10909"/>
             </a:avLst>
           </a:prstGeom>
           <a:solidFill>
             <a:srgbClr val="F1F5F9"/>
           </a:solidFill>
-          <a:ln w="12700">
-            <a:solidFill>
-              <a:srgbClr val="E2E8F0"/>
-            </a:solidFill>
-            <a:prstDash val="solid"/>
-          </a:ln>
+          <a:ln/>
         </p:spPr>
         <p:txBody>
           <a:bodyPr/>
@@ -4212,14 +3928,14 @@
       </p:sp>
       <p:sp>
         <p:nvSpPr>
-          <p:cNvPr id="14" name="Text 12"/>
-          <p:cNvSpPr/>
-          <p:nvPr/>
-        </p:nvSpPr>
-        <p:spPr>
-          <a:xfrm>
-            <a:off x="7421728" y="1417320"/>
-            <a:ext cx="1828800" cy="777240"/>
+          <p:cNvPr id="10" name="Text 7"/>
+          <p:cNvSpPr/>
+          <p:nvPr/>
+        </p:nvSpPr>
+        <p:spPr>
+          <a:xfrm>
+            <a:off x="6324448" y="5440680"/>
+            <a:ext cx="2362124" cy="502920"/>
           </a:xfrm>
           <a:prstGeom prst="rect">
             <a:avLst/>
@@ -4231,80 +3947,67 @@
           <a:bodyPr wrap="square" lIns="0" tIns="0" rIns="0" bIns="0" rtlCol="0" anchor="ctr"/>
           <a:lstStyle/>
           <a:p>
-            <a:pPr marL="0" indent="0" algn="ctr">
-              <a:buNone/>
-            </a:pPr>
-            <a:r>
-              <a:rPr lang="en-US" sz="1300" b="1" dirty="0">
-                <a:solidFill>
-                  <a:srgbClr val="1E293B"/>
-                </a:solidFill>
-                <a:latin typeface="Calibri" pitchFamily="34" charset="0"/>
-                <a:ea typeface="Calibri" pitchFamily="34" charset="-122"/>
-                <a:cs typeface="Calibri" pitchFamily="34" charset="-120"/>
-              </a:rPr>
-              <a:t>Plots</a:t>
-            </a:r>
-            <a:endParaRPr lang="en-US" sz="1300" dirty="0"/>
-          </a:p>
-        </p:txBody>
-      </p:sp>
-      <p:sp>
-        <p:nvSpPr>
-          <p:cNvPr id="15" name="Shape 13"/>
-          <p:cNvSpPr/>
-          <p:nvPr/>
-        </p:nvSpPr>
-        <p:spPr>
-          <a:xfrm>
-            <a:off x="9250528" y="1805940"/>
-            <a:ext cx="411480" cy="0"/>
-          </a:xfrm>
-          <a:prstGeom prst="line">
-            <a:avLst/>
-          </a:prstGeom>
-          <a:noFill/>
-          <a:ln w="19050">
-            <a:solidFill>
-              <a:srgbClr val="64748B"/>
-            </a:solidFill>
-            <a:prstDash val="solid"/>
-            <a:tailEnd type="triangle"/>
-          </a:ln>
-        </p:spPr>
-        <p:txBody>
-          <a:bodyPr/>
-          <a:lstStyle/>
-          <a:p>
-            <a:endParaRPr lang="en-IL"/>
-          </a:p>
-        </p:txBody>
-      </p:sp>
-      <p:sp>
-        <p:nvSpPr>
-          <p:cNvPr id="16" name="Shape 14"/>
-          <p:cNvSpPr/>
-          <p:nvPr/>
-        </p:nvSpPr>
-        <p:spPr>
-          <a:xfrm>
-            <a:off x="9662008" y="1417320"/>
-            <a:ext cx="1828800" cy="777240"/>
+            <a:pPr marL="0" indent="0">
+              <a:lnSpc>
+                <a:spcPct val="100000"/>
+              </a:lnSpc>
+              <a:buNone/>
+            </a:pPr>
+            <a:r>
+              <a:rPr lang="en-US" sz="1150" b="1" dirty="0">
+                <a:solidFill>
+                  <a:srgbClr val="15803D"/>
+                </a:solidFill>
+                <a:latin typeface="Calibri" pitchFamily="34" charset="0"/>
+                <a:ea typeface="Calibri" pitchFamily="34" charset="-122"/>
+                <a:cs typeface="Calibri" pitchFamily="34" charset="-120"/>
+              </a:rPr>
+              <a:t>Round-robin</a:t>
+            </a:r>
+            <a:endParaRPr lang="en-US" sz="1150" dirty="0"/>
+          </a:p>
+          <a:p>
+            <a:pPr marL="0" indent="0">
+              <a:lnSpc>
+                <a:spcPct val="100000"/>
+              </a:lnSpc>
+              <a:buNone/>
+            </a:pPr>
+            <a:r>
+              <a:rPr lang="en-US" sz="1050" dirty="0">
+                <a:solidFill>
+                  <a:srgbClr val="64748B"/>
+                </a:solidFill>
+                <a:latin typeface="Calibri" pitchFamily="34" charset="0"/>
+                <a:ea typeface="Calibri" pitchFamily="34" charset="-122"/>
+                <a:cs typeface="Calibri" pitchFamily="34" charset="-120"/>
+              </a:rPr>
+              <a:t>Fragile</a:t>
+            </a:r>
+            <a:endParaRPr lang="en-US" sz="1150" dirty="0"/>
+          </a:p>
+        </p:txBody>
+      </p:sp>
+      <p:sp>
+        <p:nvSpPr>
+          <p:cNvPr id="11" name="Shape 8"/>
+          <p:cNvSpPr/>
+          <p:nvPr/>
+        </p:nvSpPr>
+        <p:spPr>
+          <a:xfrm>
+            <a:off x="9006611" y="5440680"/>
+            <a:ext cx="2636444" cy="502920"/>
           </a:xfrm>
           <a:prstGeom prst="roundRect">
             <a:avLst>
-              <a:gd name="adj" fmla="val 9412"/>
+              <a:gd name="adj" fmla="val 10909"/>
             </a:avLst>
           </a:prstGeom>
           <a:solidFill>
             <a:srgbClr val="F1F5F9"/>
           </a:solidFill>
-          <a:ln w="12700">
-            <a:solidFill>
-              <a:srgbClr val="E2E8F0"/>
-            </a:solidFill>
-            <a:prstDash val="solid"/>
-          </a:ln>
+          <a:ln/>
         </p:spPr>
         <p:txBody>
           <a:bodyPr/>
@@ -4316,14 +4019,14 @@
       </p:sp>
       <p:sp>
         <p:nvSpPr>
-          <p:cNvPr id="17" name="Text 15"/>
-          <p:cNvSpPr/>
-          <p:nvPr/>
-        </p:nvSpPr>
-        <p:spPr>
-          <a:xfrm>
-            <a:off x="9662008" y="1417320"/>
-            <a:ext cx="1828800" cy="777240"/>
+          <p:cNvPr id="12" name="Text 9"/>
+          <p:cNvSpPr/>
+          <p:nvPr/>
+        </p:nvSpPr>
+        <p:spPr>
+          <a:xfrm>
+            <a:off x="9143771" y="5440680"/>
+            <a:ext cx="2362124" cy="502920"/>
           </a:xfrm>
           <a:prstGeom prst="rect">
             <a:avLst/>
@@ -4333,525 +4036,52 @@
         </p:spPr>
         <p:txBody>
           <a:bodyPr wrap="square" lIns="0" tIns="0" rIns="0" bIns="0" rtlCol="0" anchor="ctr"/>
-          <a:lstStyle/>
-          <a:p>
-            <a:pPr marL="0" indent="0" algn="ctr">
-              <a:buNone/>
-            </a:pPr>
-            <a:r>
-              <a:rPr lang="en-US" sz="1300" b="1" dirty="0">
-                <a:solidFill>
-                  <a:srgbClr val="1E293B"/>
-                </a:solidFill>
-                <a:latin typeface="Calibri" pitchFamily="34" charset="0"/>
-                <a:ea typeface="Calibri" pitchFamily="34" charset="-122"/>
-                <a:cs typeface="Calibri" pitchFamily="34" charset="-120"/>
-              </a:rPr>
-              <a:t>Conclusions</a:t>
-            </a:r>
-            <a:endParaRPr lang="en-US" sz="1300" dirty="0"/>
-          </a:p>
-        </p:txBody>
-      </p:sp>
-      <p:sp>
-        <p:nvSpPr>
-          <p:cNvPr id="18" name="Text 16"/>
-          <p:cNvSpPr/>
-          <p:nvPr/>
-        </p:nvSpPr>
-        <p:spPr>
-          <a:xfrm>
-            <a:off x="548640" y="2606040"/>
-            <a:ext cx="11094415" cy="365760"/>
-          </a:xfrm>
-          <a:prstGeom prst="rect">
-            <a:avLst/>
-          </a:prstGeom>
-          <a:noFill/>
-          <a:ln/>
-        </p:spPr>
-        <p:txBody>
-          <a:bodyPr wrap="square" lIns="0" tIns="0" rIns="0" bIns="0" rtlCol="0" anchor="ctr"/>
-          <a:lstStyle/>
-          <a:p>
-            <a:pPr marL="0" indent="0">
-              <a:buNone/>
-            </a:pPr>
-            <a:r>
-              <a:rPr lang="en-US" sz="1350" b="1" dirty="0">
-                <a:solidFill>
-                  <a:srgbClr val="1E293B"/>
-                </a:solidFill>
-                <a:latin typeface="Calibri" pitchFamily="34" charset="0"/>
-                <a:ea typeface="Calibri" pitchFamily="34" charset="-122"/>
-                <a:cs typeface="Calibri" pitchFamily="34" charset="-120"/>
-              </a:rPr>
-              <a:t>src/main.cpp</a:t>
-            </a:r>
-            <a:r>
-              <a:rPr lang="en-US" sz="1350" dirty="0">
-                <a:solidFill>
-                  <a:srgbClr val="1E293B"/>
-                </a:solidFill>
-                <a:latin typeface="Calibri" pitchFamily="34" charset="0"/>
-                <a:ea typeface="Calibri" pitchFamily="34" charset="-122"/>
-                <a:cs typeface="Calibri" pitchFamily="34" charset="-120"/>
-              </a:rPr>
-              <a:t> builds scenarios, runs them, and exports </a:t>
-            </a:r>
-            <a:r>
-              <a:rPr lang="en-US" sz="1350" b="1" dirty="0">
-                <a:solidFill>
-                  <a:srgbClr val="1E293B"/>
-                </a:solidFill>
-                <a:latin typeface="Calibri" pitchFamily="34" charset="0"/>
-                <a:ea typeface="Calibri" pitchFamily="34" charset="-122"/>
-                <a:cs typeface="Calibri" pitchFamily="34" charset="-120"/>
-              </a:rPr>
-              <a:t>results/simulation_results.csv</a:t>
-            </a:r>
-            <a:r>
-              <a:rPr lang="en-US" sz="1350" dirty="0">
-                <a:solidFill>
-                  <a:srgbClr val="1E293B"/>
-                </a:solidFill>
-                <a:latin typeface="Calibri" pitchFamily="34" charset="0"/>
-                <a:ea typeface="Calibri" pitchFamily="34" charset="-122"/>
-                <a:cs typeface="Calibri" pitchFamily="34" charset="-120"/>
-              </a:rPr>
-              <a:t>.</a:t>
-            </a:r>
-            <a:endParaRPr lang="en-US" sz="1350" dirty="0"/>
-          </a:p>
-        </p:txBody>
-      </p:sp>
-      <p:sp>
-        <p:nvSpPr>
-          <p:cNvPr id="19" name="Text 17"/>
-          <p:cNvSpPr/>
-          <p:nvPr/>
-        </p:nvSpPr>
-        <p:spPr>
-          <a:xfrm>
-            <a:off x="548640" y="2990088"/>
-            <a:ext cx="11094415" cy="365760"/>
-          </a:xfrm>
-          <a:prstGeom prst="rect">
-            <a:avLst/>
-          </a:prstGeom>
-          <a:noFill/>
-          <a:ln/>
-        </p:spPr>
-        <p:txBody>
-          <a:bodyPr wrap="square" lIns="0" tIns="0" rIns="0" bIns="0" rtlCol="0" anchor="ctr"/>
-          <a:lstStyle/>
-          <a:p>
-            <a:pPr marL="0" indent="0">
-              <a:buNone/>
-            </a:pPr>
-            <a:r>
-              <a:rPr lang="en-US" sz="1350" b="1" dirty="0">
-                <a:solidFill>
-                  <a:srgbClr val="1E293B"/>
-                </a:solidFill>
-                <a:latin typeface="Calibri" pitchFamily="34" charset="0"/>
-                <a:ea typeface="Calibri" pitchFamily="34" charset="-122"/>
-                <a:cs typeface="Calibri" pitchFamily="34" charset="-120"/>
-              </a:rPr>
-              <a:t>ExperimentRunner</a:t>
-            </a:r>
-            <a:r>
-              <a:rPr lang="en-US" sz="1350" dirty="0">
-                <a:solidFill>
-                  <a:srgbClr val="1E293B"/>
-                </a:solidFill>
-                <a:latin typeface="Calibri" pitchFamily="34" charset="0"/>
-                <a:ea typeface="Calibri" pitchFamily="34" charset="-122"/>
-                <a:cs typeface="Calibri" pitchFamily="34" charset="-120"/>
-              </a:rPr>
-              <a:t> creates all experiment scenarios.</a:t>
-            </a:r>
-            <a:endParaRPr lang="en-US" sz="1350" dirty="0"/>
-          </a:p>
-        </p:txBody>
-      </p:sp>
-      <p:sp>
-        <p:nvSpPr>
-          <p:cNvPr id="20" name="Shape 18"/>
-          <p:cNvSpPr/>
-          <p:nvPr/>
-        </p:nvSpPr>
-        <p:spPr>
-          <a:xfrm>
-            <a:off x="548640" y="3611880"/>
-            <a:ext cx="3576218" cy="1051560"/>
-          </a:xfrm>
-          <a:prstGeom prst="roundRect">
-            <a:avLst>
-              <a:gd name="adj" fmla="val 6087"/>
-            </a:avLst>
-          </a:prstGeom>
-          <a:solidFill>
-            <a:srgbClr val="F1F5F9"/>
-          </a:solidFill>
-          <a:ln/>
-        </p:spPr>
-        <p:txBody>
-          <a:bodyPr/>
-          <a:lstStyle/>
-          <a:p>
-            <a:endParaRPr lang="en-IL"/>
-          </a:p>
-        </p:txBody>
-      </p:sp>
-      <p:sp>
-        <p:nvSpPr>
-          <p:cNvPr id="21" name="Text 19"/>
-          <p:cNvSpPr/>
-          <p:nvPr/>
-        </p:nvSpPr>
-        <p:spPr>
-          <a:xfrm>
-            <a:off x="713232" y="3721608"/>
-            <a:ext cx="3247034" cy="457200"/>
-          </a:xfrm>
-          <a:prstGeom prst="rect">
-            <a:avLst/>
-          </a:prstGeom>
-          <a:noFill/>
-          <a:ln/>
-        </p:spPr>
-        <p:txBody>
-          <a:bodyPr wrap="square" lIns="0" tIns="0" rIns="0" bIns="0" rtlCol="0" anchor="t"/>
-          <a:lstStyle/>
-          <a:p>
-            <a:pPr marL="0" indent="0">
-              <a:buNone/>
-            </a:pPr>
-            <a:r>
-              <a:rPr lang="en-US" sz="1300" b="1" dirty="0">
-                <a:solidFill>
-                  <a:srgbClr val="2563EB"/>
-                </a:solidFill>
-                <a:latin typeface="Calibri" pitchFamily="34" charset="0"/>
-                <a:ea typeface="Calibri" pitchFamily="34" charset="-122"/>
-                <a:cs typeface="Calibri" pitchFamily="34" charset="-120"/>
-              </a:rPr>
-              <a:t>PowerKSimulator</a:t>
-            </a:r>
-            <a:endParaRPr lang="en-US" sz="1300" dirty="0"/>
-          </a:p>
-        </p:txBody>
-      </p:sp>
-      <p:sp>
-        <p:nvSpPr>
-          <p:cNvPr id="22" name="Text 20"/>
-          <p:cNvSpPr/>
-          <p:nvPr/>
-        </p:nvSpPr>
-        <p:spPr>
-          <a:xfrm>
-            <a:off x="713232" y="4178808"/>
-            <a:ext cx="3247034" cy="411480"/>
-          </a:xfrm>
-          <a:prstGeom prst="rect">
-            <a:avLst/>
-          </a:prstGeom>
-          <a:noFill/>
-          <a:ln/>
-        </p:spPr>
-        <p:txBody>
-          <a:bodyPr wrap="square" lIns="0" tIns="0" rIns="0" bIns="0" rtlCol="0" anchor="t"/>
-          <a:lstStyle/>
-          <a:p>
-            <a:pPr marL="0" indent="0">
-              <a:buNone/>
-            </a:pPr>
-            <a:r>
-              <a:rPr lang="en-US" sz="1150" dirty="0">
-                <a:solidFill>
-                  <a:srgbClr val="64748B"/>
-                </a:solidFill>
-                <a:latin typeface="Calibri" pitchFamily="34" charset="0"/>
-                <a:ea typeface="Calibri" pitchFamily="34" charset="-122"/>
-                <a:cs typeface="Calibri" pitchFamily="34" charset="-120"/>
-              </a:rPr>
-              <a:t>Random, Power-k, Absolute minimum</a:t>
-            </a:r>
-            <a:endParaRPr lang="en-US" sz="1150" dirty="0"/>
-          </a:p>
-        </p:txBody>
-      </p:sp>
-      <p:sp>
-        <p:nvSpPr>
-          <p:cNvPr id="23" name="Shape 21"/>
-          <p:cNvSpPr/>
-          <p:nvPr/>
-        </p:nvSpPr>
-        <p:spPr>
-          <a:xfrm>
-            <a:off x="4307738" y="3611880"/>
-            <a:ext cx="3576218" cy="1051560"/>
-          </a:xfrm>
-          <a:prstGeom prst="roundRect">
-            <a:avLst>
-              <a:gd name="adj" fmla="val 6087"/>
-            </a:avLst>
-          </a:prstGeom>
-          <a:solidFill>
-            <a:srgbClr val="F1F5F9"/>
-          </a:solidFill>
-          <a:ln/>
-        </p:spPr>
-        <p:txBody>
-          <a:bodyPr/>
-          <a:lstStyle/>
-          <a:p>
-            <a:endParaRPr lang="en-IL"/>
-          </a:p>
-        </p:txBody>
-      </p:sp>
-      <p:sp>
-        <p:nvSpPr>
-          <p:cNvPr id="24" name="Text 22"/>
-          <p:cNvSpPr/>
-          <p:nvPr/>
-        </p:nvSpPr>
-        <p:spPr>
-          <a:xfrm>
-            <a:off x="4472330" y="3721608"/>
-            <a:ext cx="3247034" cy="457200"/>
-          </a:xfrm>
-          <a:prstGeom prst="rect">
-            <a:avLst/>
-          </a:prstGeom>
-          <a:noFill/>
-          <a:ln/>
-        </p:spPr>
-        <p:txBody>
-          <a:bodyPr wrap="square" lIns="0" tIns="0" rIns="0" bIns="0" rtlCol="0" anchor="t"/>
-          <a:lstStyle/>
-          <a:p>
-            <a:pPr marL="0" indent="0">
-              <a:buNone/>
-            </a:pPr>
-            <a:r>
-              <a:rPr lang="en-US" sz="1300" b="1" dirty="0">
-                <a:solidFill>
-                  <a:srgbClr val="15803D"/>
-                </a:solidFill>
-                <a:latin typeface="Calibri" pitchFamily="34" charset="0"/>
-                <a:ea typeface="Calibri" pitchFamily="34" charset="-122"/>
-                <a:cs typeface="Calibri" pitchFamily="34" charset="-120"/>
-              </a:rPr>
-              <a:t>StatefulRoundRobinSimulator</a:t>
-            </a:r>
-            <a:endParaRPr lang="en-US" sz="1300" dirty="0"/>
-          </a:p>
-        </p:txBody>
-      </p:sp>
-      <p:sp>
-        <p:nvSpPr>
-          <p:cNvPr id="25" name="Text 23"/>
-          <p:cNvSpPr/>
-          <p:nvPr/>
-        </p:nvSpPr>
-        <p:spPr>
-          <a:xfrm>
-            <a:off x="4472330" y="4178808"/>
-            <a:ext cx="3247034" cy="411480"/>
-          </a:xfrm>
-          <a:prstGeom prst="rect">
-            <a:avLst/>
-          </a:prstGeom>
-          <a:noFill/>
-          <a:ln/>
-        </p:spPr>
-        <p:txBody>
-          <a:bodyPr wrap="square" lIns="0" tIns="0" rIns="0" bIns="0" rtlCol="0" anchor="t"/>
-          <a:lstStyle/>
-          <a:p>
-            <a:pPr marL="0" indent="0">
-              <a:buNone/>
-            </a:pPr>
-            <a:r>
-              <a:rPr lang="en-US" sz="1150" dirty="0">
-                <a:solidFill>
-                  <a:srgbClr val="64748B"/>
-                </a:solidFill>
-                <a:latin typeface="Calibri" pitchFamily="34" charset="0"/>
-                <a:ea typeface="Calibri" pitchFamily="34" charset="-122"/>
-                <a:cs typeface="Calibri" pitchFamily="34" charset="-120"/>
-              </a:rPr>
-              <a:t>Round-robin</a:t>
-            </a:r>
-            <a:endParaRPr lang="en-US" sz="1150" dirty="0"/>
-          </a:p>
-        </p:txBody>
-      </p:sp>
-      <p:sp>
-        <p:nvSpPr>
-          <p:cNvPr id="26" name="Shape 24"/>
-          <p:cNvSpPr/>
-          <p:nvPr/>
-        </p:nvSpPr>
-        <p:spPr>
-          <a:xfrm>
-            <a:off x="8066837" y="3611880"/>
-            <a:ext cx="3576218" cy="1051560"/>
-          </a:xfrm>
-          <a:prstGeom prst="roundRect">
-            <a:avLst>
-              <a:gd name="adj" fmla="val 6087"/>
-            </a:avLst>
-          </a:prstGeom>
-          <a:solidFill>
-            <a:srgbClr val="F1F5F9"/>
-          </a:solidFill>
-          <a:ln/>
-        </p:spPr>
-        <p:txBody>
-          <a:bodyPr/>
-          <a:lstStyle/>
-          <a:p>
-            <a:endParaRPr lang="en-IL"/>
-          </a:p>
-        </p:txBody>
-      </p:sp>
-      <p:sp>
-        <p:nvSpPr>
-          <p:cNvPr id="27" name="Text 25"/>
-          <p:cNvSpPr/>
-          <p:nvPr/>
-        </p:nvSpPr>
-        <p:spPr>
-          <a:xfrm>
-            <a:off x="8231429" y="3721608"/>
-            <a:ext cx="3247034" cy="457200"/>
-          </a:xfrm>
-          <a:prstGeom prst="rect">
-            <a:avLst/>
-          </a:prstGeom>
-          <a:noFill/>
-          <a:ln/>
-        </p:spPr>
-        <p:txBody>
-          <a:bodyPr wrap="square" lIns="0" tIns="0" rIns="0" bIns="0" rtlCol="0" anchor="t"/>
-          <a:lstStyle/>
-          <a:p>
-            <a:pPr marL="0" indent="0">
-              <a:buNone/>
-            </a:pPr>
-            <a:r>
-              <a:rPr lang="en-US" sz="1300" b="1" dirty="0">
-                <a:solidFill>
-                  <a:srgbClr val="C2660D"/>
-                </a:solidFill>
-                <a:latin typeface="Calibri" pitchFamily="34" charset="0"/>
-                <a:ea typeface="Calibri" pitchFamily="34" charset="-122"/>
-                <a:cs typeface="Calibri" pitchFamily="34" charset="-120"/>
-              </a:rPr>
-              <a:t>HeapSizeSPowerOfKSimulator</a:t>
-            </a:r>
-            <a:endParaRPr lang="en-US" sz="1300" dirty="0"/>
-          </a:p>
-        </p:txBody>
-      </p:sp>
-      <p:sp>
-        <p:nvSpPr>
-          <p:cNvPr id="28" name="Text 26"/>
-          <p:cNvSpPr/>
-          <p:nvPr/>
-        </p:nvSpPr>
-        <p:spPr>
-          <a:xfrm>
-            <a:off x="8231429" y="4178808"/>
-            <a:ext cx="3247034" cy="411480"/>
-          </a:xfrm>
-          <a:prstGeom prst="rect">
-            <a:avLst/>
-          </a:prstGeom>
-          <a:noFill/>
-          <a:ln/>
-        </p:spPr>
-        <p:txBody>
-          <a:bodyPr wrap="square" lIns="0" tIns="0" rIns="0" bIns="0" rtlCol="0" anchor="t"/>
-          <a:lstStyle/>
-          <a:p>
-            <a:pPr marL="0" indent="0">
-              <a:buNone/>
-            </a:pPr>
-            <a:r>
-              <a:rPr lang="en-US" sz="1150" dirty="0">
-                <a:solidFill>
-                  <a:srgbClr val="64748B"/>
-                </a:solidFill>
-                <a:latin typeface="Calibri" pitchFamily="34" charset="0"/>
-                <a:ea typeface="Calibri" pitchFamily="34" charset="-122"/>
-                <a:cs typeface="Calibri" pitchFamily="34" charset="-120"/>
-              </a:rPr>
-              <a:t>Heap size s / full heap</a:t>
-            </a:r>
-            <a:endParaRPr lang="en-US" sz="1150" dirty="0"/>
-          </a:p>
-        </p:txBody>
-      </p:sp>
-      <p:sp>
-        <p:nvSpPr>
-          <p:cNvPr id="29" name="Text 27"/>
-          <p:cNvSpPr/>
-          <p:nvPr/>
-        </p:nvSpPr>
-        <p:spPr>
-          <a:xfrm>
-            <a:off x="548640" y="4892040"/>
-            <a:ext cx="11094415" cy="640080"/>
-          </a:xfrm>
-          <a:prstGeom prst="rect">
-            <a:avLst/>
-          </a:prstGeom>
-          <a:noFill/>
-          <a:ln/>
-        </p:spPr>
-        <p:txBody>
-          <a:bodyPr wrap="square" lIns="0" tIns="0" rIns="0" bIns="0" rtlCol="0" anchor="t"/>
           <a:lstStyle/>
           <a:p>
             <a:pPr marL="0" indent="0">
               <a:lnSpc>
-                <a:spcPct val="115000"/>
+                <a:spcPct val="100000"/>
               </a:lnSpc>
               <a:buNone/>
             </a:pPr>
             <a:r>
-              <a:rPr lang="en-US" sz="1350" b="1" dirty="0">
-                <a:solidFill>
-                  <a:srgbClr val="1E293B"/>
-                </a:solidFill>
-                <a:latin typeface="Calibri" pitchFamily="34" charset="0"/>
-                <a:ea typeface="Calibri" pitchFamily="34" charset="-122"/>
-                <a:cs typeface="Calibri" pitchFamily="34" charset="-120"/>
-              </a:rPr>
-              <a:t>scripts/plot_results.py</a:t>
-            </a:r>
-            <a:r>
-              <a:rPr lang="en-US" sz="1350" dirty="0">
-                <a:solidFill>
-                  <a:srgbClr val="1E293B"/>
-                </a:solidFill>
-                <a:latin typeface="Calibri" pitchFamily="34" charset="0"/>
-                <a:ea typeface="Calibri" pitchFamily="34" charset="-122"/>
-                <a:cs typeface="Calibri" pitchFamily="34" charset="-120"/>
-              </a:rPr>
-              <a:t> reads the CSV and creates the plots. The deck uses repository outputs only.</a:t>
-            </a:r>
-            <a:endParaRPr lang="en-US" sz="1350" dirty="0"/>
-          </a:p>
-        </p:txBody>
-      </p:sp>
-      <p:sp>
-        <p:nvSpPr>
-          <p:cNvPr id="30" name="Shape 28"/>
+              <a:rPr lang="en-US" sz="1150" b="1" dirty="0">
+                <a:solidFill>
+                  <a:srgbClr val="C2660D"/>
+                </a:solidFill>
+                <a:latin typeface="Calibri" pitchFamily="34" charset="0"/>
+                <a:ea typeface="Calibri" pitchFamily="34" charset="-122"/>
+                <a:cs typeface="Calibri" pitchFamily="34" charset="-120"/>
+              </a:rPr>
+              <a:t>Power-2</a:t>
+            </a:r>
+            <a:endParaRPr lang="en-US" sz="1150" dirty="0"/>
+          </a:p>
+          <a:p>
+            <a:pPr marL="0" indent="0">
+              <a:lnSpc>
+                <a:spcPct val="100000"/>
+              </a:lnSpc>
+              <a:buNone/>
+            </a:pPr>
+            <a:r>
+              <a:rPr lang="en-US" sz="1050" dirty="0">
+                <a:solidFill>
+                  <a:srgbClr val="64748B"/>
+                </a:solidFill>
+                <a:latin typeface="Calibri" pitchFamily="34" charset="0"/>
+                <a:ea typeface="Calibri" pitchFamily="34" charset="-122"/>
+                <a:cs typeface="Calibri" pitchFamily="34" charset="-120"/>
+              </a:rPr>
+              <a:t>Simple, stateless, robust</a:t>
+            </a:r>
+            <a:endParaRPr lang="en-US" sz="1150" dirty="0"/>
+          </a:p>
+        </p:txBody>
+      </p:sp>
+      <p:sp>
+        <p:nvSpPr>
+          <p:cNvPr id="13" name="Shape 10"/>
           <p:cNvSpPr/>
           <p:nvPr/>
         </p:nvSpPr>
@@ -4880,7 +4110,7 @@
       </p:sp>
       <p:sp>
         <p:nvSpPr>
-          <p:cNvPr id="31" name="Text 29"/>
+          <p:cNvPr id="14" name="Text 11"/>
           <p:cNvSpPr/>
           <p:nvPr/>
         </p:nvSpPr>
@@ -4911,7 +4141,7 @@
                 <a:ea typeface="Calibri" pitchFamily="34" charset="-122"/>
                 <a:cs typeface="Calibri" pitchFamily="34" charset="-120"/>
               </a:rPr>
-              <a:t>The project is structured as a repeatable performance-evaluation pipeline, with a built-in ability to run one costume simulation.</a:t>
+              <a:t>Under weighted, initialized conditions, Power-2 is the strongest simple default.</a:t>
             </a:r>
             <a:endParaRPr lang="en-US" sz="1350" dirty="0"/>
           </a:p>
@@ -4927,7 +4157,7 @@
 
 <file path=ppt/slides/slide14.xml><?xml version="1.0" encoding="utf-8"?>
 <p:sld xmlns:a="http://schemas.openxmlformats.org/drawingml/2006/main" xmlns:r="http://schemas.openxmlformats.org/officeDocument/2006/relationships" xmlns:p="http://schemas.openxmlformats.org/presentationml/2006/main">
-  <p:cSld name="Slide 14">
+  <p:cSld name="Slide 15">
     <p:bg>
       <p:bgPr>
         <a:solidFill>
@@ -5286,7 +4516,7 @@
                 <a:ea typeface="Calibri" pitchFamily="34" charset="-122"/>
                 <a:cs typeface="Calibri" pitchFamily="34" charset="-120"/>
               </a:rPr>
-              <a:t>14</a:t>
+              <a:t>15</a:t>
             </a:r>
             <a:endParaRPr lang="en-US" sz="900" dirty="0"/>
           </a:p>
@@ -5443,9 +4673,8 @@
                 <a:ea typeface="Calibri" pitchFamily="34" charset="-122"/>
                 <a:cs typeface="Calibri" pitchFamily="34" charset="-120"/>
               </a:rPr>
-              <a:t>Each arriving ball must be assigned to a bin immediately — no batching, no undo.</a:t>
-            </a:r>
-            <a:endParaRPr lang="en-US" sz="1650" dirty="0"/>
+              <a:t>The problem: balls arrive one by one, and each ball must be placed into one of the available bins.</a:t>
+            </a:r>
           </a:p>
           <a:p>
             <a:pPr marL="228600" indent="-228600">
@@ -5467,7 +4696,7 @@
                 <a:ea typeface="Calibri" pitchFamily="34" charset="-122"/>
                 <a:cs typeface="Calibri" pitchFamily="34" charset="-120"/>
               </a:rPr>
-              <a:t>Objective: minimize the maximum load and the imbalance across bins.</a:t>
+              <a:t>Each arriving ball must be assigned to a bin immediately — no batching, no undo.</a:t>
             </a:r>
             <a:endParaRPr lang="en-US" sz="1650" dirty="0"/>
           </a:p>
@@ -5491,7 +4720,7 @@
                 <a:ea typeface="Calibri" pitchFamily="34" charset="-122"/>
                 <a:cs typeface="Calibri" pitchFamily="34" charset="-120"/>
               </a:rPr>
-              <a:t>Systems analogy: assigning jobs, network flows, or tasks to servers, links, or queues.</a:t>
+              <a:t>Objective: minimize the maximum load and the imbalance across bins.</a:t>
             </a:r>
             <a:endParaRPr lang="en-US" sz="1650" dirty="0"/>
           </a:p>
@@ -5515,6 +4744,30 @@
                 <a:ea typeface="Calibri" pitchFamily="34" charset="-122"/>
                 <a:cs typeface="Calibri" pitchFamily="34" charset="-120"/>
               </a:rPr>
+              <a:t>Systems analogy: assigning jobs, network flows, or tasks to servers, links, or queues.</a:t>
+            </a:r>
+            <a:endParaRPr lang="en-US" sz="1650" dirty="0"/>
+          </a:p>
+          <a:p>
+            <a:pPr marL="228600" indent="-228600">
+              <a:lnSpc>
+                <a:spcPct val="115000"/>
+              </a:lnSpc>
+              <a:spcAft>
+                <a:spcPts val="2200"/>
+              </a:spcAft>
+              <a:buSzPct val="100000"/>
+              <a:buChar char="•"/>
+            </a:pPr>
+            <a:r>
+              <a:rPr lang="en-US" sz="1650" dirty="0">
+                <a:solidFill>
+                  <a:srgbClr val="1E293B"/>
+                </a:solidFill>
+                <a:latin typeface="Calibri" pitchFamily="34" charset="0"/>
+                <a:ea typeface="Calibri" pitchFamily="34" charset="-122"/>
+                <a:cs typeface="Calibri" pitchFamily="34" charset="-120"/>
+              </a:rPr>
               <a:t>Central question: how much state or load information should the allocator use?</a:t>
             </a:r>
             <a:endParaRPr lang="en-US" sz="1650" dirty="0"/>
@@ -5985,7 +5238,7 @@
                 <a:ea typeface="Calibri" pitchFamily="34" charset="-122"/>
                 <a:cs typeface="Calibri" pitchFamily="34" charset="-120"/>
               </a:rPr>
-              <a:t>bins start at different loads</a:t>
+              <a:t>bins can start at different loads</a:t>
             </a:r>
             <a:endParaRPr lang="en-US" sz="1100" dirty="0"/>
           </a:p>
@@ -6068,6 +5321,861 @@
 </file>
 
 <file path=ppt/slides/slide3.xml><?xml version="1.0" encoding="utf-8"?>
+<p:sld xmlns:a="http://schemas.openxmlformats.org/drawingml/2006/main" xmlns:r="http://schemas.openxmlformats.org/officeDocument/2006/relationships" xmlns:p="http://schemas.openxmlformats.org/presentationml/2006/main">
+  <p:cSld name="Slide 6">
+    <p:bg>
+      <p:bgPr>
+        <a:solidFill>
+          <a:srgbClr val="FFFFFF"/>
+        </a:solidFill>
+        <a:effectLst/>
+      </p:bgPr>
+    </p:bg>
+    <p:spTree>
+      <p:nvGrpSpPr>
+        <p:cNvPr id="1" name=""/>
+        <p:cNvGrpSpPr/>
+        <p:nvPr/>
+      </p:nvGrpSpPr>
+      <p:grpSpPr>
+        <a:xfrm>
+          <a:off x="0" y="0"/>
+          <a:ext cx="0" cy="0"/>
+          <a:chOff x="0" y="0"/>
+          <a:chExt cx="0" cy="0"/>
+        </a:xfrm>
+      </p:grpSpPr>
+      <p:sp>
+        <p:nvSpPr>
+          <p:cNvPr id="2" name="Text 0"/>
+          <p:cNvSpPr/>
+          <p:nvPr/>
+        </p:nvSpPr>
+        <p:spPr>
+          <a:xfrm>
+            <a:off x="548640" y="411480"/>
+            <a:ext cx="10515600" cy="594360"/>
+          </a:xfrm>
+          <a:prstGeom prst="rect">
+            <a:avLst/>
+          </a:prstGeom>
+          <a:noFill/>
+          <a:ln/>
+        </p:spPr>
+        <p:txBody>
+          <a:bodyPr wrap="square" lIns="0" tIns="0" rIns="0" bIns="0" rtlCol="0" anchor="ctr"/>
+          <a:lstStyle/>
+          <a:p>
+            <a:pPr marL="0" indent="0" algn="l">
+              <a:buNone/>
+            </a:pPr>
+            <a:r>
+              <a:rPr lang="en-US" sz="2900" b="1" dirty="0">
+                <a:solidFill>
+                  <a:srgbClr val="1E293B"/>
+                </a:solidFill>
+                <a:latin typeface="Cambria" pitchFamily="34" charset="0"/>
+                <a:ea typeface="Cambria" pitchFamily="34" charset="-122"/>
+                <a:cs typeface="Cambria" pitchFamily="34" charset="-120"/>
+              </a:rPr>
+              <a:t>Theory Anchor: Why Power-2 Matters</a:t>
+            </a:r>
+            <a:endParaRPr lang="en-US" sz="2900" dirty="0"/>
+          </a:p>
+        </p:txBody>
+      </p:sp>
+      <p:sp>
+        <p:nvSpPr>
+          <p:cNvPr id="3" name="Text 1"/>
+          <p:cNvSpPr/>
+          <p:nvPr/>
+        </p:nvSpPr>
+        <p:spPr>
+          <a:xfrm>
+            <a:off x="11505895" y="6473952"/>
+            <a:ext cx="411480" cy="274320"/>
+          </a:xfrm>
+          <a:prstGeom prst="rect">
+            <a:avLst/>
+          </a:prstGeom>
+          <a:noFill/>
+          <a:ln/>
+        </p:spPr>
+        <p:txBody>
+          <a:bodyPr wrap="square" lIns="0" tIns="0" rIns="0" bIns="0" rtlCol="0" anchor="ctr"/>
+          <a:lstStyle/>
+          <a:p>
+            <a:pPr marL="0" indent="0" algn="r">
+              <a:buNone/>
+            </a:pPr>
+            <a:r>
+              <a:rPr lang="en-US" sz="900" dirty="0">
+                <a:solidFill>
+                  <a:srgbClr val="64748B"/>
+                </a:solidFill>
+                <a:latin typeface="Calibri" pitchFamily="34" charset="0"/>
+                <a:ea typeface="Calibri" pitchFamily="34" charset="-122"/>
+                <a:cs typeface="Calibri" pitchFamily="34" charset="-120"/>
+              </a:rPr>
+              <a:t>6</a:t>
+            </a:r>
+            <a:endParaRPr lang="en-US" sz="900" dirty="0"/>
+          </a:p>
+        </p:txBody>
+      </p:sp>
+      <p:sp>
+        <p:nvSpPr>
+          <p:cNvPr id="4" name="Text 2"/>
+          <p:cNvSpPr/>
+          <p:nvPr/>
+        </p:nvSpPr>
+        <p:spPr>
+          <a:xfrm>
+            <a:off x="548640" y="1417320"/>
+            <a:ext cx="6309360" cy="4480560"/>
+          </a:xfrm>
+          <a:prstGeom prst="rect">
+            <a:avLst/>
+          </a:prstGeom>
+          <a:noFill/>
+          <a:ln/>
+        </p:spPr>
+        <p:txBody>
+          <a:bodyPr wrap="square" lIns="0" tIns="0" rIns="0" bIns="0" rtlCol="0" anchor="t"/>
+          <a:lstStyle/>
+          <a:p>
+            <a:pPr marL="228600" indent="-228600">
+              <a:lnSpc>
+                <a:spcPct val="118000"/>
+              </a:lnSpc>
+              <a:spcAft>
+                <a:spcPts val="2400"/>
+              </a:spcAft>
+              <a:buSzPct val="100000"/>
+              <a:buChar char="•"/>
+            </a:pPr>
+            <a:r>
+              <a:rPr lang="en-US" sz="1650" dirty="0">
+                <a:solidFill>
+                  <a:srgbClr val="1E293B"/>
+                </a:solidFill>
+                <a:latin typeface="Calibri" pitchFamily="34" charset="0"/>
+                <a:ea typeface="Calibri" pitchFamily="34" charset="-122"/>
+                <a:cs typeface="Calibri" pitchFamily="34" charset="-120"/>
+              </a:rPr>
+              <a:t>One random choice leaves a small set of bins overloaded — the classic balls-in-bins bottleneck.</a:t>
+            </a:r>
+            <a:endParaRPr lang="en-US" sz="1650" dirty="0"/>
+          </a:p>
+          <a:p>
+            <a:pPr marL="228600" indent="-228600">
+              <a:lnSpc>
+                <a:spcPct val="118000"/>
+              </a:lnSpc>
+              <a:spcAft>
+                <a:spcPts val="2400"/>
+              </a:spcAft>
+              <a:buSzPct val="100000"/>
+              <a:buChar char="•"/>
+            </a:pPr>
+            <a:r>
+              <a:rPr lang="en-US" sz="1650" dirty="0">
+                <a:solidFill>
+                  <a:srgbClr val="1E293B"/>
+                </a:solidFill>
+                <a:latin typeface="Calibri" pitchFamily="34" charset="0"/>
+                <a:ea typeface="Calibri" pitchFamily="34" charset="-122"/>
+                <a:cs typeface="Calibri" pitchFamily="34" charset="-120"/>
+              </a:rPr>
+              <a:t>Sampling just two bins and keeping the less-loaded one cuts that bottleneck exponentially, not just by a constant factor.</a:t>
+            </a:r>
+            <a:endParaRPr lang="en-US" sz="1650" dirty="0"/>
+          </a:p>
+          <a:p>
+            <a:pPr marL="228600" indent="-228600">
+              <a:lnSpc>
+                <a:spcPct val="118000"/>
+              </a:lnSpc>
+              <a:spcAft>
+                <a:spcPts val="2400"/>
+              </a:spcAft>
+              <a:buSzPct val="100000"/>
+              <a:buChar char="•"/>
+            </a:pPr>
+            <a:r>
+              <a:rPr lang="en-US" sz="1650" dirty="0">
+                <a:solidFill>
+                  <a:srgbClr val="1E293B"/>
+                </a:solidFill>
+                <a:latin typeface="Calibri" pitchFamily="34" charset="0"/>
+                <a:ea typeface="Calibri" pitchFamily="34" charset="-122"/>
+                <a:cs typeface="Calibri" pitchFamily="34" charset="-120"/>
+              </a:rPr>
+              <a:t>This is the power-of-two-choices result (Mitzenmacher, 2001): a couple bits of local information go a very long way.</a:t>
+            </a:r>
+            <a:endParaRPr lang="en-US" sz="1650" dirty="0"/>
+          </a:p>
+          <a:p>
+            <a:pPr marL="228600" indent="-228600">
+              <a:lnSpc>
+                <a:spcPct val="118000"/>
+              </a:lnSpc>
+              <a:spcAft>
+                <a:spcPts val="2400"/>
+              </a:spcAft>
+              <a:buSzPct val="100000"/>
+              <a:buChar char="•"/>
+            </a:pPr>
+            <a:r>
+              <a:rPr lang="en-US" sz="1650" dirty="0">
+                <a:solidFill>
+                  <a:srgbClr val="1E293B"/>
+                </a:solidFill>
+                <a:latin typeface="Calibri" pitchFamily="34" charset="0"/>
+                <a:ea typeface="Calibri" pitchFamily="34" charset="-122"/>
+                <a:cs typeface="Calibri" pitchFamily="34" charset="-120"/>
+              </a:rPr>
+              <a:t>Beyond two choices, more sampling keeps helping, but only by changing the base of an already-tiny logarithm — diminishing returns, fast.</a:t>
+            </a:r>
+            <a:endParaRPr lang="en-US" sz="1650" dirty="0"/>
+          </a:p>
+        </p:txBody>
+      </p:sp>
+      <p:sp>
+        <p:nvSpPr>
+          <p:cNvPr id="5" name="Shape 3"/>
+          <p:cNvSpPr/>
+          <p:nvPr/>
+        </p:nvSpPr>
+        <p:spPr>
+          <a:xfrm>
+            <a:off x="7178040" y="1325880"/>
+            <a:ext cx="4465015" cy="2788920"/>
+          </a:xfrm>
+          <a:prstGeom prst="roundRect">
+            <a:avLst>
+              <a:gd name="adj" fmla="val 2951"/>
+            </a:avLst>
+          </a:prstGeom>
+          <a:solidFill>
+            <a:srgbClr val="E8EFFD"/>
+          </a:solidFill>
+          <a:ln/>
+        </p:spPr>
+        <p:txBody>
+          <a:bodyPr/>
+          <a:lstStyle/>
+          <a:p>
+            <a:endParaRPr lang="en-IL"/>
+          </a:p>
+        </p:txBody>
+      </p:sp>
+      <p:sp>
+        <p:nvSpPr>
+          <p:cNvPr id="6" name="Text 4"/>
+          <p:cNvSpPr/>
+          <p:nvPr/>
+        </p:nvSpPr>
+        <p:spPr>
+          <a:xfrm>
+            <a:off x="7434072" y="1481328"/>
+            <a:ext cx="3952951" cy="274320"/>
+          </a:xfrm>
+          <a:prstGeom prst="rect">
+            <a:avLst/>
+          </a:prstGeom>
+          <a:noFill/>
+          <a:ln/>
+        </p:spPr>
+        <p:txBody>
+          <a:bodyPr wrap="square" lIns="0" tIns="0" rIns="0" bIns="0" rtlCol="0" anchor="ctr"/>
+          <a:lstStyle/>
+          <a:p>
+            <a:pPr marL="0" indent="0">
+              <a:buNone/>
+            </a:pPr>
+            <a:r>
+              <a:rPr lang="en-US" sz="1000" b="1" kern="0" spc="100" dirty="0">
+                <a:solidFill>
+                  <a:srgbClr val="2563EB"/>
+                </a:solidFill>
+                <a:latin typeface="Calibri" pitchFamily="34" charset="0"/>
+                <a:ea typeface="Calibri" pitchFamily="34" charset="-122"/>
+                <a:cs typeface="Calibri" pitchFamily="34" charset="-120"/>
+              </a:rPr>
+              <a:t>MAX LOAD, n BALLS INTO n BINS (WHP)</a:t>
+            </a:r>
+            <a:endParaRPr lang="en-US" sz="1000" dirty="0"/>
+          </a:p>
+        </p:txBody>
+      </p:sp>
+      <p:sp>
+        <p:nvSpPr>
+          <p:cNvPr id="7" name="Text 5"/>
+          <p:cNvSpPr/>
+          <p:nvPr/>
+        </p:nvSpPr>
+        <p:spPr>
+          <a:xfrm>
+            <a:off x="7434072" y="1828800"/>
+            <a:ext cx="3952951" cy="237744"/>
+          </a:xfrm>
+          <a:prstGeom prst="rect">
+            <a:avLst/>
+          </a:prstGeom>
+          <a:noFill/>
+          <a:ln/>
+        </p:spPr>
+        <p:txBody>
+          <a:bodyPr wrap="square" lIns="0" tIns="0" rIns="0" bIns="0" rtlCol="0" anchor="ctr"/>
+          <a:lstStyle/>
+          <a:p>
+            <a:pPr marL="0" indent="0">
+              <a:buNone/>
+            </a:pPr>
+            <a:r>
+              <a:rPr lang="en-US" sz="1150" b="1" dirty="0">
+                <a:solidFill>
+                  <a:srgbClr val="475569"/>
+                </a:solidFill>
+                <a:latin typeface="Calibri" pitchFamily="34" charset="0"/>
+                <a:ea typeface="Calibri" pitchFamily="34" charset="-122"/>
+                <a:cs typeface="Calibri" pitchFamily="34" charset="-120"/>
+              </a:rPr>
+              <a:t>1 random choice</a:t>
+            </a:r>
+            <a:endParaRPr lang="en-US" sz="1150" dirty="0"/>
+          </a:p>
+        </p:txBody>
+      </p:sp>
+      <p:sp>
+        <p:nvSpPr>
+          <p:cNvPr id="8" name="Text 6"/>
+          <p:cNvSpPr/>
+          <p:nvPr/>
+        </p:nvSpPr>
+        <p:spPr>
+          <a:xfrm>
+            <a:off x="7434072" y="2057400"/>
+            <a:ext cx="3952951" cy="320040"/>
+          </a:xfrm>
+          <a:prstGeom prst="rect">
+            <a:avLst/>
+          </a:prstGeom>
+          <a:noFill/>
+          <a:ln/>
+        </p:spPr>
+        <p:txBody>
+          <a:bodyPr wrap="square" lIns="0" tIns="0" rIns="0" bIns="0" rtlCol="0" anchor="ctr"/>
+          <a:lstStyle/>
+          <a:p>
+            <a:pPr marL="0" indent="0">
+              <a:buNone/>
+            </a:pPr>
+            <a:r>
+              <a:rPr lang="en-US" sz="1700" b="1" dirty="0">
+                <a:solidFill>
+                  <a:srgbClr val="1E293B"/>
+                </a:solidFill>
+                <a:latin typeface="Cambria" pitchFamily="34" charset="0"/>
+                <a:ea typeface="Cambria" pitchFamily="34" charset="-122"/>
+                <a:cs typeface="Cambria" pitchFamily="34" charset="-120"/>
+              </a:rPr>
+              <a:t>Θ( log n / log log n )</a:t>
+            </a:r>
+            <a:endParaRPr lang="en-US" sz="1700" dirty="0"/>
+          </a:p>
+        </p:txBody>
+      </p:sp>
+      <p:sp>
+        <p:nvSpPr>
+          <p:cNvPr id="9" name="Text 7"/>
+          <p:cNvSpPr/>
+          <p:nvPr/>
+        </p:nvSpPr>
+        <p:spPr>
+          <a:xfrm>
+            <a:off x="7434072" y="2359152"/>
+            <a:ext cx="3952951" cy="201168"/>
+          </a:xfrm>
+          <a:prstGeom prst="rect">
+            <a:avLst/>
+          </a:prstGeom>
+          <a:noFill/>
+          <a:ln/>
+        </p:spPr>
+        <p:txBody>
+          <a:bodyPr wrap="square" lIns="0" tIns="0" rIns="0" bIns="0" rtlCol="0" anchor="ctr"/>
+          <a:lstStyle/>
+          <a:p>
+            <a:pPr marL="0" indent="0">
+              <a:buNone/>
+            </a:pPr>
+            <a:r>
+              <a:rPr lang="en-US" sz="950" i="1" dirty="0">
+                <a:solidFill>
+                  <a:srgbClr val="64748B"/>
+                </a:solidFill>
+                <a:latin typeface="Calibri" pitchFamily="34" charset="0"/>
+                <a:ea typeface="Calibri" pitchFamily="34" charset="-122"/>
+                <a:cs typeface="Calibri" pitchFamily="34" charset="-120"/>
+              </a:rPr>
+              <a:t>Propositions 2 &amp; 5</a:t>
+            </a:r>
+            <a:endParaRPr lang="en-US" sz="950" dirty="0"/>
+          </a:p>
+        </p:txBody>
+      </p:sp>
+      <p:sp>
+        <p:nvSpPr>
+          <p:cNvPr id="10" name="Text 8"/>
+          <p:cNvSpPr/>
+          <p:nvPr/>
+        </p:nvSpPr>
+        <p:spPr>
+          <a:xfrm>
+            <a:off x="7434072" y="2542032"/>
+            <a:ext cx="3952951" cy="237744"/>
+          </a:xfrm>
+          <a:prstGeom prst="rect">
+            <a:avLst/>
+          </a:prstGeom>
+          <a:noFill/>
+          <a:ln/>
+        </p:spPr>
+        <p:txBody>
+          <a:bodyPr wrap="square" lIns="0" tIns="0" rIns="0" bIns="0" rtlCol="0" anchor="ctr"/>
+          <a:lstStyle/>
+          <a:p>
+            <a:pPr marL="0" indent="0">
+              <a:buNone/>
+            </a:pPr>
+            <a:r>
+              <a:rPr lang="en-US" sz="1150" b="1" dirty="0">
+                <a:solidFill>
+                  <a:srgbClr val="2563EB"/>
+                </a:solidFill>
+                <a:latin typeface="Calibri" pitchFamily="34" charset="0"/>
+                <a:ea typeface="Calibri" pitchFamily="34" charset="-122"/>
+                <a:cs typeface="Calibri" pitchFamily="34" charset="-120"/>
+              </a:rPr>
+              <a:t>2 choices — Power-2</a:t>
+            </a:r>
+            <a:endParaRPr lang="en-US" sz="1150" dirty="0"/>
+          </a:p>
+        </p:txBody>
+      </p:sp>
+      <p:sp>
+        <p:nvSpPr>
+          <p:cNvPr id="11" name="Text 9"/>
+          <p:cNvSpPr/>
+          <p:nvPr/>
+        </p:nvSpPr>
+        <p:spPr>
+          <a:xfrm>
+            <a:off x="7434072" y="2770632"/>
+            <a:ext cx="3952951" cy="320040"/>
+          </a:xfrm>
+          <a:prstGeom prst="rect">
+            <a:avLst/>
+          </a:prstGeom>
+          <a:noFill/>
+          <a:ln/>
+        </p:spPr>
+        <p:txBody>
+          <a:bodyPr wrap="square" lIns="0" tIns="0" rIns="0" bIns="0" rtlCol="0" anchor="ctr"/>
+          <a:lstStyle/>
+          <a:p>
+            <a:pPr marL="0" indent="0">
+              <a:buNone/>
+            </a:pPr>
+            <a:r>
+              <a:rPr lang="en-US" sz="1700" b="1" dirty="0">
+                <a:solidFill>
+                  <a:srgbClr val="1E293B"/>
+                </a:solidFill>
+                <a:latin typeface="Cambria" pitchFamily="34" charset="0"/>
+                <a:ea typeface="Cambria" pitchFamily="34" charset="-122"/>
+                <a:cs typeface="Cambria" pitchFamily="34" charset="-120"/>
+              </a:rPr>
+              <a:t>log</a:t>
+            </a:r>
+            <a:r>
+              <a:rPr lang="en-US" sz="1700" b="1" baseline="-40000" dirty="0">
+                <a:solidFill>
+                  <a:srgbClr val="1E293B"/>
+                </a:solidFill>
+                <a:latin typeface="Cambria" pitchFamily="34" charset="0"/>
+                <a:ea typeface="Cambria" pitchFamily="34" charset="-122"/>
+                <a:cs typeface="Cambria" pitchFamily="34" charset="-120"/>
+              </a:rPr>
+              <a:t>2</a:t>
+            </a:r>
+            <a:r>
+              <a:rPr lang="en-US" sz="1700" b="1" dirty="0">
+                <a:solidFill>
+                  <a:srgbClr val="1E293B"/>
+                </a:solidFill>
+                <a:latin typeface="Cambria" pitchFamily="34" charset="0"/>
+                <a:ea typeface="Cambria" pitchFamily="34" charset="-122"/>
+                <a:cs typeface="Cambria" pitchFamily="34" charset="-120"/>
+              </a:rPr>
+              <a:t>(log n) + O(1)</a:t>
+            </a:r>
+            <a:endParaRPr lang="en-US" sz="1700" dirty="0"/>
+          </a:p>
+        </p:txBody>
+      </p:sp>
+      <p:sp>
+        <p:nvSpPr>
+          <p:cNvPr id="12" name="Text 10"/>
+          <p:cNvSpPr/>
+          <p:nvPr/>
+        </p:nvSpPr>
+        <p:spPr>
+          <a:xfrm>
+            <a:off x="7434072" y="3072384"/>
+            <a:ext cx="3952951" cy="201168"/>
+          </a:xfrm>
+          <a:prstGeom prst="rect">
+            <a:avLst/>
+          </a:prstGeom>
+          <a:noFill/>
+          <a:ln/>
+        </p:spPr>
+        <p:txBody>
+          <a:bodyPr wrap="square" lIns="0" tIns="0" rIns="0" bIns="0" rtlCol="0" anchor="ctr"/>
+          <a:lstStyle/>
+          <a:p>
+            <a:pPr marL="0" indent="0">
+              <a:buNone/>
+            </a:pPr>
+            <a:r>
+              <a:rPr lang="en-US" sz="950" i="1" dirty="0">
+                <a:solidFill>
+                  <a:srgbClr val="64748B"/>
+                </a:solidFill>
+                <a:latin typeface="Calibri" pitchFamily="34" charset="0"/>
+                <a:ea typeface="Calibri" pitchFamily="34" charset="-122"/>
+                <a:cs typeface="Calibri" pitchFamily="34" charset="-120"/>
+              </a:rPr>
+              <a:t>Theorem 2 (Mitzenmacher, 2001)</a:t>
+            </a:r>
+            <a:endParaRPr lang="en-US" sz="950" dirty="0"/>
+          </a:p>
+        </p:txBody>
+      </p:sp>
+      <p:sp>
+        <p:nvSpPr>
+          <p:cNvPr id="13" name="Text 11"/>
+          <p:cNvSpPr/>
+          <p:nvPr/>
+        </p:nvSpPr>
+        <p:spPr>
+          <a:xfrm>
+            <a:off x="7434072" y="3255264"/>
+            <a:ext cx="3952951" cy="237744"/>
+          </a:xfrm>
+          <a:prstGeom prst="rect">
+            <a:avLst/>
+          </a:prstGeom>
+          <a:noFill/>
+          <a:ln/>
+        </p:spPr>
+        <p:txBody>
+          <a:bodyPr wrap="square" lIns="0" tIns="0" rIns="0" bIns="0" rtlCol="0" anchor="ctr"/>
+          <a:lstStyle/>
+          <a:p>
+            <a:pPr marL="0" indent="0">
+              <a:buNone/>
+            </a:pPr>
+            <a:r>
+              <a:rPr lang="en-US" sz="1150" b="1" dirty="0">
+                <a:solidFill>
+                  <a:srgbClr val="2563EB"/>
+                </a:solidFill>
+                <a:latin typeface="Calibri" pitchFamily="34" charset="0"/>
+                <a:ea typeface="Calibri" pitchFamily="34" charset="-122"/>
+                <a:cs typeface="Calibri" pitchFamily="34" charset="-120"/>
+              </a:rPr>
+              <a:t>d choices</a:t>
+            </a:r>
+            <a:endParaRPr lang="en-US" sz="1150" dirty="0"/>
+          </a:p>
+        </p:txBody>
+      </p:sp>
+      <p:sp>
+        <p:nvSpPr>
+          <p:cNvPr id="14" name="Text 12"/>
+          <p:cNvSpPr/>
+          <p:nvPr/>
+        </p:nvSpPr>
+        <p:spPr>
+          <a:xfrm>
+            <a:off x="7434072" y="3483864"/>
+            <a:ext cx="3952951" cy="320040"/>
+          </a:xfrm>
+          <a:prstGeom prst="rect">
+            <a:avLst/>
+          </a:prstGeom>
+          <a:noFill/>
+          <a:ln/>
+        </p:spPr>
+        <p:txBody>
+          <a:bodyPr wrap="square" lIns="0" tIns="0" rIns="0" bIns="0" rtlCol="0" anchor="ctr"/>
+          <a:lstStyle/>
+          <a:p>
+            <a:pPr marL="0" indent="0">
+              <a:buNone/>
+            </a:pPr>
+            <a:r>
+              <a:rPr lang="en-US" sz="1700" b="1" dirty="0">
+                <a:solidFill>
+                  <a:srgbClr val="1E293B"/>
+                </a:solidFill>
+                <a:latin typeface="Cambria" pitchFamily="34" charset="0"/>
+                <a:ea typeface="Cambria" pitchFamily="34" charset="-122"/>
+                <a:cs typeface="Cambria" pitchFamily="34" charset="-120"/>
+              </a:rPr>
+              <a:t>log</a:t>
+            </a:r>
+            <a:r>
+              <a:rPr lang="en-US" sz="1700" b="1" baseline="-40000" dirty="0">
+                <a:solidFill>
+                  <a:srgbClr val="1E293B"/>
+                </a:solidFill>
+                <a:latin typeface="Cambria" pitchFamily="34" charset="0"/>
+                <a:ea typeface="Cambria" pitchFamily="34" charset="-122"/>
+                <a:cs typeface="Cambria" pitchFamily="34" charset="-120"/>
+              </a:rPr>
+              <a:t>d</a:t>
+            </a:r>
+            <a:r>
+              <a:rPr lang="en-US" sz="1700" b="1" dirty="0">
+                <a:solidFill>
+                  <a:srgbClr val="1E293B"/>
+                </a:solidFill>
+                <a:latin typeface="Cambria" pitchFamily="34" charset="0"/>
+                <a:ea typeface="Cambria" pitchFamily="34" charset="-122"/>
+                <a:cs typeface="Cambria" pitchFamily="34" charset="-120"/>
+              </a:rPr>
+              <a:t>(log n) + O(1)</a:t>
+            </a:r>
+            <a:endParaRPr lang="en-US" sz="1700" dirty="0"/>
+          </a:p>
+        </p:txBody>
+      </p:sp>
+      <p:sp>
+        <p:nvSpPr>
+          <p:cNvPr id="15" name="Text 13"/>
+          <p:cNvSpPr/>
+          <p:nvPr/>
+        </p:nvSpPr>
+        <p:spPr>
+          <a:xfrm>
+            <a:off x="7434072" y="3785616"/>
+            <a:ext cx="3952951" cy="201168"/>
+          </a:xfrm>
+          <a:prstGeom prst="rect">
+            <a:avLst/>
+          </a:prstGeom>
+          <a:noFill/>
+          <a:ln/>
+        </p:spPr>
+        <p:txBody>
+          <a:bodyPr wrap="square" lIns="0" tIns="0" rIns="0" bIns="0" rtlCol="0" anchor="ctr"/>
+          <a:lstStyle/>
+          <a:p>
+            <a:pPr marL="0" indent="0">
+              <a:buNone/>
+            </a:pPr>
+            <a:r>
+              <a:rPr lang="en-US" sz="950" i="1" dirty="0">
+                <a:solidFill>
+                  <a:srgbClr val="64748B"/>
+                </a:solidFill>
+                <a:latin typeface="Calibri" pitchFamily="34" charset="0"/>
+                <a:ea typeface="Calibri" pitchFamily="34" charset="-122"/>
+                <a:cs typeface="Calibri" pitchFamily="34" charset="-120"/>
+              </a:rPr>
+              <a:t>Theorem 3</a:t>
+            </a:r>
+            <a:endParaRPr lang="en-US" sz="950" dirty="0"/>
+          </a:p>
+        </p:txBody>
+      </p:sp>
+      <p:sp>
+        <p:nvSpPr>
+          <p:cNvPr id="16" name="Text 14"/>
+          <p:cNvSpPr/>
+          <p:nvPr/>
+        </p:nvSpPr>
+        <p:spPr>
+          <a:xfrm>
+            <a:off x="7178040" y="4224528"/>
+            <a:ext cx="4465015" cy="777240"/>
+          </a:xfrm>
+          <a:prstGeom prst="rect">
+            <a:avLst/>
+          </a:prstGeom>
+          <a:noFill/>
+          <a:ln/>
+        </p:spPr>
+        <p:txBody>
+          <a:bodyPr wrap="square" lIns="0" tIns="0" rIns="0" bIns="0" rtlCol="0" anchor="t"/>
+          <a:lstStyle/>
+          <a:p>
+            <a:pPr marL="0" indent="0">
+              <a:lnSpc>
+                <a:spcPct val="112000"/>
+              </a:lnSpc>
+              <a:buNone/>
+            </a:pPr>
+            <a:r>
+              <a:rPr lang="en-US" sz="1100" i="1" dirty="0">
+                <a:solidFill>
+                  <a:srgbClr val="64748B"/>
+                </a:solidFill>
+                <a:latin typeface="Calibri" pitchFamily="34" charset="0"/>
+                <a:ea typeface="Calibri" pitchFamily="34" charset="-122"/>
+                <a:cs typeface="Calibri" pitchFamily="34" charset="-120"/>
+              </a:rPr>
+              <a:t>These bounds assume n balls into n bins. Our simulation runs heavily loaded — 10,000 balls into 16–32 bins — a different regime, but the same qualitative gap motivates Power-2.</a:t>
+            </a:r>
+            <a:endParaRPr lang="en-US" sz="1100" dirty="0"/>
+          </a:p>
+        </p:txBody>
+      </p:sp>
+      <p:sp>
+        <p:nvSpPr>
+          <p:cNvPr id="17" name="Text 15"/>
+          <p:cNvSpPr/>
+          <p:nvPr/>
+        </p:nvSpPr>
+        <p:spPr>
+          <a:xfrm>
+            <a:off x="7178040" y="5074920"/>
+            <a:ext cx="4465015" cy="777240"/>
+          </a:xfrm>
+          <a:prstGeom prst="rect">
+            <a:avLst/>
+          </a:prstGeom>
+          <a:noFill/>
+          <a:ln/>
+        </p:spPr>
+        <p:txBody>
+          <a:bodyPr wrap="square" lIns="0" tIns="0" rIns="0" bIns="0" rtlCol="0" anchor="t"/>
+          <a:lstStyle/>
+          <a:p>
+            <a:pPr marL="0" indent="0">
+              <a:lnSpc>
+                <a:spcPct val="115000"/>
+              </a:lnSpc>
+              <a:buNone/>
+            </a:pPr>
+            <a:r>
+              <a:rPr lang="en-US" sz="1200" b="1" dirty="0">
+                <a:solidFill>
+                  <a:srgbClr val="2563EB"/>
+                </a:solidFill>
+                <a:latin typeface="Calibri" pitchFamily="34" charset="0"/>
+                <a:ea typeface="Calibri" pitchFamily="34" charset="-122"/>
+                <a:cs typeface="Calibri" pitchFamily="34" charset="-120"/>
+              </a:rPr>
+              <a:t>Hypothesis:  </a:t>
+            </a:r>
+            <a:r>
+              <a:rPr lang="en-US" sz="1200" dirty="0">
+                <a:solidFill>
+                  <a:srgbClr val="1E293B"/>
+                </a:solidFill>
+                <a:latin typeface="Calibri" pitchFamily="34" charset="0"/>
+                <a:ea typeface="Calibri" pitchFamily="34" charset="-122"/>
+                <a:cs typeface="Calibri" pitchFamily="34" charset="-120"/>
+              </a:rPr>
+              <a:t>small local information captures most of the benefit. No proof here — the rest of this deck tests it empirically.</a:t>
+            </a:r>
+            <a:endParaRPr lang="en-US" sz="1200" dirty="0"/>
+          </a:p>
+        </p:txBody>
+      </p:sp>
+      <p:sp>
+        <p:nvSpPr>
+          <p:cNvPr id="18" name="Shape 16"/>
+          <p:cNvSpPr/>
+          <p:nvPr/>
+        </p:nvSpPr>
+        <p:spPr>
+          <a:xfrm>
+            <a:off x="548640" y="5989320"/>
+            <a:ext cx="11094415" cy="457200"/>
+          </a:xfrm>
+          <a:prstGeom prst="roundRect">
+            <a:avLst>
+              <a:gd name="adj" fmla="val 14000"/>
+            </a:avLst>
+          </a:prstGeom>
+          <a:solidFill>
+            <a:srgbClr val="F1F5F9"/>
+          </a:solidFill>
+          <a:ln/>
+        </p:spPr>
+        <p:txBody>
+          <a:bodyPr/>
+          <a:lstStyle/>
+          <a:p>
+            <a:endParaRPr lang="en-IL"/>
+          </a:p>
+        </p:txBody>
+      </p:sp>
+      <p:sp>
+        <p:nvSpPr>
+          <p:cNvPr id="19" name="Text 17"/>
+          <p:cNvSpPr/>
+          <p:nvPr/>
+        </p:nvSpPr>
+        <p:spPr>
+          <a:xfrm>
+            <a:off x="777240" y="5989320"/>
+            <a:ext cx="10637215" cy="457200"/>
+          </a:xfrm>
+          <a:prstGeom prst="rect">
+            <a:avLst/>
+          </a:prstGeom>
+          <a:noFill/>
+          <a:ln/>
+        </p:spPr>
+        <p:txBody>
+          <a:bodyPr wrap="square" lIns="0" tIns="0" rIns="0" bIns="0" rtlCol="0" anchor="ctr"/>
+          <a:lstStyle/>
+          <a:p>
+            <a:pPr marL="0" indent="0" algn="l">
+              <a:buNone/>
+            </a:pPr>
+            <a:r>
+              <a:rPr lang="en-US" sz="1350" b="1" i="1" dirty="0">
+                <a:solidFill>
+                  <a:srgbClr val="1E293B"/>
+                </a:solidFill>
+                <a:latin typeface="Calibri" pitchFamily="34" charset="0"/>
+                <a:ea typeface="Calibri" pitchFamily="34" charset="-122"/>
+                <a:cs typeface="Calibri" pitchFamily="34" charset="-120"/>
+              </a:rPr>
+              <a:t>Theory motivates Power-2 as the practical randomized baseline — the rest of the deck checks it against real cost.</a:t>
+            </a:r>
+            <a:endParaRPr lang="en-US" sz="1350" dirty="0"/>
+          </a:p>
+        </p:txBody>
+      </p:sp>
+    </p:spTree>
+  </p:cSld>
+  <p:clrMapOvr>
+    <a:masterClrMapping/>
+  </p:clrMapOvr>
+</p:sld>
+</file>
+
+<file path=ppt/slides/slide4.xml><?xml version="1.0" encoding="utf-8"?>
 <p:sld xmlns:a="http://schemas.openxmlformats.org/drawingml/2006/main" xmlns:r="http://schemas.openxmlformats.org/officeDocument/2006/relationships" xmlns:p="http://schemas.openxmlformats.org/presentationml/2006/main">
   <p:cSld name="Slide 3">
     <p:bg>
@@ -6746,15 +6854,16 @@
             <a:endParaRPr lang="en-US" sz="1350" dirty="0"/>
           </a:p>
           <a:p>
-            <a:pPr>
+            <a:pPr marL="0" indent="0">
               <a:lnSpc>
                 <a:spcPct val="105000"/>
               </a:lnSpc>
-            </a:pPr>
-            <a:r>
-              <a:rPr lang="en-US" sz="1350" b="1" dirty="0">
-                <a:solidFill>
-                  <a:srgbClr val="1E293B"/>
+              <a:buNone/>
+            </a:pPr>
+            <a:r>
+              <a:rPr lang="en-US" sz="1350" dirty="0">
+                <a:solidFill>
+                  <a:srgbClr val="64748B"/>
                 </a:solidFill>
                 <a:latin typeface="Calibri" pitchFamily="34" charset="0"/>
                 <a:ea typeface="Calibri" pitchFamily="34" charset="-122"/>
@@ -6762,6 +6871,7 @@
               </a:rPr>
               <a:t>Empty initial bins</a:t>
             </a:r>
+            <a:endParaRPr lang="en-US" sz="1350" dirty="0"/>
           </a:p>
         </p:txBody>
       </p:sp>
@@ -6874,15 +6984,16 @@
             <a:endParaRPr lang="en-US" sz="1350" dirty="0"/>
           </a:p>
           <a:p>
-            <a:pPr>
+            <a:pPr marL="0" indent="0">
               <a:lnSpc>
                 <a:spcPct val="105000"/>
               </a:lnSpc>
-            </a:pPr>
-            <a:r>
-              <a:rPr lang="en-US" sz="1350" b="1" dirty="0">
-                <a:solidFill>
-                  <a:srgbClr val="1E293B"/>
+              <a:buNone/>
+            </a:pPr>
+            <a:r>
+              <a:rPr lang="en-US" sz="1350" dirty="0">
+                <a:solidFill>
+                  <a:srgbClr val="64748B"/>
                 </a:solidFill>
                 <a:latin typeface="Calibri" pitchFamily="34" charset="0"/>
                 <a:ea typeface="Calibri" pitchFamily="34" charset="-122"/>
@@ -6890,6 +7001,7 @@
               </a:rPr>
               <a:t>Empty initial bins</a:t>
             </a:r>
+            <a:endParaRPr lang="en-US" sz="1350" dirty="0"/>
           </a:p>
         </p:txBody>
       </p:sp>
@@ -7002,15 +7114,16 @@
             <a:endParaRPr lang="en-US" sz="1350" dirty="0"/>
           </a:p>
           <a:p>
-            <a:pPr>
+            <a:pPr marL="0" indent="0">
               <a:lnSpc>
                 <a:spcPct val="105000"/>
               </a:lnSpc>
-            </a:pPr>
-            <a:r>
-              <a:rPr lang="en-US" sz="1350" b="1" dirty="0">
-                <a:solidFill>
-                  <a:srgbClr val="1E293B"/>
+              <a:buNone/>
+            </a:pPr>
+            <a:r>
+              <a:rPr lang="en-US" sz="1350" dirty="0">
+                <a:solidFill>
+                  <a:srgbClr val="64748B"/>
                 </a:solidFill>
                 <a:latin typeface="Calibri" pitchFamily="34" charset="0"/>
                 <a:ea typeface="Calibri" pitchFamily="34" charset="-122"/>
@@ -7018,6 +7131,7 @@
               </a:rPr>
               <a:t>Randomly initialized bins</a:t>
             </a:r>
+            <a:endParaRPr lang="en-US" sz="1350" dirty="0"/>
           </a:p>
         </p:txBody>
       </p:sp>
@@ -7130,15 +7244,16 @@
             <a:endParaRPr lang="en-US" sz="1350" dirty="0"/>
           </a:p>
           <a:p>
-            <a:pPr>
+            <a:pPr marL="0" indent="0">
               <a:lnSpc>
                 <a:spcPct val="105000"/>
               </a:lnSpc>
-            </a:pPr>
-            <a:r>
-              <a:rPr lang="en-US" sz="1350" b="1" dirty="0">
-                <a:solidFill>
-                  <a:srgbClr val="1E293B"/>
+              <a:buNone/>
+            </a:pPr>
+            <a:r>
+              <a:rPr lang="en-US" sz="1350" dirty="0">
+                <a:solidFill>
+                  <a:srgbClr val="64748B"/>
                 </a:solidFill>
                 <a:latin typeface="Calibri" pitchFamily="34" charset="0"/>
                 <a:ea typeface="Calibri" pitchFamily="34" charset="-122"/>
@@ -7146,6 +7261,7 @@
               </a:rPr>
               <a:t>Randomly initialized bins</a:t>
             </a:r>
+            <a:endParaRPr lang="en-US" sz="1350" dirty="0"/>
           </a:p>
         </p:txBody>
       </p:sp>
@@ -7303,7 +7419,7 @@
 </p:sld>
 </file>
 
-<file path=ppt/slides/slide4.xml><?xml version="1.0" encoding="utf-8"?>
+<file path=ppt/slides/slide5.xml><?xml version="1.0" encoding="utf-8"?>
 <p:sld xmlns:a="http://schemas.openxmlformats.org/drawingml/2006/main" xmlns:r="http://schemas.openxmlformats.org/officeDocument/2006/relationships" xmlns:p="http://schemas.openxmlformats.org/presentationml/2006/main">
   <p:cSld name="Slide 4">
     <p:bg>
@@ -9410,7 +9526,7 @@
 </p:sld>
 </file>
 
-<file path=ppt/slides/slide5.xml><?xml version="1.0" encoding="utf-8"?>
+<file path=ppt/slides/slide6.xml><?xml version="1.0" encoding="utf-8"?>
 <p:sld xmlns:a="http://schemas.openxmlformats.org/drawingml/2006/main" xmlns:r="http://schemas.openxmlformats.org/officeDocument/2006/relationships" xmlns:p="http://schemas.openxmlformats.org/presentationml/2006/main">
   <p:cSld name="Slide 5">
     <p:bg>
@@ -9468,7 +9584,7 @@
                 <a:ea typeface="Cambria" pitchFamily="34" charset="-122"/>
                 <a:cs typeface="Cambria" pitchFamily="34" charset="-120"/>
               </a:rPr>
-              <a:t>Theory Anchor: Why Power-2 Matters</a:t>
+              <a:t>Simulation Structure: Objects and Flow</a:t>
             </a:r>
             <a:endParaRPr lang="en-US" sz="2900" dirty="0"/>
           </a:p>
@@ -9515,14 +9631,780 @@
       </p:sp>
       <p:sp>
         <p:nvSpPr>
-          <p:cNvPr id="4" name="Text 2"/>
-          <p:cNvSpPr/>
-          <p:nvPr/>
-        </p:nvSpPr>
-        <p:spPr>
-          <a:xfrm>
-            <a:off x="548640" y="1417320"/>
-            <a:ext cx="6309360" cy="4480560"/>
+          <p:cNvPr id="4" name="Shape 2"/>
+          <p:cNvSpPr/>
+          <p:nvPr/>
+        </p:nvSpPr>
+        <p:spPr>
+          <a:xfrm>
+            <a:off x="600304" y="1234440"/>
+            <a:ext cx="1572768" cy="777240"/>
+          </a:xfrm>
+          <a:prstGeom prst="roundRect">
+            <a:avLst>
+              <a:gd name="adj" fmla="val 9412"/>
+            </a:avLst>
+          </a:prstGeom>
+          <a:solidFill>
+            <a:srgbClr val="F1F5F9"/>
+          </a:solidFill>
+          <a:ln w="12700">
+            <a:solidFill>
+              <a:srgbClr val="E2E8F0"/>
+            </a:solidFill>
+            <a:prstDash val="solid"/>
+          </a:ln>
+        </p:spPr>
+        <p:txBody>
+          <a:bodyPr/>
+          <a:lstStyle/>
+          <a:p>
+            <a:endParaRPr lang="en-IL"/>
+          </a:p>
+        </p:txBody>
+      </p:sp>
+      <p:sp>
+        <p:nvSpPr>
+          <p:cNvPr id="5" name="Text 3"/>
+          <p:cNvSpPr/>
+          <p:nvPr/>
+        </p:nvSpPr>
+        <p:spPr>
+          <a:xfrm>
+            <a:off x="600304" y="1234440"/>
+            <a:ext cx="1572768" cy="777240"/>
+          </a:xfrm>
+          <a:prstGeom prst="rect">
+            <a:avLst/>
+          </a:prstGeom>
+          <a:noFill/>
+          <a:ln/>
+        </p:spPr>
+        <p:txBody>
+          <a:bodyPr wrap="square" lIns="0" tIns="0" rIns="0" bIns="0" rtlCol="0" anchor="ctr"/>
+          <a:lstStyle/>
+          <a:p>
+            <a:pPr marL="0" indent="0" algn="ctr">
+              <a:lnSpc>
+                <a:spcPct val="100000"/>
+              </a:lnSpc>
+              <a:buNone/>
+            </a:pPr>
+            <a:r>
+              <a:rPr lang="en-US" sz="1150" b="1" dirty="0">
+                <a:solidFill>
+                  <a:srgbClr val="1E293B"/>
+                </a:solidFill>
+                <a:latin typeface="Calibri" pitchFamily="34" charset="0"/>
+                <a:ea typeface="Calibri" pitchFamily="34" charset="-122"/>
+                <a:cs typeface="Calibri" pitchFamily="34" charset="-120"/>
+              </a:rPr>
+              <a:t>Scenario</a:t>
+            </a:r>
+            <a:endParaRPr lang="en-US" sz="1150" dirty="0"/>
+          </a:p>
+        </p:txBody>
+      </p:sp>
+      <p:sp>
+        <p:nvSpPr>
+          <p:cNvPr id="6" name="Shape 4"/>
+          <p:cNvSpPr/>
+          <p:nvPr/>
+        </p:nvSpPr>
+        <p:spPr>
+          <a:xfrm>
+            <a:off x="2173072" y="1623060"/>
+            <a:ext cx="310896" cy="0"/>
+          </a:xfrm>
+          <a:prstGeom prst="line">
+            <a:avLst/>
+          </a:prstGeom>
+          <a:noFill/>
+          <a:ln w="19050">
+            <a:solidFill>
+              <a:srgbClr val="64748B"/>
+            </a:solidFill>
+            <a:prstDash val="solid"/>
+            <a:tailEnd type="triangle"/>
+          </a:ln>
+        </p:spPr>
+        <p:txBody>
+          <a:bodyPr/>
+          <a:lstStyle/>
+          <a:p>
+            <a:endParaRPr lang="en-IL"/>
+          </a:p>
+        </p:txBody>
+      </p:sp>
+      <p:sp>
+        <p:nvSpPr>
+          <p:cNvPr id="7" name="Shape 5"/>
+          <p:cNvSpPr/>
+          <p:nvPr/>
+        </p:nvSpPr>
+        <p:spPr>
+          <a:xfrm>
+            <a:off x="2483968" y="1234440"/>
+            <a:ext cx="1572768" cy="777240"/>
+          </a:xfrm>
+          <a:prstGeom prst="roundRect">
+            <a:avLst>
+              <a:gd name="adj" fmla="val 9412"/>
+            </a:avLst>
+          </a:prstGeom>
+          <a:solidFill>
+            <a:srgbClr val="F1F5F9"/>
+          </a:solidFill>
+          <a:ln w="12700">
+            <a:solidFill>
+              <a:srgbClr val="E2E8F0"/>
+            </a:solidFill>
+            <a:prstDash val="solid"/>
+          </a:ln>
+        </p:spPr>
+        <p:txBody>
+          <a:bodyPr/>
+          <a:lstStyle/>
+          <a:p>
+            <a:endParaRPr lang="en-IL"/>
+          </a:p>
+        </p:txBody>
+      </p:sp>
+      <p:sp>
+        <p:nvSpPr>
+          <p:cNvPr id="8" name="Text 6"/>
+          <p:cNvSpPr/>
+          <p:nvPr/>
+        </p:nvSpPr>
+        <p:spPr>
+          <a:xfrm>
+            <a:off x="2483968" y="1234440"/>
+            <a:ext cx="1572768" cy="777240"/>
+          </a:xfrm>
+          <a:prstGeom prst="rect">
+            <a:avLst/>
+          </a:prstGeom>
+          <a:noFill/>
+          <a:ln/>
+        </p:spPr>
+        <p:txBody>
+          <a:bodyPr wrap="square" lIns="0" tIns="0" rIns="0" bIns="0" rtlCol="0" anchor="ctr"/>
+          <a:lstStyle/>
+          <a:p>
+            <a:pPr marL="0" indent="0" algn="ctr">
+              <a:lnSpc>
+                <a:spcPct val="100000"/>
+              </a:lnSpc>
+              <a:buNone/>
+            </a:pPr>
+            <a:r>
+              <a:rPr lang="en-US" sz="1150" b="1" dirty="0">
+                <a:solidFill>
+                  <a:srgbClr val="1E293B"/>
+                </a:solidFill>
+                <a:latin typeface="Calibri" pitchFamily="34" charset="0"/>
+                <a:ea typeface="Calibri" pitchFamily="34" charset="-122"/>
+                <a:cs typeface="Calibri" pitchFamily="34" charset="-120"/>
+              </a:rPr>
+              <a:t>Simulator</a:t>
+            </a:r>
+            <a:endParaRPr lang="en-US" sz="1150" dirty="0"/>
+          </a:p>
+          <a:p>
+            <a:pPr marL="0" indent="0" algn="ctr">
+              <a:lnSpc>
+                <a:spcPct val="100000"/>
+              </a:lnSpc>
+              <a:buNone/>
+            </a:pPr>
+            <a:r>
+              <a:rPr lang="en-US" sz="1150" b="1" dirty="0">
+                <a:solidFill>
+                  <a:srgbClr val="1E293B"/>
+                </a:solidFill>
+                <a:latin typeface="Calibri" pitchFamily="34" charset="0"/>
+                <a:ea typeface="Calibri" pitchFamily="34" charset="-122"/>
+                <a:cs typeface="Calibri" pitchFamily="34" charset="-120"/>
+              </a:rPr>
+              <a:t>policy</a:t>
+            </a:r>
+            <a:endParaRPr lang="en-US" sz="1150" dirty="0"/>
+          </a:p>
+        </p:txBody>
+      </p:sp>
+      <p:sp>
+        <p:nvSpPr>
+          <p:cNvPr id="9" name="Shape 7"/>
+          <p:cNvSpPr/>
+          <p:nvPr/>
+        </p:nvSpPr>
+        <p:spPr>
+          <a:xfrm>
+            <a:off x="4056736" y="1623060"/>
+            <a:ext cx="310896" cy="0"/>
+          </a:xfrm>
+          <a:prstGeom prst="line">
+            <a:avLst/>
+          </a:prstGeom>
+          <a:noFill/>
+          <a:ln w="19050">
+            <a:solidFill>
+              <a:srgbClr val="64748B"/>
+            </a:solidFill>
+            <a:prstDash val="solid"/>
+            <a:tailEnd type="triangle"/>
+          </a:ln>
+        </p:spPr>
+        <p:txBody>
+          <a:bodyPr/>
+          <a:lstStyle/>
+          <a:p>
+            <a:endParaRPr lang="en-IL"/>
+          </a:p>
+        </p:txBody>
+      </p:sp>
+      <p:sp>
+        <p:nvSpPr>
+          <p:cNvPr id="10" name="Shape 8"/>
+          <p:cNvSpPr/>
+          <p:nvPr/>
+        </p:nvSpPr>
+        <p:spPr>
+          <a:xfrm>
+            <a:off x="4367632" y="1234440"/>
+            <a:ext cx="1572768" cy="777240"/>
+          </a:xfrm>
+          <a:prstGeom prst="roundRect">
+            <a:avLst>
+              <a:gd name="adj" fmla="val 9412"/>
+            </a:avLst>
+          </a:prstGeom>
+          <a:solidFill>
+            <a:srgbClr val="F1F5F9"/>
+          </a:solidFill>
+          <a:ln w="12700">
+            <a:solidFill>
+              <a:srgbClr val="E2E8F0"/>
+            </a:solidFill>
+            <a:prstDash val="solid"/>
+          </a:ln>
+        </p:spPr>
+        <p:txBody>
+          <a:bodyPr/>
+          <a:lstStyle/>
+          <a:p>
+            <a:endParaRPr lang="en-IL"/>
+          </a:p>
+        </p:txBody>
+      </p:sp>
+      <p:sp>
+        <p:nvSpPr>
+          <p:cNvPr id="11" name="Text 9"/>
+          <p:cNvSpPr/>
+          <p:nvPr/>
+        </p:nvSpPr>
+        <p:spPr>
+          <a:xfrm>
+            <a:off x="4367632" y="1234440"/>
+            <a:ext cx="1572768" cy="777240"/>
+          </a:xfrm>
+          <a:prstGeom prst="rect">
+            <a:avLst/>
+          </a:prstGeom>
+          <a:noFill/>
+          <a:ln/>
+        </p:spPr>
+        <p:txBody>
+          <a:bodyPr wrap="square" lIns="0" tIns="0" rIns="0" bIns="0" rtlCol="0" anchor="ctr"/>
+          <a:lstStyle/>
+          <a:p>
+            <a:pPr marL="0" indent="0" algn="ctr">
+              <a:lnSpc>
+                <a:spcPct val="100000"/>
+              </a:lnSpc>
+              <a:buNone/>
+            </a:pPr>
+            <a:r>
+              <a:rPr lang="en-US" sz="1150" b="1" dirty="0">
+                <a:solidFill>
+                  <a:srgbClr val="1E293B"/>
+                </a:solidFill>
+                <a:latin typeface="Calibri" pitchFamily="34" charset="0"/>
+                <a:ea typeface="Calibri" pitchFamily="34" charset="-122"/>
+                <a:cs typeface="Calibri" pitchFamily="34" charset="-120"/>
+              </a:rPr>
+              <a:t>Bin loads +</a:t>
+            </a:r>
+            <a:endParaRPr lang="en-US" sz="1150" dirty="0"/>
+          </a:p>
+          <a:p>
+            <a:pPr marL="0" indent="0" algn="ctr">
+              <a:lnSpc>
+                <a:spcPct val="100000"/>
+              </a:lnSpc>
+              <a:buNone/>
+            </a:pPr>
+            <a:r>
+              <a:rPr lang="en-US" sz="1150" b="1" dirty="0">
+                <a:solidFill>
+                  <a:srgbClr val="1E293B"/>
+                </a:solidFill>
+                <a:latin typeface="Calibri" pitchFamily="34" charset="0"/>
+                <a:ea typeface="Calibri" pitchFamily="34" charset="-122"/>
+                <a:cs typeface="Calibri" pitchFamily="34" charset="-120"/>
+              </a:rPr>
+              <a:t>cost model</a:t>
+            </a:r>
+            <a:endParaRPr lang="en-US" sz="1150" dirty="0"/>
+          </a:p>
+        </p:txBody>
+      </p:sp>
+      <p:sp>
+        <p:nvSpPr>
+          <p:cNvPr id="12" name="Shape 10"/>
+          <p:cNvSpPr/>
+          <p:nvPr/>
+        </p:nvSpPr>
+        <p:spPr>
+          <a:xfrm>
+            <a:off x="5940400" y="1623060"/>
+            <a:ext cx="310896" cy="0"/>
+          </a:xfrm>
+          <a:prstGeom prst="line">
+            <a:avLst/>
+          </a:prstGeom>
+          <a:noFill/>
+          <a:ln w="19050">
+            <a:solidFill>
+              <a:srgbClr val="64748B"/>
+            </a:solidFill>
+            <a:prstDash val="solid"/>
+            <a:tailEnd type="triangle"/>
+          </a:ln>
+        </p:spPr>
+        <p:txBody>
+          <a:bodyPr/>
+          <a:lstStyle/>
+          <a:p>
+            <a:endParaRPr lang="en-IL"/>
+          </a:p>
+        </p:txBody>
+      </p:sp>
+      <p:sp>
+        <p:nvSpPr>
+          <p:cNvPr id="13" name="Shape 11"/>
+          <p:cNvSpPr/>
+          <p:nvPr/>
+        </p:nvSpPr>
+        <p:spPr>
+          <a:xfrm>
+            <a:off x="6251296" y="1234440"/>
+            <a:ext cx="1572768" cy="777240"/>
+          </a:xfrm>
+          <a:prstGeom prst="roundRect">
+            <a:avLst>
+              <a:gd name="adj" fmla="val 9412"/>
+            </a:avLst>
+          </a:prstGeom>
+          <a:solidFill>
+            <a:srgbClr val="E8EFFD"/>
+          </a:solidFill>
+          <a:ln w="12700">
+            <a:solidFill>
+              <a:srgbClr val="E2E8F0"/>
+            </a:solidFill>
+            <a:prstDash val="solid"/>
+          </a:ln>
+        </p:spPr>
+        <p:txBody>
+          <a:bodyPr/>
+          <a:lstStyle/>
+          <a:p>
+            <a:endParaRPr lang="en-IL"/>
+          </a:p>
+        </p:txBody>
+      </p:sp>
+      <p:sp>
+        <p:nvSpPr>
+          <p:cNvPr id="14" name="Text 12"/>
+          <p:cNvSpPr/>
+          <p:nvPr/>
+        </p:nvSpPr>
+        <p:spPr>
+          <a:xfrm>
+            <a:off x="6251296" y="1234440"/>
+            <a:ext cx="1572768" cy="777240"/>
+          </a:xfrm>
+          <a:prstGeom prst="rect">
+            <a:avLst/>
+          </a:prstGeom>
+          <a:noFill/>
+          <a:ln/>
+        </p:spPr>
+        <p:txBody>
+          <a:bodyPr wrap="square" lIns="0" tIns="0" rIns="0" bIns="0" rtlCol="0" anchor="ctr"/>
+          <a:lstStyle/>
+          <a:p>
+            <a:pPr marL="0" indent="0" algn="ctr">
+              <a:lnSpc>
+                <a:spcPct val="100000"/>
+              </a:lnSpc>
+              <a:buNone/>
+            </a:pPr>
+            <a:r>
+              <a:rPr lang="en-US" sz="1150" b="1" dirty="0">
+                <a:solidFill>
+                  <a:srgbClr val="1E293B"/>
+                </a:solidFill>
+                <a:latin typeface="Calibri" pitchFamily="34" charset="0"/>
+                <a:ea typeface="Calibri" pitchFamily="34" charset="-122"/>
+                <a:cs typeface="Calibri" pitchFamily="34" charset="-120"/>
+              </a:rPr>
+              <a:t>Aggregated</a:t>
+            </a:r>
+            <a:endParaRPr lang="en-US" sz="1150" dirty="0"/>
+          </a:p>
+          <a:p>
+            <a:pPr marL="0" indent="0" algn="ctr">
+              <a:lnSpc>
+                <a:spcPct val="100000"/>
+              </a:lnSpc>
+              <a:buNone/>
+            </a:pPr>
+            <a:r>
+              <a:rPr lang="en-US" sz="1150" b="1" dirty="0">
+                <a:solidFill>
+                  <a:srgbClr val="1E293B"/>
+                </a:solidFill>
+                <a:latin typeface="Calibri" pitchFamily="34" charset="0"/>
+                <a:ea typeface="Calibri" pitchFamily="34" charset="-122"/>
+                <a:cs typeface="Calibri" pitchFamily="34" charset="-120"/>
+              </a:rPr>
+              <a:t>metrics</a:t>
+            </a:r>
+            <a:endParaRPr lang="en-US" sz="1150" dirty="0"/>
+          </a:p>
+        </p:txBody>
+      </p:sp>
+      <p:sp>
+        <p:nvSpPr>
+          <p:cNvPr id="15" name="Shape 13"/>
+          <p:cNvSpPr/>
+          <p:nvPr/>
+        </p:nvSpPr>
+        <p:spPr>
+          <a:xfrm>
+            <a:off x="7824064" y="1623060"/>
+            <a:ext cx="310896" cy="0"/>
+          </a:xfrm>
+          <a:prstGeom prst="line">
+            <a:avLst/>
+          </a:prstGeom>
+          <a:noFill/>
+          <a:ln w="19050">
+            <a:solidFill>
+              <a:srgbClr val="64748B"/>
+            </a:solidFill>
+            <a:prstDash val="solid"/>
+            <a:tailEnd type="triangle"/>
+          </a:ln>
+        </p:spPr>
+        <p:txBody>
+          <a:bodyPr/>
+          <a:lstStyle/>
+          <a:p>
+            <a:endParaRPr lang="en-IL"/>
+          </a:p>
+        </p:txBody>
+      </p:sp>
+      <p:sp>
+        <p:nvSpPr>
+          <p:cNvPr id="16" name="Shape 14"/>
+          <p:cNvSpPr/>
+          <p:nvPr/>
+        </p:nvSpPr>
+        <p:spPr>
+          <a:xfrm>
+            <a:off x="8134960" y="1234440"/>
+            <a:ext cx="1572768" cy="777240"/>
+          </a:xfrm>
+          <a:prstGeom prst="roundRect">
+            <a:avLst>
+              <a:gd name="adj" fmla="val 9412"/>
+            </a:avLst>
+          </a:prstGeom>
+          <a:solidFill>
+            <a:srgbClr val="F1F5F9"/>
+          </a:solidFill>
+          <a:ln w="12700">
+            <a:solidFill>
+              <a:srgbClr val="E2E8F0"/>
+            </a:solidFill>
+            <a:prstDash val="solid"/>
+          </a:ln>
+        </p:spPr>
+        <p:txBody>
+          <a:bodyPr/>
+          <a:lstStyle/>
+          <a:p>
+            <a:endParaRPr lang="en-IL"/>
+          </a:p>
+        </p:txBody>
+      </p:sp>
+      <p:sp>
+        <p:nvSpPr>
+          <p:cNvPr id="17" name="Text 15"/>
+          <p:cNvSpPr/>
+          <p:nvPr/>
+        </p:nvSpPr>
+        <p:spPr>
+          <a:xfrm>
+            <a:off x="8134960" y="1234440"/>
+            <a:ext cx="1572768" cy="777240"/>
+          </a:xfrm>
+          <a:prstGeom prst="rect">
+            <a:avLst/>
+          </a:prstGeom>
+          <a:noFill/>
+          <a:ln/>
+        </p:spPr>
+        <p:txBody>
+          <a:bodyPr wrap="square" lIns="0" tIns="0" rIns="0" bIns="0" rtlCol="0" anchor="ctr"/>
+          <a:lstStyle/>
+          <a:p>
+            <a:pPr marL="0" indent="0" algn="ctr">
+              <a:lnSpc>
+                <a:spcPct val="100000"/>
+              </a:lnSpc>
+              <a:buNone/>
+            </a:pPr>
+            <a:r>
+              <a:rPr lang="en-US" sz="1150" b="1" dirty="0">
+                <a:solidFill>
+                  <a:srgbClr val="1E293B"/>
+                </a:solidFill>
+                <a:latin typeface="Calibri" pitchFamily="34" charset="0"/>
+                <a:ea typeface="Calibri" pitchFamily="34" charset="-122"/>
+                <a:cs typeface="Calibri" pitchFamily="34" charset="-120"/>
+              </a:rPr>
+              <a:t>CSV</a:t>
+            </a:r>
+            <a:endParaRPr lang="en-US" sz="1150" dirty="0"/>
+          </a:p>
+        </p:txBody>
+      </p:sp>
+      <p:sp>
+        <p:nvSpPr>
+          <p:cNvPr id="18" name="Shape 16"/>
+          <p:cNvSpPr/>
+          <p:nvPr/>
+        </p:nvSpPr>
+        <p:spPr>
+          <a:xfrm>
+            <a:off x="9707728" y="1623060"/>
+            <a:ext cx="310896" cy="0"/>
+          </a:xfrm>
+          <a:prstGeom prst="line">
+            <a:avLst/>
+          </a:prstGeom>
+          <a:noFill/>
+          <a:ln w="19050">
+            <a:solidFill>
+              <a:srgbClr val="64748B"/>
+            </a:solidFill>
+            <a:prstDash val="solid"/>
+            <a:tailEnd type="triangle"/>
+          </a:ln>
+        </p:spPr>
+        <p:txBody>
+          <a:bodyPr/>
+          <a:lstStyle/>
+          <a:p>
+            <a:endParaRPr lang="en-IL"/>
+          </a:p>
+        </p:txBody>
+      </p:sp>
+      <p:sp>
+        <p:nvSpPr>
+          <p:cNvPr id="19" name="Shape 17"/>
+          <p:cNvSpPr/>
+          <p:nvPr/>
+        </p:nvSpPr>
+        <p:spPr>
+          <a:xfrm>
+            <a:off x="10018624" y="1234440"/>
+            <a:ext cx="1572768" cy="777240"/>
+          </a:xfrm>
+          <a:prstGeom prst="roundRect">
+            <a:avLst>
+              <a:gd name="adj" fmla="val 9412"/>
+            </a:avLst>
+          </a:prstGeom>
+          <a:solidFill>
+            <a:srgbClr val="F1F5F9"/>
+          </a:solidFill>
+          <a:ln w="12700">
+            <a:solidFill>
+              <a:srgbClr val="E2E8F0"/>
+            </a:solidFill>
+            <a:prstDash val="solid"/>
+          </a:ln>
+        </p:spPr>
+        <p:txBody>
+          <a:bodyPr/>
+          <a:lstStyle/>
+          <a:p>
+            <a:endParaRPr lang="en-IL"/>
+          </a:p>
+        </p:txBody>
+      </p:sp>
+      <p:sp>
+        <p:nvSpPr>
+          <p:cNvPr id="20" name="Text 18"/>
+          <p:cNvSpPr/>
+          <p:nvPr/>
+        </p:nvSpPr>
+        <p:spPr>
+          <a:xfrm>
+            <a:off x="10018624" y="1234440"/>
+            <a:ext cx="1572768" cy="777240"/>
+          </a:xfrm>
+          <a:prstGeom prst="rect">
+            <a:avLst/>
+          </a:prstGeom>
+          <a:noFill/>
+          <a:ln/>
+        </p:spPr>
+        <p:txBody>
+          <a:bodyPr wrap="square" lIns="0" tIns="0" rIns="0" bIns="0" rtlCol="0" anchor="ctr"/>
+          <a:lstStyle/>
+          <a:p>
+            <a:pPr marL="0" indent="0" algn="ctr">
+              <a:lnSpc>
+                <a:spcPct val="100000"/>
+              </a:lnSpc>
+              <a:buNone/>
+            </a:pPr>
+            <a:r>
+              <a:rPr lang="en-US" sz="1150" b="1" dirty="0">
+                <a:solidFill>
+                  <a:srgbClr val="1E293B"/>
+                </a:solidFill>
+                <a:latin typeface="Calibri" pitchFamily="34" charset="0"/>
+                <a:ea typeface="Calibri" pitchFamily="34" charset="-122"/>
+                <a:cs typeface="Calibri" pitchFamily="34" charset="-120"/>
+              </a:rPr>
+              <a:t>Plots</a:t>
+            </a:r>
+            <a:endParaRPr lang="en-US" sz="1150" dirty="0"/>
+          </a:p>
+        </p:txBody>
+      </p:sp>
+      <p:sp>
+        <p:nvSpPr>
+          <p:cNvPr id="21" name="Shape 19"/>
+          <p:cNvSpPr/>
+          <p:nvPr/>
+        </p:nvSpPr>
+        <p:spPr>
+          <a:xfrm>
+            <a:off x="548640" y="2423160"/>
+            <a:ext cx="3545738" cy="3337560"/>
+          </a:xfrm>
+          <a:prstGeom prst="roundRect">
+            <a:avLst>
+              <a:gd name="adj" fmla="val 1918"/>
+            </a:avLst>
+          </a:prstGeom>
+          <a:solidFill>
+            <a:srgbClr val="F1F5F9"/>
+          </a:solidFill>
+          <a:ln/>
+        </p:spPr>
+        <p:txBody>
+          <a:bodyPr/>
+          <a:lstStyle/>
+          <a:p>
+            <a:endParaRPr lang="en-IL"/>
+          </a:p>
+        </p:txBody>
+      </p:sp>
+      <p:sp>
+        <p:nvSpPr>
+          <p:cNvPr id="22" name="Shape 20"/>
+          <p:cNvSpPr/>
+          <p:nvPr/>
+        </p:nvSpPr>
+        <p:spPr>
+          <a:xfrm>
+            <a:off x="548640" y="2423160"/>
+            <a:ext cx="3545738" cy="54864"/>
+          </a:xfrm>
+          <a:prstGeom prst="rect">
+            <a:avLst/>
+          </a:prstGeom>
+          <a:solidFill>
+            <a:srgbClr val="2563EB"/>
+          </a:solidFill>
+          <a:ln/>
+        </p:spPr>
+        <p:txBody>
+          <a:bodyPr/>
+          <a:lstStyle/>
+          <a:p>
+            <a:endParaRPr lang="en-IL"/>
+          </a:p>
+        </p:txBody>
+      </p:sp>
+      <p:sp>
+        <p:nvSpPr>
+          <p:cNvPr id="23" name="Text 21"/>
+          <p:cNvSpPr/>
+          <p:nvPr/>
+        </p:nvSpPr>
+        <p:spPr>
+          <a:xfrm>
+            <a:off x="731520" y="2587752"/>
+            <a:ext cx="3179978" cy="292608"/>
+          </a:xfrm>
+          <a:prstGeom prst="rect">
+            <a:avLst/>
+          </a:prstGeom>
+          <a:noFill/>
+          <a:ln/>
+        </p:spPr>
+        <p:txBody>
+          <a:bodyPr wrap="square" lIns="0" tIns="0" rIns="0" bIns="0" rtlCol="0" anchor="ctr"/>
+          <a:lstStyle/>
+          <a:p>
+            <a:pPr marL="0" indent="0">
+              <a:buNone/>
+            </a:pPr>
+            <a:r>
+              <a:rPr lang="en-US" sz="1200" b="1" kern="0" spc="50" dirty="0">
+                <a:solidFill>
+                  <a:srgbClr val="2563EB"/>
+                </a:solidFill>
+                <a:latin typeface="Calibri" pitchFamily="34" charset="0"/>
+                <a:ea typeface="Calibri" pitchFamily="34" charset="-122"/>
+                <a:cs typeface="Calibri" pitchFamily="34" charset="-120"/>
+              </a:rPr>
+              <a:t>SCENARIO</a:t>
+            </a:r>
+            <a:endParaRPr lang="en-US" sz="1200" dirty="0"/>
+          </a:p>
+        </p:txBody>
+      </p:sp>
+      <p:sp>
+        <p:nvSpPr>
+          <p:cNvPr id="24" name="Text 22"/>
+          <p:cNvSpPr/>
+          <p:nvPr/>
+        </p:nvSpPr>
+        <p:spPr>
+          <a:xfrm>
+            <a:off x="731520" y="2953512"/>
+            <a:ext cx="3179978" cy="2670048"/>
           </a:xfrm>
           <a:prstGeom prst="rect">
             <a:avLst/>
@@ -9534,18 +10416,18 @@
           <a:bodyPr wrap="square" lIns="0" tIns="0" rIns="0" bIns="0" rtlCol="0" anchor="t"/>
           <a:lstStyle/>
           <a:p>
-            <a:pPr marL="228600" indent="-228600">
+            <a:pPr marL="152400" indent="-152400">
               <a:lnSpc>
-                <a:spcPct val="118000"/>
+                <a:spcPct val="105000"/>
               </a:lnSpc>
               <a:spcAft>
-                <a:spcPts val="2400"/>
+                <a:spcPts val="700"/>
               </a:spcAft>
               <a:buSzPct val="100000"/>
               <a:buChar char="•"/>
             </a:pPr>
             <a:r>
-              <a:rPr lang="en-US" sz="1650" dirty="0">
+              <a:rPr lang="en-US" sz="1100" dirty="0">
                 <a:solidFill>
                   <a:srgbClr val="1E293B"/>
                 </a:solidFill>
@@ -9553,23 +10435,23 @@
                 <a:ea typeface="Calibri" pitchFamily="34" charset="-122"/>
                 <a:cs typeface="Calibri" pitchFamily="34" charset="-120"/>
               </a:rPr>
-              <a:t>One random choice leaves a small set of bins overloaded — the classic balls-in-bins bottleneck.</a:t>
-            </a:r>
-            <a:endParaRPr lang="en-US" sz="1650" dirty="0"/>
-          </a:p>
-          <a:p>
-            <a:pPr marL="228600" indent="-228600">
+              <a:t>10,000 balls · 16 or 32 bins · 10 trials</a:t>
+            </a:r>
+            <a:endParaRPr lang="en-US" sz="1100" dirty="0"/>
+          </a:p>
+          <a:p>
+            <a:pPr marL="152400" indent="-152400">
               <a:lnSpc>
-                <a:spcPct val="118000"/>
+                <a:spcPct val="105000"/>
               </a:lnSpc>
               <a:spcAft>
-                <a:spcPts val="2400"/>
+                <a:spcPts val="700"/>
               </a:spcAft>
               <a:buSzPct val="100000"/>
               <a:buChar char="•"/>
             </a:pPr>
             <a:r>
-              <a:rPr lang="en-US" sz="1650" dirty="0">
+              <a:rPr lang="en-US" sz="1100" dirty="0">
                 <a:solidFill>
                   <a:srgbClr val="1E293B"/>
                 </a:solidFill>
@@ -9577,23 +10459,23 @@
                 <a:ea typeface="Calibri" pitchFamily="34" charset="-122"/>
                 <a:cs typeface="Calibri" pitchFamily="34" charset="-120"/>
               </a:rPr>
-              <a:t>Sampling just two bins and keeping the less-loaded one cuts that bottleneck exponentially, not just by a constant factor.</a:t>
-            </a:r>
-            <a:endParaRPr lang="en-US" sz="1650" dirty="0"/>
-          </a:p>
-          <a:p>
-            <a:pPr marL="228600" indent="-228600">
+              <a:t>Weighted or unweighted balls</a:t>
+            </a:r>
+            <a:endParaRPr lang="en-US" sz="1100" dirty="0"/>
+          </a:p>
+          <a:p>
+            <a:pPr marL="152400" indent="-152400">
               <a:lnSpc>
-                <a:spcPct val="118000"/>
+                <a:spcPct val="105000"/>
               </a:lnSpc>
               <a:spcAft>
-                <a:spcPts val="2400"/>
+                <a:spcPts val="700"/>
               </a:spcAft>
               <a:buSzPct val="100000"/>
               <a:buChar char="•"/>
             </a:pPr>
             <a:r>
-              <a:rPr lang="en-US" sz="1650" dirty="0">
+              <a:rPr lang="en-US" sz="1100" dirty="0">
                 <a:solidFill>
                   <a:srgbClr val="1E293B"/>
                 </a:solidFill>
@@ -9601,23 +10483,23 @@
                 <a:ea typeface="Calibri" pitchFamily="34" charset="-122"/>
                 <a:cs typeface="Calibri" pitchFamily="34" charset="-120"/>
               </a:rPr>
-              <a:t>This is the power-of-two-choices result (Mitzenmacher, 2001): a couple bits of local information go a very long way.</a:t>
-            </a:r>
-            <a:endParaRPr lang="en-US" sz="1650" dirty="0"/>
-          </a:p>
-          <a:p>
-            <a:pPr marL="228600" indent="-228600">
+              <a:t>Empty or randomly initialized bins</a:t>
+            </a:r>
+            <a:endParaRPr lang="en-US" sz="1100" dirty="0"/>
+          </a:p>
+          <a:p>
+            <a:pPr marL="152400" indent="-152400">
               <a:lnSpc>
-                <a:spcPct val="118000"/>
+                <a:spcPct val="105000"/>
               </a:lnSpc>
               <a:spcAft>
-                <a:spcPts val="2400"/>
+                <a:spcPts val="700"/>
               </a:spcAft>
               <a:buSzPct val="100000"/>
               <a:buChar char="•"/>
             </a:pPr>
             <a:r>
-              <a:rPr lang="en-US" sz="1650" dirty="0">
+              <a:rPr lang="en-US" sz="1100" dirty="0">
                 <a:solidFill>
                   <a:srgbClr val="1E293B"/>
                 </a:solidFill>
@@ -9625,30 +10507,54 @@
                 <a:ea typeface="Calibri" pitchFamily="34" charset="-122"/>
                 <a:cs typeface="Calibri" pitchFamily="34" charset="-120"/>
               </a:rPr>
-              <a:t>Beyond two choices, more sampling keeps helping, but only by changing the base of an already-tiny logarithm — diminishing returns, fast.</a:t>
-            </a:r>
-            <a:endParaRPr lang="en-US" sz="1650" dirty="0"/>
-          </a:p>
-        </p:txBody>
-      </p:sp>
-      <p:sp>
-        <p:nvSpPr>
-          <p:cNvPr id="5" name="Shape 3"/>
-          <p:cNvSpPr/>
-          <p:nvPr/>
-        </p:nvSpPr>
-        <p:spPr>
-          <a:xfrm>
-            <a:off x="7178040" y="1325880"/>
-            <a:ext cx="4465015" cy="2788920"/>
+              <a:t>Selected policy + parameters (k, heap size s)</a:t>
+            </a:r>
+            <a:endParaRPr lang="en-US" sz="1100" dirty="0"/>
+          </a:p>
+          <a:p>
+            <a:pPr marL="152400" indent="-152400">
+              <a:lnSpc>
+                <a:spcPct val="105000"/>
+              </a:lnSpc>
+              <a:spcAft>
+                <a:spcPts val="700"/>
+              </a:spcAft>
+              <a:buSzPct val="100000"/>
+              <a:buChar char="•"/>
+            </a:pPr>
+            <a:r>
+              <a:rPr lang="en-US" sz="1100" dirty="0">
+                <a:solidFill>
+                  <a:srgbClr val="1E293B"/>
+                </a:solidFill>
+                <a:latin typeface="Calibri" pitchFamily="34" charset="0"/>
+                <a:ea typeface="Calibri" pitchFamily="34" charset="-122"/>
+                <a:cs typeface="Calibri" pitchFamily="34" charset="-120"/>
+              </a:rPr>
+              <a:t>Seeds and cost weights</a:t>
+            </a:r>
+            <a:endParaRPr lang="en-US" sz="1100" dirty="0"/>
+          </a:p>
+        </p:txBody>
+      </p:sp>
+      <p:sp>
+        <p:nvSpPr>
+          <p:cNvPr id="25" name="Shape 23"/>
+          <p:cNvSpPr/>
+          <p:nvPr/>
+        </p:nvSpPr>
+        <p:spPr>
+          <a:xfrm>
+            <a:off x="4322978" y="2423160"/>
+            <a:ext cx="3545738" cy="3337560"/>
           </a:xfrm>
           <a:prstGeom prst="roundRect">
             <a:avLst>
-              <a:gd name="adj" fmla="val 2951"/>
+              <a:gd name="adj" fmla="val 1918"/>
             </a:avLst>
           </a:prstGeom>
           <a:solidFill>
-            <a:srgbClr val="E8EFFD"/>
+            <a:srgbClr val="F1F5F9"/>
           </a:solidFill>
           <a:ln/>
         </p:spPr>
@@ -9662,14 +10568,41 @@
       </p:sp>
       <p:sp>
         <p:nvSpPr>
-          <p:cNvPr id="6" name="Text 4"/>
-          <p:cNvSpPr/>
-          <p:nvPr/>
-        </p:nvSpPr>
-        <p:spPr>
-          <a:xfrm>
-            <a:off x="7434072" y="1481328"/>
-            <a:ext cx="3952951" cy="274320"/>
+          <p:cNvPr id="26" name="Shape 24"/>
+          <p:cNvSpPr/>
+          <p:nvPr/>
+        </p:nvSpPr>
+        <p:spPr>
+          <a:xfrm>
+            <a:off x="4322978" y="2423160"/>
+            <a:ext cx="3545738" cy="54864"/>
+          </a:xfrm>
+          <a:prstGeom prst="rect">
+            <a:avLst/>
+          </a:prstGeom>
+          <a:solidFill>
+            <a:srgbClr val="15803D"/>
+          </a:solidFill>
+          <a:ln/>
+        </p:spPr>
+        <p:txBody>
+          <a:bodyPr/>
+          <a:lstStyle/>
+          <a:p>
+            <a:endParaRPr lang="en-IL"/>
+          </a:p>
+        </p:txBody>
+      </p:sp>
+      <p:sp>
+        <p:nvSpPr>
+          <p:cNvPr id="27" name="Text 25"/>
+          <p:cNvSpPr/>
+          <p:nvPr/>
+        </p:nvSpPr>
+        <p:spPr>
+          <a:xfrm>
+            <a:off x="4505858" y="2587752"/>
+            <a:ext cx="3179978" cy="292608"/>
           </a:xfrm>
           <a:prstGeom prst="rect">
             <a:avLst/>
@@ -9685,7 +10618,219 @@
               <a:buNone/>
             </a:pPr>
             <a:r>
-              <a:rPr lang="en-US" sz="1000" b="1" kern="0" spc="100" dirty="0">
+              <a:rPr lang="en-US" sz="1200" b="1" kern="0" spc="50" dirty="0">
+                <a:solidFill>
+                  <a:srgbClr val="15803D"/>
+                </a:solidFill>
+                <a:latin typeface="Calibri" pitchFamily="34" charset="0"/>
+                <a:ea typeface="Calibri" pitchFamily="34" charset="-122"/>
+                <a:cs typeface="Calibri" pitchFamily="34" charset="-120"/>
+              </a:rPr>
+              <a:t>SIMULATORS</a:t>
+            </a:r>
+            <a:endParaRPr lang="en-US" sz="1200" dirty="0"/>
+          </a:p>
+        </p:txBody>
+      </p:sp>
+      <p:sp>
+        <p:nvSpPr>
+          <p:cNvPr id="28" name="Shape 26"/>
+          <p:cNvSpPr/>
+          <p:nvPr/>
+        </p:nvSpPr>
+        <p:spPr>
+          <a:xfrm>
+            <a:off x="4505858" y="2935224"/>
+            <a:ext cx="3179978" cy="841248"/>
+          </a:xfrm>
+          <a:prstGeom prst="roundRect">
+            <a:avLst>
+              <a:gd name="adj" fmla="val 6522"/>
+            </a:avLst>
+          </a:prstGeom>
+          <a:solidFill>
+            <a:srgbClr val="FFFFFF"/>
+          </a:solidFill>
+          <a:ln w="12700">
+            <a:solidFill>
+              <a:srgbClr val="15803D"/>
+            </a:solidFill>
+            <a:prstDash val="dash"/>
+          </a:ln>
+        </p:spPr>
+        <p:txBody>
+          <a:bodyPr/>
+          <a:lstStyle/>
+          <a:p>
+            <a:endParaRPr lang="en-IL"/>
+          </a:p>
+        </p:txBody>
+      </p:sp>
+      <p:sp>
+        <p:nvSpPr>
+          <p:cNvPr id="29" name="Text 27"/>
+          <p:cNvSpPr/>
+          <p:nvPr/>
+        </p:nvSpPr>
+        <p:spPr>
+          <a:xfrm>
+            <a:off x="4615586" y="3026664"/>
+            <a:ext cx="2960522" cy="237744"/>
+          </a:xfrm>
+          <a:prstGeom prst="rect">
+            <a:avLst/>
+          </a:prstGeom>
+          <a:noFill/>
+          <a:ln/>
+        </p:spPr>
+        <p:txBody>
+          <a:bodyPr wrap="square" lIns="0" tIns="0" rIns="0" bIns="0" rtlCol="0" anchor="ctr"/>
+          <a:lstStyle/>
+          <a:p>
+            <a:pPr marL="0" indent="0">
+              <a:buNone/>
+            </a:pPr>
+            <a:r>
+              <a:rPr lang="en-US" sz="1150" b="1" dirty="0">
+                <a:solidFill>
+                  <a:srgbClr val="15803D"/>
+                </a:solidFill>
+                <a:latin typeface="Calibri" pitchFamily="34" charset="0"/>
+                <a:ea typeface="Calibri" pitchFamily="34" charset="-122"/>
+                <a:cs typeface="Calibri" pitchFamily="34" charset="-120"/>
+              </a:rPr>
+              <a:t>SimulationBase</a:t>
+            </a:r>
+            <a:r>
+              <a:rPr lang="en-US" sz="950" i="1" dirty="0">
+                <a:solidFill>
+                  <a:srgbClr val="64748B"/>
+                </a:solidFill>
+                <a:latin typeface="Calibri" pitchFamily="34" charset="0"/>
+                <a:ea typeface="Calibri" pitchFamily="34" charset="-122"/>
+                <a:cs typeface="Calibri" pitchFamily="34" charset="-120"/>
+              </a:rPr>
+              <a:t>  ‹abstract›</a:t>
+            </a:r>
+            <a:endParaRPr lang="en-US" sz="1150" dirty="0"/>
+          </a:p>
+        </p:txBody>
+      </p:sp>
+      <p:sp>
+        <p:nvSpPr>
+          <p:cNvPr id="30" name="Text 28"/>
+          <p:cNvSpPr/>
+          <p:nvPr/>
+        </p:nvSpPr>
+        <p:spPr>
+          <a:xfrm>
+            <a:off x="4615586" y="3264408"/>
+            <a:ext cx="2960522" cy="237744"/>
+          </a:xfrm>
+          <a:prstGeom prst="rect">
+            <a:avLst/>
+          </a:prstGeom>
+          <a:noFill/>
+          <a:ln/>
+        </p:spPr>
+        <p:txBody>
+          <a:bodyPr wrap="square" lIns="0" tIns="0" rIns="0" bIns="0" rtlCol="0" anchor="ctr"/>
+          <a:lstStyle/>
+          <a:p>
+            <a:pPr marL="0" indent="0">
+              <a:buNone/>
+            </a:pPr>
+            <a:r>
+              <a:rPr lang="en-US" sz="980" dirty="0">
+                <a:solidFill>
+                  <a:srgbClr val="64748B"/>
+                </a:solidFill>
+                <a:latin typeface="Calibri" pitchFamily="34" charset="0"/>
+                <a:ea typeface="Calibri" pitchFamily="34" charset="-122"/>
+                <a:cs typeface="Calibri" pitchFamily="34" charset="-120"/>
+              </a:rPr>
+              <a:t>Owns the load array, ball arrival, and cost accumulation.</a:t>
+            </a:r>
+            <a:endParaRPr lang="en-US" sz="980" dirty="0"/>
+          </a:p>
+        </p:txBody>
+      </p:sp>
+      <p:sp>
+        <p:nvSpPr>
+          <p:cNvPr id="31" name="Text 29"/>
+          <p:cNvSpPr/>
+          <p:nvPr/>
+        </p:nvSpPr>
+        <p:spPr>
+          <a:xfrm>
+            <a:off x="4615586" y="3493008"/>
+            <a:ext cx="2960522" cy="237744"/>
+          </a:xfrm>
+          <a:prstGeom prst="rect">
+            <a:avLst/>
+          </a:prstGeom>
+          <a:noFill/>
+          <a:ln/>
+        </p:spPr>
+        <p:txBody>
+          <a:bodyPr wrap="square" lIns="0" tIns="0" rIns="0" bIns="0" rtlCol="0" anchor="ctr"/>
+          <a:lstStyle/>
+          <a:p>
+            <a:pPr marL="0" indent="0">
+              <a:buNone/>
+            </a:pPr>
+            <a:r>
+              <a:rPr lang="en-US" sz="980" i="1" dirty="0">
+                <a:solidFill>
+                  <a:srgbClr val="64748B"/>
+                </a:solidFill>
+                <a:latin typeface="Calibri" pitchFamily="34" charset="0"/>
+                <a:ea typeface="Calibri" pitchFamily="34" charset="-122"/>
+                <a:cs typeface="Calibri" pitchFamily="34" charset="-120"/>
+              </a:rPr>
+              <a:t>Subclasses implement only: select bin.</a:t>
+            </a:r>
+            <a:endParaRPr lang="en-US" sz="980" dirty="0"/>
+          </a:p>
+        </p:txBody>
+      </p:sp>
+      <p:sp>
+        <p:nvSpPr>
+          <p:cNvPr id="32" name="Text 30"/>
+          <p:cNvSpPr/>
+          <p:nvPr/>
+        </p:nvSpPr>
+        <p:spPr>
+          <a:xfrm>
+            <a:off x="4505858" y="3922776"/>
+            <a:ext cx="3179978" cy="237744"/>
+          </a:xfrm>
+          <a:prstGeom prst="rect">
+            <a:avLst/>
+          </a:prstGeom>
+          <a:noFill/>
+          <a:ln/>
+        </p:spPr>
+        <p:txBody>
+          <a:bodyPr wrap="square" lIns="0" tIns="0" rIns="0" bIns="0" rtlCol="0" anchor="ctr"/>
+          <a:lstStyle/>
+          <a:p>
+            <a:pPr marL="0" indent="0">
+              <a:buNone/>
+            </a:pPr>
+            <a:r>
+              <a:rPr lang="en-US" sz="1080" b="1" dirty="0">
+                <a:solidFill>
+                  <a:srgbClr val="E2E8F0"/>
+                </a:solidFill>
+                <a:latin typeface="Calibri" pitchFamily="34" charset="0"/>
+                <a:ea typeface="Calibri" pitchFamily="34" charset="-122"/>
+                <a:cs typeface="Calibri" pitchFamily="34" charset="-120"/>
+              </a:rPr>
+              <a:t>↳ </a:t>
+            </a:r>
+            <a:r>
+              <a:rPr lang="en-US" sz="1080" b="1" dirty="0">
                 <a:solidFill>
                   <a:srgbClr val="2563EB"/>
                 </a:solidFill>
@@ -9693,22 +10838,22 @@
                 <a:ea typeface="Calibri" pitchFamily="34" charset="-122"/>
                 <a:cs typeface="Calibri" pitchFamily="34" charset="-120"/>
               </a:rPr>
-              <a:t>MAX LOAD, n BALLS INTO n BINS (WHP)</a:t>
-            </a:r>
-            <a:endParaRPr lang="en-US" sz="1000" dirty="0"/>
-          </a:p>
-        </p:txBody>
-      </p:sp>
-      <p:sp>
-        <p:nvSpPr>
-          <p:cNvPr id="7" name="Text 5"/>
-          <p:cNvSpPr/>
-          <p:nvPr/>
-        </p:nvSpPr>
-        <p:spPr>
-          <a:xfrm>
-            <a:off x="7434072" y="1828800"/>
-            <a:ext cx="3952951" cy="237744"/>
+              <a:t>PowerKSimulator</a:t>
+            </a:r>
+            <a:endParaRPr lang="en-US" sz="1080" dirty="0"/>
+          </a:p>
+        </p:txBody>
+      </p:sp>
+      <p:sp>
+        <p:nvSpPr>
+          <p:cNvPr id="33" name="Text 31"/>
+          <p:cNvSpPr/>
+          <p:nvPr/>
+        </p:nvSpPr>
+        <p:spPr>
+          <a:xfrm>
+            <a:off x="4707026" y="4142232"/>
+            <a:ext cx="2978810" cy="219456"/>
           </a:xfrm>
           <a:prstGeom prst="rect">
             <a:avLst/>
@@ -9724,30 +10869,30 @@
               <a:buNone/>
             </a:pPr>
             <a:r>
-              <a:rPr lang="en-US" sz="1150" b="1" dirty="0">
-                <a:solidFill>
-                  <a:srgbClr val="475569"/>
-                </a:solidFill>
-                <a:latin typeface="Calibri" pitchFamily="34" charset="0"/>
-                <a:ea typeface="Calibri" pitchFamily="34" charset="-122"/>
-                <a:cs typeface="Calibri" pitchFamily="34" charset="-120"/>
-              </a:rPr>
-              <a:t>1 random choice</a:t>
-            </a:r>
-            <a:endParaRPr lang="en-US" sz="1150" dirty="0"/>
-          </a:p>
-        </p:txBody>
-      </p:sp>
-      <p:sp>
-        <p:nvSpPr>
-          <p:cNvPr id="8" name="Text 6"/>
-          <p:cNvSpPr/>
-          <p:nvPr/>
-        </p:nvSpPr>
-        <p:spPr>
-          <a:xfrm>
-            <a:off x="7434072" y="2057400"/>
-            <a:ext cx="3952951" cy="320040"/>
+              <a:rPr lang="en-US" sz="980" dirty="0">
+                <a:solidFill>
+                  <a:srgbClr val="64748B"/>
+                </a:solidFill>
+                <a:latin typeface="Calibri" pitchFamily="34" charset="0"/>
+                <a:ea typeface="Calibri" pitchFamily="34" charset="-122"/>
+                <a:cs typeface="Calibri" pitchFamily="34" charset="-120"/>
+              </a:rPr>
+              <a:t>Random, Power-k, Absolute minimum</a:t>
+            </a:r>
+            <a:endParaRPr lang="en-US" sz="980" dirty="0"/>
+          </a:p>
+        </p:txBody>
+      </p:sp>
+      <p:sp>
+        <p:nvSpPr>
+          <p:cNvPr id="34" name="Text 32"/>
+          <p:cNvSpPr/>
+          <p:nvPr/>
+        </p:nvSpPr>
+        <p:spPr>
+          <a:xfrm>
+            <a:off x="4505858" y="4434840"/>
+            <a:ext cx="3179978" cy="237744"/>
           </a:xfrm>
           <a:prstGeom prst="rect">
             <a:avLst/>
@@ -9763,374 +10908,391 @@
               <a:buNone/>
             </a:pPr>
             <a:r>
-              <a:rPr lang="en-US" sz="1700" b="1" dirty="0">
+              <a:rPr lang="en-US" sz="1080" b="1" dirty="0">
+                <a:solidFill>
+                  <a:srgbClr val="E2E8F0"/>
+                </a:solidFill>
+                <a:latin typeface="Calibri" pitchFamily="34" charset="0"/>
+                <a:ea typeface="Calibri" pitchFamily="34" charset="-122"/>
+                <a:cs typeface="Calibri" pitchFamily="34" charset="-120"/>
+              </a:rPr>
+              <a:t>↳ </a:t>
+            </a:r>
+            <a:r>
+              <a:rPr lang="en-US" sz="1080" b="1" dirty="0">
+                <a:solidFill>
+                  <a:srgbClr val="15803D"/>
+                </a:solidFill>
+                <a:latin typeface="Calibri" pitchFamily="34" charset="0"/>
+                <a:ea typeface="Calibri" pitchFamily="34" charset="-122"/>
+                <a:cs typeface="Calibri" pitchFamily="34" charset="-120"/>
+              </a:rPr>
+              <a:t>StatefulRoundRobinSimulator</a:t>
+            </a:r>
+            <a:endParaRPr lang="en-US" sz="1080" dirty="0"/>
+          </a:p>
+        </p:txBody>
+      </p:sp>
+      <p:sp>
+        <p:nvSpPr>
+          <p:cNvPr id="35" name="Text 33"/>
+          <p:cNvSpPr/>
+          <p:nvPr/>
+        </p:nvSpPr>
+        <p:spPr>
+          <a:xfrm>
+            <a:off x="4707026" y="4654296"/>
+            <a:ext cx="2978810" cy="219456"/>
+          </a:xfrm>
+          <a:prstGeom prst="rect">
+            <a:avLst/>
+          </a:prstGeom>
+          <a:noFill/>
+          <a:ln/>
+        </p:spPr>
+        <p:txBody>
+          <a:bodyPr wrap="square" lIns="0" tIns="0" rIns="0" bIns="0" rtlCol="0" anchor="ctr"/>
+          <a:lstStyle/>
+          <a:p>
+            <a:pPr marL="0" indent="0">
+              <a:buNone/>
+            </a:pPr>
+            <a:r>
+              <a:rPr lang="en-US" sz="980" dirty="0">
+                <a:solidFill>
+                  <a:srgbClr val="64748B"/>
+                </a:solidFill>
+                <a:latin typeface="Calibri" pitchFamily="34" charset="0"/>
+                <a:ea typeface="Calibri" pitchFamily="34" charset="-122"/>
+                <a:cs typeface="Calibri" pitchFamily="34" charset="-120"/>
+              </a:rPr>
+              <a:t>Round-robin pointer state</a:t>
+            </a:r>
+            <a:endParaRPr lang="en-US" sz="980" dirty="0"/>
+          </a:p>
+        </p:txBody>
+      </p:sp>
+      <p:sp>
+        <p:nvSpPr>
+          <p:cNvPr id="36" name="Text 34"/>
+          <p:cNvSpPr/>
+          <p:nvPr/>
+        </p:nvSpPr>
+        <p:spPr>
+          <a:xfrm>
+            <a:off x="4505858" y="4946904"/>
+            <a:ext cx="3179978" cy="237744"/>
+          </a:xfrm>
+          <a:prstGeom prst="rect">
+            <a:avLst/>
+          </a:prstGeom>
+          <a:noFill/>
+          <a:ln/>
+        </p:spPr>
+        <p:txBody>
+          <a:bodyPr wrap="square" lIns="0" tIns="0" rIns="0" bIns="0" rtlCol="0" anchor="ctr"/>
+          <a:lstStyle/>
+          <a:p>
+            <a:pPr marL="0" indent="0">
+              <a:buNone/>
+            </a:pPr>
+            <a:r>
+              <a:rPr lang="en-US" sz="1080" b="1" dirty="0">
+                <a:solidFill>
+                  <a:srgbClr val="E2E8F0"/>
+                </a:solidFill>
+                <a:latin typeface="Calibri" pitchFamily="34" charset="0"/>
+                <a:ea typeface="Calibri" pitchFamily="34" charset="-122"/>
+                <a:cs typeface="Calibri" pitchFamily="34" charset="-120"/>
+              </a:rPr>
+              <a:t>↳ </a:t>
+            </a:r>
+            <a:r>
+              <a:rPr lang="en-US" sz="1080" b="1" dirty="0">
+                <a:solidFill>
+                  <a:srgbClr val="C2660D"/>
+                </a:solidFill>
+                <a:latin typeface="Calibri" pitchFamily="34" charset="0"/>
+                <a:ea typeface="Calibri" pitchFamily="34" charset="-122"/>
+                <a:cs typeface="Calibri" pitchFamily="34" charset="-120"/>
+              </a:rPr>
+              <a:t>HeapSizeSPowerOfKSimulator</a:t>
+            </a:r>
+            <a:endParaRPr lang="en-US" sz="1080" dirty="0"/>
+          </a:p>
+        </p:txBody>
+      </p:sp>
+      <p:sp>
+        <p:nvSpPr>
+          <p:cNvPr id="37" name="Text 35"/>
+          <p:cNvSpPr/>
+          <p:nvPr/>
+        </p:nvSpPr>
+        <p:spPr>
+          <a:xfrm>
+            <a:off x="4707026" y="5166360"/>
+            <a:ext cx="2978810" cy="219456"/>
+          </a:xfrm>
+          <a:prstGeom prst="rect">
+            <a:avLst/>
+          </a:prstGeom>
+          <a:noFill/>
+          <a:ln/>
+        </p:spPr>
+        <p:txBody>
+          <a:bodyPr wrap="square" lIns="0" tIns="0" rIns="0" bIns="0" rtlCol="0" anchor="ctr"/>
+          <a:lstStyle/>
+          <a:p>
+            <a:pPr marL="0" indent="0">
+              <a:buNone/>
+            </a:pPr>
+            <a:r>
+              <a:rPr lang="en-US" sz="980" dirty="0">
+                <a:solidFill>
+                  <a:srgbClr val="64748B"/>
+                </a:solidFill>
+                <a:latin typeface="Calibri" pitchFamily="34" charset="0"/>
+                <a:ea typeface="Calibri" pitchFamily="34" charset="-122"/>
+                <a:cs typeface="Calibri" pitchFamily="34" charset="-120"/>
+              </a:rPr>
+              <a:t>Partial heap / full heap state</a:t>
+            </a:r>
+            <a:endParaRPr lang="en-US" sz="980" dirty="0"/>
+          </a:p>
+        </p:txBody>
+      </p:sp>
+      <p:sp>
+        <p:nvSpPr>
+          <p:cNvPr id="38" name="Shape 36"/>
+          <p:cNvSpPr/>
+          <p:nvPr/>
+        </p:nvSpPr>
+        <p:spPr>
+          <a:xfrm>
+            <a:off x="8097317" y="2423160"/>
+            <a:ext cx="3545738" cy="3337560"/>
+          </a:xfrm>
+          <a:prstGeom prst="roundRect">
+            <a:avLst>
+              <a:gd name="adj" fmla="val 1918"/>
+            </a:avLst>
+          </a:prstGeom>
+          <a:solidFill>
+            <a:srgbClr val="F1F5F9"/>
+          </a:solidFill>
+          <a:ln/>
+        </p:spPr>
+        <p:txBody>
+          <a:bodyPr/>
+          <a:lstStyle/>
+          <a:p>
+            <a:endParaRPr lang="en-IL"/>
+          </a:p>
+        </p:txBody>
+      </p:sp>
+      <p:sp>
+        <p:nvSpPr>
+          <p:cNvPr id="39" name="Shape 37"/>
+          <p:cNvSpPr/>
+          <p:nvPr/>
+        </p:nvSpPr>
+        <p:spPr>
+          <a:xfrm>
+            <a:off x="8097317" y="2423160"/>
+            <a:ext cx="3545738" cy="54864"/>
+          </a:xfrm>
+          <a:prstGeom prst="rect">
+            <a:avLst/>
+          </a:prstGeom>
+          <a:solidFill>
+            <a:srgbClr val="C2660D"/>
+          </a:solidFill>
+          <a:ln/>
+        </p:spPr>
+        <p:txBody>
+          <a:bodyPr/>
+          <a:lstStyle/>
+          <a:p>
+            <a:endParaRPr lang="en-IL"/>
+          </a:p>
+        </p:txBody>
+      </p:sp>
+      <p:sp>
+        <p:nvSpPr>
+          <p:cNvPr id="40" name="Text 38"/>
+          <p:cNvSpPr/>
+          <p:nvPr/>
+        </p:nvSpPr>
+        <p:spPr>
+          <a:xfrm>
+            <a:off x="8280197" y="2587752"/>
+            <a:ext cx="3179978" cy="292608"/>
+          </a:xfrm>
+          <a:prstGeom prst="rect">
+            <a:avLst/>
+          </a:prstGeom>
+          <a:noFill/>
+          <a:ln/>
+        </p:spPr>
+        <p:txBody>
+          <a:bodyPr wrap="square" lIns="0" tIns="0" rIns="0" bIns="0" rtlCol="0" anchor="ctr"/>
+          <a:lstStyle/>
+          <a:p>
+            <a:pPr marL="0" indent="0">
+              <a:buNone/>
+            </a:pPr>
+            <a:r>
+              <a:rPr lang="en-US" sz="1200" b="1" kern="0" spc="50" dirty="0">
+                <a:solidFill>
+                  <a:srgbClr val="C2660D"/>
+                </a:solidFill>
+                <a:latin typeface="Calibri" pitchFamily="34" charset="0"/>
+                <a:ea typeface="Calibri" pitchFamily="34" charset="-122"/>
+                <a:cs typeface="Calibri" pitchFamily="34" charset="-120"/>
+              </a:rPr>
+              <a:t>METRICS &amp; OUTPUT</a:t>
+            </a:r>
+            <a:endParaRPr lang="en-US" sz="1200" dirty="0"/>
+          </a:p>
+        </p:txBody>
+      </p:sp>
+      <p:sp>
+        <p:nvSpPr>
+          <p:cNvPr id="41" name="Text 39"/>
+          <p:cNvSpPr/>
+          <p:nvPr/>
+        </p:nvSpPr>
+        <p:spPr>
+          <a:xfrm>
+            <a:off x="8280197" y="2953512"/>
+            <a:ext cx="3179978" cy="2670048"/>
+          </a:xfrm>
+          <a:prstGeom prst="rect">
+            <a:avLst/>
+          </a:prstGeom>
+          <a:noFill/>
+          <a:ln/>
+        </p:spPr>
+        <p:txBody>
+          <a:bodyPr wrap="square" lIns="0" tIns="0" rIns="0" bIns="0" rtlCol="0" anchor="t"/>
+          <a:lstStyle/>
+          <a:p>
+            <a:pPr marL="152400" indent="-152400">
+              <a:lnSpc>
+                <a:spcPct val="105000"/>
+              </a:lnSpc>
+              <a:spcAft>
+                <a:spcPts val="700"/>
+              </a:spcAft>
+              <a:buSzPct val="100000"/>
+              <a:buChar char="•"/>
+            </a:pPr>
+            <a:r>
+              <a:rPr lang="en-US" sz="1100" dirty="0">
                 <a:solidFill>
                   <a:srgbClr val="1E293B"/>
                 </a:solidFill>
-                <a:latin typeface="Cambria" pitchFamily="34" charset="0"/>
-                <a:ea typeface="Cambria" pitchFamily="34" charset="-122"/>
-                <a:cs typeface="Cambria" pitchFamily="34" charset="-120"/>
-              </a:rPr>
-              <a:t>Θ( log n / log log n )</a:t>
-            </a:r>
-            <a:endParaRPr lang="en-US" sz="1700" dirty="0"/>
-          </a:p>
-        </p:txBody>
-      </p:sp>
-      <p:sp>
-        <p:nvSpPr>
-          <p:cNvPr id="9" name="Text 7"/>
-          <p:cNvSpPr/>
-          <p:nvPr/>
-        </p:nvSpPr>
-        <p:spPr>
-          <a:xfrm>
-            <a:off x="7434072" y="2359152"/>
-            <a:ext cx="3952951" cy="201168"/>
-          </a:xfrm>
-          <a:prstGeom prst="rect">
-            <a:avLst/>
-          </a:prstGeom>
-          <a:noFill/>
-          <a:ln/>
-        </p:spPr>
-        <p:txBody>
-          <a:bodyPr wrap="square" lIns="0" tIns="0" rIns="0" bIns="0" rtlCol="0" anchor="ctr"/>
-          <a:lstStyle/>
-          <a:p>
-            <a:pPr marL="0" indent="0">
-              <a:buNone/>
-            </a:pPr>
-            <a:r>
-              <a:rPr lang="en-US" sz="950" i="1" dirty="0">
-                <a:solidFill>
-                  <a:srgbClr val="64748B"/>
-                </a:solidFill>
-                <a:latin typeface="Calibri" pitchFamily="34" charset="0"/>
-                <a:ea typeface="Calibri" pitchFamily="34" charset="-122"/>
-                <a:cs typeface="Calibri" pitchFamily="34" charset="-120"/>
-              </a:rPr>
-              <a:t>Propositions 2 &amp; 5</a:t>
-            </a:r>
-            <a:endParaRPr lang="en-US" sz="950" dirty="0"/>
-          </a:p>
-        </p:txBody>
-      </p:sp>
-      <p:sp>
-        <p:nvSpPr>
-          <p:cNvPr id="10" name="Text 8"/>
-          <p:cNvSpPr/>
-          <p:nvPr/>
-        </p:nvSpPr>
-        <p:spPr>
-          <a:xfrm>
-            <a:off x="7434072" y="2542032"/>
-            <a:ext cx="3952951" cy="237744"/>
-          </a:xfrm>
-          <a:prstGeom prst="rect">
-            <a:avLst/>
-          </a:prstGeom>
-          <a:noFill/>
-          <a:ln/>
-        </p:spPr>
-        <p:txBody>
-          <a:bodyPr wrap="square" lIns="0" tIns="0" rIns="0" bIns="0" rtlCol="0" anchor="ctr"/>
-          <a:lstStyle/>
-          <a:p>
-            <a:pPr marL="0" indent="0">
-              <a:buNone/>
-            </a:pPr>
-            <a:r>
-              <a:rPr lang="en-US" sz="1150" b="1" dirty="0">
-                <a:solidFill>
-                  <a:srgbClr val="2563EB"/>
-                </a:solidFill>
-                <a:latin typeface="Calibri" pitchFamily="34" charset="0"/>
-                <a:ea typeface="Calibri" pitchFamily="34" charset="-122"/>
-                <a:cs typeface="Calibri" pitchFamily="34" charset="-120"/>
-              </a:rPr>
-              <a:t>2 choices — Power-2</a:t>
-            </a:r>
-            <a:endParaRPr lang="en-US" sz="1150" dirty="0"/>
-          </a:p>
-        </p:txBody>
-      </p:sp>
-      <p:sp>
-        <p:nvSpPr>
-          <p:cNvPr id="11" name="Text 9"/>
-          <p:cNvSpPr/>
-          <p:nvPr/>
-        </p:nvSpPr>
-        <p:spPr>
-          <a:xfrm>
-            <a:off x="7434072" y="2770632"/>
-            <a:ext cx="3952951" cy="320040"/>
-          </a:xfrm>
-          <a:prstGeom prst="rect">
-            <a:avLst/>
-          </a:prstGeom>
-          <a:noFill/>
-          <a:ln/>
-        </p:spPr>
-        <p:txBody>
-          <a:bodyPr wrap="square" lIns="0" tIns="0" rIns="0" bIns="0" rtlCol="0" anchor="ctr"/>
-          <a:lstStyle/>
-          <a:p>
-            <a:pPr marL="0" indent="0">
-              <a:buNone/>
-            </a:pPr>
-            <a:r>
-              <a:rPr lang="en-US" sz="1700" b="1" dirty="0">
+                <a:latin typeface="Calibri" pitchFamily="34" charset="0"/>
+                <a:ea typeface="Calibri" pitchFamily="34" charset="-122"/>
+                <a:cs typeface="Calibri" pitchFamily="34" charset="-120"/>
+              </a:rPr>
+              <a:t>Max load, min load, max–min gap, CV / imbalance</a:t>
+            </a:r>
+            <a:endParaRPr lang="en-US" sz="1100" dirty="0"/>
+          </a:p>
+          <a:p>
+            <a:pPr marL="152400" indent="-152400">
+              <a:lnSpc>
+                <a:spcPct val="105000"/>
+              </a:lnSpc>
+              <a:spcAft>
+                <a:spcPts val="700"/>
+              </a:spcAft>
+              <a:buSzPct val="100000"/>
+              <a:buChar char="•"/>
+            </a:pPr>
+            <a:r>
+              <a:rPr lang="en-US" sz="1100" dirty="0">
                 <a:solidFill>
                   <a:srgbClr val="1E293B"/>
                 </a:solidFill>
-                <a:latin typeface="Cambria" pitchFamily="34" charset="0"/>
-                <a:ea typeface="Cambria" pitchFamily="34" charset="-122"/>
-                <a:cs typeface="Cambria" pitchFamily="34" charset="-120"/>
-              </a:rPr>
-              <a:t>log</a:t>
-            </a:r>
-            <a:r>
-              <a:rPr lang="en-US" sz="1700" b="1" baseline="-40000" dirty="0">
+                <a:latin typeface="Calibri" pitchFamily="34" charset="0"/>
+                <a:ea typeface="Calibri" pitchFamily="34" charset="-122"/>
+                <a:cs typeface="Calibri" pitchFamily="34" charset="-120"/>
+              </a:rPr>
+              <a:t>Cost per ball and total cost</a:t>
+            </a:r>
+            <a:endParaRPr lang="en-US" sz="1100" dirty="0"/>
+          </a:p>
+          <a:p>
+            <a:pPr marL="152400" indent="-152400">
+              <a:lnSpc>
+                <a:spcPct val="105000"/>
+              </a:lnSpc>
+              <a:spcAft>
+                <a:spcPts val="700"/>
+              </a:spcAft>
+              <a:buSzPct val="100000"/>
+              <a:buChar char="•"/>
+            </a:pPr>
+            <a:r>
+              <a:rPr lang="en-US" sz="1100" dirty="0">
                 <a:solidFill>
                   <a:srgbClr val="1E293B"/>
                 </a:solidFill>
-                <a:latin typeface="Cambria" pitchFamily="34" charset="0"/>
-                <a:ea typeface="Cambria" pitchFamily="34" charset="-122"/>
-                <a:cs typeface="Cambria" pitchFamily="34" charset="-120"/>
-              </a:rPr>
-              <a:t>2</a:t>
-            </a:r>
-            <a:r>
-              <a:rPr lang="en-US" sz="1700" b="1" dirty="0">
+                <a:latin typeface="Calibri" pitchFamily="34" charset="0"/>
+                <a:ea typeface="Calibri" pitchFamily="34" charset="-122"/>
+                <a:cs typeface="Calibri" pitchFamily="34" charset="-120"/>
+              </a:rPr>
+              <a:t>Aggregated across all 10 trials</a:t>
+            </a:r>
+            <a:endParaRPr lang="en-US" sz="1100" dirty="0"/>
+          </a:p>
+          <a:p>
+            <a:pPr marL="152400" indent="-152400">
+              <a:lnSpc>
+                <a:spcPct val="105000"/>
+              </a:lnSpc>
+              <a:spcAft>
+                <a:spcPts val="700"/>
+              </a:spcAft>
+              <a:buSzPct val="100000"/>
+              <a:buChar char="•"/>
+            </a:pPr>
+            <a:r>
+              <a:rPr lang="en-US" sz="1100" dirty="0">
                 <a:solidFill>
                   <a:srgbClr val="1E293B"/>
                 </a:solidFill>
-                <a:latin typeface="Cambria" pitchFamily="34" charset="0"/>
-                <a:ea typeface="Cambria" pitchFamily="34" charset="-122"/>
-                <a:cs typeface="Cambria" pitchFamily="34" charset="-120"/>
-              </a:rPr>
-              <a:t>(log n) + O(1)</a:t>
-            </a:r>
-            <a:endParaRPr lang="en-US" sz="1700" dirty="0"/>
-          </a:p>
-        </p:txBody>
-      </p:sp>
-      <p:sp>
-        <p:nvSpPr>
-          <p:cNvPr id="12" name="Text 10"/>
-          <p:cNvSpPr/>
-          <p:nvPr/>
-        </p:nvSpPr>
-        <p:spPr>
-          <a:xfrm>
-            <a:off x="7434072" y="3072384"/>
-            <a:ext cx="3952951" cy="201168"/>
-          </a:xfrm>
-          <a:prstGeom prst="rect">
-            <a:avLst/>
-          </a:prstGeom>
-          <a:noFill/>
-          <a:ln/>
-        </p:spPr>
-        <p:txBody>
-          <a:bodyPr wrap="square" lIns="0" tIns="0" rIns="0" bIns="0" rtlCol="0" anchor="ctr"/>
-          <a:lstStyle/>
-          <a:p>
-            <a:pPr marL="0" indent="0">
-              <a:buNone/>
-            </a:pPr>
-            <a:r>
-              <a:rPr lang="en-US" sz="950" i="1" dirty="0">
-                <a:solidFill>
-                  <a:srgbClr val="64748B"/>
-                </a:solidFill>
-                <a:latin typeface="Calibri" pitchFamily="34" charset="0"/>
-                <a:ea typeface="Calibri" pitchFamily="34" charset="-122"/>
-                <a:cs typeface="Calibri" pitchFamily="34" charset="-120"/>
-              </a:rPr>
-              <a:t>Theorem 2 (Mitzenmacher, 2001)</a:t>
-            </a:r>
-            <a:endParaRPr lang="en-US" sz="950" dirty="0"/>
-          </a:p>
-        </p:txBody>
-      </p:sp>
-      <p:sp>
-        <p:nvSpPr>
-          <p:cNvPr id="13" name="Text 11"/>
-          <p:cNvSpPr/>
-          <p:nvPr/>
-        </p:nvSpPr>
-        <p:spPr>
-          <a:xfrm>
-            <a:off x="7434072" y="3255264"/>
-            <a:ext cx="3952951" cy="237744"/>
-          </a:xfrm>
-          <a:prstGeom prst="rect">
-            <a:avLst/>
-          </a:prstGeom>
-          <a:noFill/>
-          <a:ln/>
-        </p:spPr>
-        <p:txBody>
-          <a:bodyPr wrap="square" lIns="0" tIns="0" rIns="0" bIns="0" rtlCol="0" anchor="ctr"/>
-          <a:lstStyle/>
-          <a:p>
-            <a:pPr marL="0" indent="0">
-              <a:buNone/>
-            </a:pPr>
-            <a:r>
-              <a:rPr lang="en-US" sz="1150" b="1" dirty="0">
-                <a:solidFill>
-                  <a:srgbClr val="2563EB"/>
-                </a:solidFill>
-                <a:latin typeface="Calibri" pitchFamily="34" charset="0"/>
-                <a:ea typeface="Calibri" pitchFamily="34" charset="-122"/>
-                <a:cs typeface="Calibri" pitchFamily="34" charset="-120"/>
-              </a:rPr>
-              <a:t>d choices</a:t>
-            </a:r>
-            <a:endParaRPr lang="en-US" sz="1150" dirty="0"/>
-          </a:p>
-        </p:txBody>
-      </p:sp>
-      <p:sp>
-        <p:nvSpPr>
-          <p:cNvPr id="14" name="Text 12"/>
-          <p:cNvSpPr/>
-          <p:nvPr/>
-        </p:nvSpPr>
-        <p:spPr>
-          <a:xfrm>
-            <a:off x="7434072" y="3483864"/>
-            <a:ext cx="3952951" cy="320040"/>
-          </a:xfrm>
-          <a:prstGeom prst="rect">
-            <a:avLst/>
-          </a:prstGeom>
-          <a:noFill/>
-          <a:ln/>
-        </p:spPr>
-        <p:txBody>
-          <a:bodyPr wrap="square" lIns="0" tIns="0" rIns="0" bIns="0" rtlCol="0" anchor="ctr"/>
-          <a:lstStyle/>
-          <a:p>
-            <a:pPr marL="0" indent="0">
-              <a:buNone/>
-            </a:pPr>
-            <a:r>
-              <a:rPr lang="en-US" sz="1700" b="1" dirty="0">
+                <a:latin typeface="Calibri" pitchFamily="34" charset="0"/>
+                <a:ea typeface="Calibri" pitchFamily="34" charset="-122"/>
+                <a:cs typeface="Calibri" pitchFamily="34" charset="-120"/>
+              </a:rPr>
+              <a:t>Written to a results CSV</a:t>
+            </a:r>
+            <a:endParaRPr lang="en-US" sz="1100" dirty="0"/>
+          </a:p>
+          <a:p>
+            <a:pPr marL="152400" indent="-152400">
+              <a:lnSpc>
+                <a:spcPct val="105000"/>
+              </a:lnSpc>
+              <a:spcAft>
+                <a:spcPts val="700"/>
+              </a:spcAft>
+              <a:buSzPct val="100000"/>
+              <a:buChar char="•"/>
+            </a:pPr>
+            <a:r>
+              <a:rPr lang="en-US" sz="1100" dirty="0">
                 <a:solidFill>
                   <a:srgbClr val="1E293B"/>
                 </a:solidFill>
-                <a:latin typeface="Cambria" pitchFamily="34" charset="0"/>
-                <a:ea typeface="Cambria" pitchFamily="34" charset="-122"/>
-                <a:cs typeface="Cambria" pitchFamily="34" charset="-120"/>
-              </a:rPr>
-              <a:t>log</a:t>
-            </a:r>
-            <a:r>
-              <a:rPr lang="en-US" sz="1700" b="1" baseline="-40000" dirty="0">
-                <a:solidFill>
-                  <a:srgbClr val="1E293B"/>
-                </a:solidFill>
-                <a:latin typeface="Cambria" pitchFamily="34" charset="0"/>
-                <a:ea typeface="Cambria" pitchFamily="34" charset="-122"/>
-                <a:cs typeface="Cambria" pitchFamily="34" charset="-120"/>
-              </a:rPr>
-              <a:t>d</a:t>
-            </a:r>
-            <a:r>
-              <a:rPr lang="en-US" sz="1700" b="1" dirty="0">
-                <a:solidFill>
-                  <a:srgbClr val="1E293B"/>
-                </a:solidFill>
-                <a:latin typeface="Cambria" pitchFamily="34" charset="0"/>
-                <a:ea typeface="Cambria" pitchFamily="34" charset="-122"/>
-                <a:cs typeface="Cambria" pitchFamily="34" charset="-120"/>
-              </a:rPr>
-              <a:t>(log n) + O(1)</a:t>
-            </a:r>
-            <a:endParaRPr lang="en-US" sz="1700" dirty="0"/>
-          </a:p>
-        </p:txBody>
-      </p:sp>
-      <p:sp>
-        <p:nvSpPr>
-          <p:cNvPr id="15" name="Text 13"/>
-          <p:cNvSpPr/>
-          <p:nvPr/>
-        </p:nvSpPr>
-        <p:spPr>
-          <a:xfrm>
-            <a:off x="7434072" y="3785616"/>
-            <a:ext cx="3952951" cy="201168"/>
-          </a:xfrm>
-          <a:prstGeom prst="rect">
-            <a:avLst/>
-          </a:prstGeom>
-          <a:noFill/>
-          <a:ln/>
-        </p:spPr>
-        <p:txBody>
-          <a:bodyPr wrap="square" lIns="0" tIns="0" rIns="0" bIns="0" rtlCol="0" anchor="ctr"/>
-          <a:lstStyle/>
-          <a:p>
-            <a:pPr marL="0" indent="0">
-              <a:buNone/>
-            </a:pPr>
-            <a:r>
-              <a:rPr lang="en-US" sz="950" i="1" dirty="0">
-                <a:solidFill>
-                  <a:srgbClr val="64748B"/>
-                </a:solidFill>
-                <a:latin typeface="Calibri" pitchFamily="34" charset="0"/>
-                <a:ea typeface="Calibri" pitchFamily="34" charset="-122"/>
-                <a:cs typeface="Calibri" pitchFamily="34" charset="-120"/>
-              </a:rPr>
-              <a:t>Theorem 3</a:t>
-            </a:r>
-            <a:endParaRPr lang="en-US" sz="950" dirty="0"/>
-          </a:p>
-        </p:txBody>
-      </p:sp>
-      <p:sp>
-        <p:nvSpPr>
-          <p:cNvPr id="16" name="Text 14"/>
-          <p:cNvSpPr/>
-          <p:nvPr/>
-        </p:nvSpPr>
-        <p:spPr>
-          <a:xfrm>
-            <a:off x="7178040" y="4224528"/>
-            <a:ext cx="4465015" cy="777240"/>
-          </a:xfrm>
-          <a:prstGeom prst="rect">
-            <a:avLst/>
-          </a:prstGeom>
-          <a:noFill/>
-          <a:ln/>
-        </p:spPr>
-        <p:txBody>
-          <a:bodyPr wrap="square" lIns="0" tIns="0" rIns="0" bIns="0" rtlCol="0" anchor="t"/>
-          <a:lstStyle/>
-          <a:p>
-            <a:pPr marL="0" indent="0">
-              <a:lnSpc>
-                <a:spcPct val="112000"/>
-              </a:lnSpc>
-              <a:buNone/>
-            </a:pPr>
-            <a:r>
-              <a:rPr lang="en-US" sz="1100" i="1" dirty="0">
-                <a:solidFill>
-                  <a:srgbClr val="64748B"/>
-                </a:solidFill>
-                <a:latin typeface="Calibri" pitchFamily="34" charset="0"/>
-                <a:ea typeface="Calibri" pitchFamily="34" charset="-122"/>
-                <a:cs typeface="Calibri" pitchFamily="34" charset="-120"/>
-              </a:rPr>
-              <a:t>These bounds assume n balls into n bins. Our simulation runs heavily loaded — 10,000 balls into 16–32 bins — a different regime, but the same qualitative gap motivates Power-2.</a:t>
+                <a:latin typeface="Calibri" pitchFamily="34" charset="0"/>
+                <a:ea typeface="Calibri" pitchFamily="34" charset="-122"/>
+                <a:cs typeface="Calibri" pitchFamily="34" charset="-120"/>
+              </a:rPr>
+              <a:t>Plotting script turns the CSV into the deck's plots</a:t>
             </a:r>
             <a:endParaRPr lang="en-US" sz="1100" dirty="0"/>
           </a:p>
@@ -10138,60 +11300,7 @@
       </p:sp>
       <p:sp>
         <p:nvSpPr>
-          <p:cNvPr id="17" name="Text 15"/>
-          <p:cNvSpPr/>
-          <p:nvPr/>
-        </p:nvSpPr>
-        <p:spPr>
-          <a:xfrm>
-            <a:off x="7178040" y="5074920"/>
-            <a:ext cx="4465015" cy="777240"/>
-          </a:xfrm>
-          <a:prstGeom prst="rect">
-            <a:avLst/>
-          </a:prstGeom>
-          <a:noFill/>
-          <a:ln/>
-        </p:spPr>
-        <p:txBody>
-          <a:bodyPr wrap="square" lIns="0" tIns="0" rIns="0" bIns="0" rtlCol="0" anchor="t"/>
-          <a:lstStyle/>
-          <a:p>
-            <a:pPr marL="0" indent="0">
-              <a:lnSpc>
-                <a:spcPct val="115000"/>
-              </a:lnSpc>
-              <a:buNone/>
-            </a:pPr>
-            <a:r>
-              <a:rPr lang="en-US" sz="1200" b="1" dirty="0">
-                <a:solidFill>
-                  <a:srgbClr val="2563EB"/>
-                </a:solidFill>
-                <a:latin typeface="Calibri" pitchFamily="34" charset="0"/>
-                <a:ea typeface="Calibri" pitchFamily="34" charset="-122"/>
-                <a:cs typeface="Calibri" pitchFamily="34" charset="-120"/>
-              </a:rPr>
-              <a:t>Hypothesis:  </a:t>
-            </a:r>
-            <a:r>
-              <a:rPr lang="en-US" sz="1200" dirty="0">
-                <a:solidFill>
-                  <a:srgbClr val="1E293B"/>
-                </a:solidFill>
-                <a:latin typeface="Calibri" pitchFamily="34" charset="0"/>
-                <a:ea typeface="Calibri" pitchFamily="34" charset="-122"/>
-                <a:cs typeface="Calibri" pitchFamily="34" charset="-120"/>
-              </a:rPr>
-              <a:t>small local information captures most of the benefit. No proof here — the rest of this deck tests it empirically.</a:t>
-            </a:r>
-            <a:endParaRPr lang="en-US" sz="1200" dirty="0"/>
-          </a:p>
-        </p:txBody>
-      </p:sp>
-      <p:sp>
-        <p:nvSpPr>
-          <p:cNvPr id="18" name="Shape 16"/>
+          <p:cNvPr id="42" name="Shape 40"/>
           <p:cNvSpPr/>
           <p:nvPr/>
         </p:nvSpPr>
@@ -10220,7 +11329,7 @@
       </p:sp>
       <p:sp>
         <p:nvSpPr>
-          <p:cNvPr id="19" name="Text 17"/>
+          <p:cNvPr id="43" name="Text 41"/>
           <p:cNvSpPr/>
           <p:nvPr/>
         </p:nvSpPr>
@@ -10251,463 +11360,7 @@
                 <a:ea typeface="Calibri" pitchFamily="34" charset="-122"/>
                 <a:cs typeface="Calibri" pitchFamily="34" charset="-120"/>
               </a:rPr>
-              <a:t>Theory motivates Power-2 as the practical randomized baseline — the rest of the deck checks it against real cost.</a:t>
-            </a:r>
-            <a:endParaRPr lang="en-US" sz="1350" dirty="0"/>
-          </a:p>
-        </p:txBody>
-      </p:sp>
-    </p:spTree>
-  </p:cSld>
-  <p:clrMapOvr>
-    <a:masterClrMapping/>
-  </p:clrMapOvr>
-</p:sld>
-</file>
-
-<file path=ppt/slides/slide6.xml><?xml version="1.0" encoding="utf-8"?>
-<p:sld xmlns:a="http://schemas.openxmlformats.org/drawingml/2006/main" xmlns:r="http://schemas.openxmlformats.org/officeDocument/2006/relationships" xmlns:p="http://schemas.openxmlformats.org/presentationml/2006/main">
-  <p:cSld name="Slide 6">
-    <p:bg>
-      <p:bgPr>
-        <a:solidFill>
-          <a:srgbClr val="FFFFFF"/>
-        </a:solidFill>
-        <a:effectLst/>
-      </p:bgPr>
-    </p:bg>
-    <p:spTree>
-      <p:nvGrpSpPr>
-        <p:cNvPr id="1" name=""/>
-        <p:cNvGrpSpPr/>
-        <p:nvPr/>
-      </p:nvGrpSpPr>
-      <p:grpSpPr>
-        <a:xfrm>
-          <a:off x="0" y="0"/>
-          <a:ext cx="0" cy="0"/>
-          <a:chOff x="0" y="0"/>
-          <a:chExt cx="0" cy="0"/>
-        </a:xfrm>
-      </p:grpSpPr>
-      <p:sp>
-        <p:nvSpPr>
-          <p:cNvPr id="2" name="Text 0"/>
-          <p:cNvSpPr/>
-          <p:nvPr/>
-        </p:nvSpPr>
-        <p:spPr>
-          <a:xfrm>
-            <a:off x="548640" y="411480"/>
-            <a:ext cx="10515600" cy="594360"/>
-          </a:xfrm>
-          <a:prstGeom prst="rect">
-            <a:avLst/>
-          </a:prstGeom>
-          <a:noFill/>
-          <a:ln/>
-        </p:spPr>
-        <p:txBody>
-          <a:bodyPr wrap="square" lIns="0" tIns="0" rIns="0" bIns="0" rtlCol="0" anchor="ctr"/>
-          <a:lstStyle/>
-          <a:p>
-            <a:pPr marL="0" indent="0" algn="l">
-              <a:buNone/>
-            </a:pPr>
-            <a:r>
-              <a:rPr lang="en-US" sz="2900" b="1" dirty="0">
-                <a:solidFill>
-                  <a:srgbClr val="1E293B"/>
-                </a:solidFill>
-                <a:latin typeface="Cambria" pitchFamily="34" charset="0"/>
-                <a:ea typeface="Cambria" pitchFamily="34" charset="-122"/>
-                <a:cs typeface="Cambria" pitchFamily="34" charset="-120"/>
-              </a:rPr>
-              <a:t>Clean Baseline: Power-2 Captures Most of the Gain</a:t>
-            </a:r>
-            <a:endParaRPr lang="en-US" sz="2900" dirty="0"/>
-          </a:p>
-        </p:txBody>
-      </p:sp>
-      <p:sp>
-        <p:nvSpPr>
-          <p:cNvPr id="3" name="Text 1"/>
-          <p:cNvSpPr/>
-          <p:nvPr/>
-        </p:nvSpPr>
-        <p:spPr>
-          <a:xfrm>
-            <a:off x="11505895" y="6473952"/>
-            <a:ext cx="411480" cy="274320"/>
-          </a:xfrm>
-          <a:prstGeom prst="rect">
-            <a:avLst/>
-          </a:prstGeom>
-          <a:noFill/>
-          <a:ln/>
-        </p:spPr>
-        <p:txBody>
-          <a:bodyPr wrap="square" lIns="0" tIns="0" rIns="0" bIns="0" rtlCol="0" anchor="ctr"/>
-          <a:lstStyle/>
-          <a:p>
-            <a:pPr marL="0" indent="0" algn="r">
-              <a:buNone/>
-            </a:pPr>
-            <a:r>
-              <a:rPr lang="en-US" sz="900" dirty="0">
-                <a:solidFill>
-                  <a:srgbClr val="64748B"/>
-                </a:solidFill>
-                <a:latin typeface="Calibri" pitchFamily="34" charset="0"/>
-                <a:ea typeface="Calibri" pitchFamily="34" charset="-122"/>
-                <a:cs typeface="Calibri" pitchFamily="34" charset="-120"/>
-              </a:rPr>
-              <a:t>6</a:t>
-            </a:r>
-            <a:endParaRPr lang="en-US" sz="900" dirty="0"/>
-          </a:p>
-        </p:txBody>
-      </p:sp>
-      <p:pic>
-        <p:nvPicPr>
-          <p:cNvPr id="4" name="Image 0" descr="/home/claude/work/assets/plot_clean_baseline.png"/>
-          <p:cNvPicPr>
-            <a:picLocks noChangeAspect="1"/>
-          </p:cNvPicPr>
-          <p:nvPr/>
-        </p:nvPicPr>
-        <p:blipFill>
-          <a:blip r:embed="rId3"/>
-          <a:stretch>
-            <a:fillRect/>
-          </a:stretch>
-        </p:blipFill>
-        <p:spPr>
-          <a:xfrm>
-            <a:off x="548640" y="1188720"/>
-            <a:ext cx="6858000" cy="4572000"/>
-          </a:xfrm>
-          <a:prstGeom prst="rect">
-            <a:avLst/>
-          </a:prstGeom>
-        </p:spPr>
-      </p:pic>
-      <p:sp>
-        <p:nvSpPr>
-          <p:cNvPr id="5" name="Shape 2"/>
-          <p:cNvSpPr/>
-          <p:nvPr/>
-        </p:nvSpPr>
-        <p:spPr>
-          <a:xfrm>
-            <a:off x="7635240" y="1188720"/>
-            <a:ext cx="4007815" cy="1417320"/>
-          </a:xfrm>
-          <a:prstGeom prst="roundRect">
-            <a:avLst>
-              <a:gd name="adj" fmla="val 5161"/>
-            </a:avLst>
-          </a:prstGeom>
-          <a:solidFill>
-            <a:srgbClr val="F1F5F9"/>
-          </a:solidFill>
-          <a:ln/>
-        </p:spPr>
-        <p:txBody>
-          <a:bodyPr/>
-          <a:lstStyle/>
-          <a:p>
-            <a:endParaRPr lang="en-IL"/>
-          </a:p>
-        </p:txBody>
-      </p:sp>
-      <p:sp>
-        <p:nvSpPr>
-          <p:cNvPr id="6" name="Text 3"/>
-          <p:cNvSpPr/>
-          <p:nvPr/>
-        </p:nvSpPr>
-        <p:spPr>
-          <a:xfrm>
-            <a:off x="7799832" y="1261872"/>
-            <a:ext cx="3678631" cy="822046"/>
-          </a:xfrm>
-          <a:prstGeom prst="rect">
-            <a:avLst/>
-          </a:prstGeom>
-          <a:noFill/>
-          <a:ln/>
-        </p:spPr>
-        <p:txBody>
-          <a:bodyPr wrap="square" lIns="0" tIns="0" rIns="0" bIns="0" rtlCol="0" anchor="b"/>
-          <a:lstStyle/>
-          <a:p>
-            <a:pPr marL="0" indent="0" algn="l">
-              <a:buNone/>
-            </a:pPr>
-            <a:r>
-              <a:rPr lang="en-US" sz="2200" b="1" dirty="0">
-                <a:solidFill>
-                  <a:srgbClr val="2563EB"/>
-                </a:solidFill>
-                <a:latin typeface="Cambria" pitchFamily="34" charset="0"/>
-                <a:ea typeface="Cambria" pitchFamily="34" charset="-122"/>
-                <a:cs typeface="Cambria" pitchFamily="34" charset="-120"/>
-              </a:rPr>
-              <a:t>666.1 → 626.4</a:t>
-            </a:r>
-            <a:endParaRPr lang="en-US" sz="2200" dirty="0"/>
-          </a:p>
-        </p:txBody>
-      </p:sp>
-      <p:sp>
-        <p:nvSpPr>
-          <p:cNvPr id="7" name="Text 4"/>
-          <p:cNvSpPr/>
-          <p:nvPr/>
-        </p:nvSpPr>
-        <p:spPr>
-          <a:xfrm>
-            <a:off x="7799832" y="2039112"/>
-            <a:ext cx="3678631" cy="510235"/>
-          </a:xfrm>
-          <a:prstGeom prst="rect">
-            <a:avLst/>
-          </a:prstGeom>
-          <a:noFill/>
-          <a:ln/>
-        </p:spPr>
-        <p:txBody>
-          <a:bodyPr wrap="square" lIns="0" tIns="0" rIns="0" bIns="0" rtlCol="0" anchor="t"/>
-          <a:lstStyle/>
-          <a:p>
-            <a:pPr marL="0" indent="0" algn="l">
-              <a:buNone/>
-            </a:pPr>
-            <a:r>
-              <a:rPr lang="en-US" sz="1050" dirty="0">
-                <a:solidFill>
-                  <a:srgbClr val="64748B"/>
-                </a:solidFill>
-                <a:latin typeface="Calibri" pitchFamily="34" charset="0"/>
-                <a:ea typeface="Calibri" pitchFamily="34" charset="-122"/>
-                <a:cs typeface="Calibri" pitchFamily="34" charset="-120"/>
-              </a:rPr>
-              <a:t>MAX LOAD, n=16  (RANDOM → POWER-2)</a:t>
-            </a:r>
-            <a:endParaRPr lang="en-US" sz="1050" dirty="0"/>
-          </a:p>
-        </p:txBody>
-      </p:sp>
-      <p:sp>
-        <p:nvSpPr>
-          <p:cNvPr id="8" name="Shape 5"/>
-          <p:cNvSpPr/>
-          <p:nvPr/>
-        </p:nvSpPr>
-        <p:spPr>
-          <a:xfrm>
-            <a:off x="7635240" y="2743200"/>
-            <a:ext cx="4007815" cy="1417320"/>
-          </a:xfrm>
-          <a:prstGeom prst="roundRect">
-            <a:avLst>
-              <a:gd name="adj" fmla="val 5161"/>
-            </a:avLst>
-          </a:prstGeom>
-          <a:solidFill>
-            <a:srgbClr val="F1F5F9"/>
-          </a:solidFill>
-          <a:ln/>
-        </p:spPr>
-        <p:txBody>
-          <a:bodyPr/>
-          <a:lstStyle/>
-          <a:p>
-            <a:endParaRPr lang="en-IL"/>
-          </a:p>
-        </p:txBody>
-      </p:sp>
-      <p:sp>
-        <p:nvSpPr>
-          <p:cNvPr id="9" name="Text 6"/>
-          <p:cNvSpPr/>
-          <p:nvPr/>
-        </p:nvSpPr>
-        <p:spPr>
-          <a:xfrm>
-            <a:off x="7799832" y="2816352"/>
-            <a:ext cx="3678631" cy="822046"/>
-          </a:xfrm>
-          <a:prstGeom prst="rect">
-            <a:avLst/>
-          </a:prstGeom>
-          <a:noFill/>
-          <a:ln/>
-        </p:spPr>
-        <p:txBody>
-          <a:bodyPr wrap="square" lIns="0" tIns="0" rIns="0" bIns="0" rtlCol="0" anchor="b"/>
-          <a:lstStyle/>
-          <a:p>
-            <a:pPr marL="0" indent="0" algn="l">
-              <a:buNone/>
-            </a:pPr>
-            <a:r>
-              <a:rPr lang="en-US" sz="2200" b="1" dirty="0">
-                <a:solidFill>
-                  <a:srgbClr val="2563EB"/>
-                </a:solidFill>
-                <a:latin typeface="Cambria" pitchFamily="34" charset="0"/>
-                <a:ea typeface="Cambria" pitchFamily="34" charset="-122"/>
-                <a:cs typeface="Cambria" pitchFamily="34" charset="-120"/>
-              </a:rPr>
-              <a:t>345.3 → 313.9</a:t>
-            </a:r>
-            <a:endParaRPr lang="en-US" sz="2200" dirty="0"/>
-          </a:p>
-        </p:txBody>
-      </p:sp>
-      <p:sp>
-        <p:nvSpPr>
-          <p:cNvPr id="10" name="Text 7"/>
-          <p:cNvSpPr/>
-          <p:nvPr/>
-        </p:nvSpPr>
-        <p:spPr>
-          <a:xfrm>
-            <a:off x="7799832" y="3593592"/>
-            <a:ext cx="3678631" cy="510235"/>
-          </a:xfrm>
-          <a:prstGeom prst="rect">
-            <a:avLst/>
-          </a:prstGeom>
-          <a:noFill/>
-          <a:ln/>
-        </p:spPr>
-        <p:txBody>
-          <a:bodyPr wrap="square" lIns="0" tIns="0" rIns="0" bIns="0" rtlCol="0" anchor="t"/>
-          <a:lstStyle/>
-          <a:p>
-            <a:pPr marL="0" indent="0" algn="l">
-              <a:buNone/>
-            </a:pPr>
-            <a:r>
-              <a:rPr lang="en-US" sz="1050" dirty="0">
-                <a:solidFill>
-                  <a:srgbClr val="64748B"/>
-                </a:solidFill>
-                <a:latin typeface="Calibri" pitchFamily="34" charset="0"/>
-                <a:ea typeface="Calibri" pitchFamily="34" charset="-122"/>
-                <a:cs typeface="Calibri" pitchFamily="34" charset="-120"/>
-              </a:rPr>
-              <a:t>MAX LOAD, n=32  (RANDOM → POWER-2)</a:t>
-            </a:r>
-            <a:endParaRPr lang="en-US" sz="1050" dirty="0"/>
-          </a:p>
-        </p:txBody>
-      </p:sp>
-      <p:sp>
-        <p:nvSpPr>
-          <p:cNvPr id="11" name="Text 8"/>
-          <p:cNvSpPr/>
-          <p:nvPr/>
-        </p:nvSpPr>
-        <p:spPr>
-          <a:xfrm>
-            <a:off x="7635240" y="4343400"/>
-            <a:ext cx="4007815" cy="1097280"/>
-          </a:xfrm>
-          <a:prstGeom prst="rect">
-            <a:avLst/>
-          </a:prstGeom>
-          <a:noFill/>
-          <a:ln/>
-        </p:spPr>
-        <p:txBody>
-          <a:bodyPr wrap="square" lIns="0" tIns="0" rIns="0" bIns="0" rtlCol="0" anchor="t"/>
-          <a:lstStyle/>
-          <a:p>
-            <a:pPr marL="0" indent="0">
-              <a:buNone/>
-            </a:pPr>
-            <a:r>
-              <a:rPr lang="en-US" sz="1250" i="1" dirty="0">
-                <a:solidFill>
-                  <a:srgbClr val="64748B"/>
-                </a:solidFill>
-                <a:latin typeface="Calibri" pitchFamily="34" charset="0"/>
-                <a:ea typeface="Calibri" pitchFamily="34" charset="-122"/>
-                <a:cs typeface="Calibri" pitchFamily="34" charset="-120"/>
-              </a:rPr>
-              <a:t>Absolute minimum adds only a small improvement beyond Power-2 — at much higher cost.</a:t>
-            </a:r>
-            <a:endParaRPr lang="en-US" sz="1250" dirty="0"/>
-          </a:p>
-        </p:txBody>
-      </p:sp>
-      <p:sp>
-        <p:nvSpPr>
-          <p:cNvPr id="12" name="Shape 9"/>
-          <p:cNvSpPr/>
-          <p:nvPr/>
-        </p:nvSpPr>
-        <p:spPr>
-          <a:xfrm>
-            <a:off x="548640" y="5989320"/>
-            <a:ext cx="11094415" cy="457200"/>
-          </a:xfrm>
-          <a:prstGeom prst="roundRect">
-            <a:avLst>
-              <a:gd name="adj" fmla="val 14000"/>
-            </a:avLst>
-          </a:prstGeom>
-          <a:solidFill>
-            <a:srgbClr val="F1F5F9"/>
-          </a:solidFill>
-          <a:ln/>
-        </p:spPr>
-        <p:txBody>
-          <a:bodyPr/>
-          <a:lstStyle/>
-          <a:p>
-            <a:endParaRPr lang="en-IL"/>
-          </a:p>
-        </p:txBody>
-      </p:sp>
-      <p:sp>
-        <p:nvSpPr>
-          <p:cNvPr id="13" name="Text 10"/>
-          <p:cNvSpPr/>
-          <p:nvPr/>
-        </p:nvSpPr>
-        <p:spPr>
-          <a:xfrm>
-            <a:off x="777240" y="5989320"/>
-            <a:ext cx="10637215" cy="457200"/>
-          </a:xfrm>
-          <a:prstGeom prst="rect">
-            <a:avLst/>
-          </a:prstGeom>
-          <a:noFill/>
-          <a:ln/>
-        </p:spPr>
-        <p:txBody>
-          <a:bodyPr wrap="square" lIns="0" tIns="0" rIns="0" bIns="0" rtlCol="0" anchor="ctr"/>
-          <a:lstStyle/>
-          <a:p>
-            <a:pPr marL="0" indent="0" algn="l">
-              <a:buNone/>
-            </a:pPr>
-            <a:r>
-              <a:rPr lang="en-US" sz="1350" b="1" i="1" dirty="0">
-                <a:solidFill>
-                  <a:srgbClr val="1E293B"/>
-                </a:solidFill>
-                <a:latin typeface="Calibri" pitchFamily="34" charset="0"/>
-                <a:ea typeface="Calibri" pitchFamily="34" charset="-122"/>
-                <a:cs typeface="Calibri" pitchFamily="34" charset="-120"/>
-              </a:rPr>
-              <a:t>Power-2 nearly closes the gap to the ideal policy in the clean, unweighted case.</a:t>
+              <a:t>All three simulators inherit from a shared SimulationBase — they differ only in how each selects a bin.</a:t>
             </a:r>
             <a:endParaRPr lang="en-US" sz="1350" dirty="0"/>
           </a:p>
@@ -10779,7 +11432,7 @@
                 <a:ea typeface="Cambria" pitchFamily="34" charset="-122"/>
                 <a:cs typeface="Cambria" pitchFamily="34" charset="-120"/>
               </a:rPr>
-              <a:t>Diminishing Returns of k</a:t>
+              <a:t>Clean Baseline: Power-2 Captures Most of the Gain</a:t>
             </a:r>
             <a:endParaRPr lang="en-US" sz="2900" dirty="0"/>
           </a:p>
@@ -10826,7 +11479,7 @@
       </p:sp>
       <p:pic>
         <p:nvPicPr>
-          <p:cNvPr id="4" name="Image 0" descr="/home/claude/work/assets/plot_diminishing_returns.png"/>
+          <p:cNvPr id="4" name="Image 0" descr="/home/claude/work/assets/plot_clean_baseline.png"/>
           <p:cNvPicPr>
             <a:picLocks noChangeAspect="1"/>
           </p:cNvPicPr>
@@ -10857,11 +11510,11 @@
         <p:spPr>
           <a:xfrm>
             <a:off x="7635240" y="1188720"/>
-            <a:ext cx="4007815" cy="1554480"/>
+            <a:ext cx="4007815" cy="1417320"/>
           </a:xfrm>
           <a:prstGeom prst="roundRect">
             <a:avLst>
-              <a:gd name="adj" fmla="val 4706"/>
+              <a:gd name="adj" fmla="val 5161"/>
             </a:avLst>
           </a:prstGeom>
           <a:solidFill>
@@ -10886,7 +11539,7 @@
         <p:spPr>
           <a:xfrm>
             <a:off x="7799832" y="1261872"/>
-            <a:ext cx="3678631" cy="901598"/>
+            <a:ext cx="3678631" cy="822046"/>
           </a:xfrm>
           <a:prstGeom prst="rect">
             <a:avLst/>
@@ -10910,7 +11563,7 @@
                 <a:ea typeface="Cambria" pitchFamily="34" charset="-122"/>
                 <a:cs typeface="Cambria" pitchFamily="34" charset="-120"/>
               </a:rPr>
-              <a:t>626.4 / 626.0 / 625.9</a:t>
+              <a:t>666.1 → 626.4</a:t>
             </a:r>
             <a:endParaRPr lang="en-US" sz="2200" dirty="0"/>
           </a:p>
@@ -10924,8 +11577,8 @@
         </p:nvSpPr>
         <p:spPr>
           <a:xfrm>
-            <a:off x="7799832" y="2121408"/>
-            <a:ext cx="3678631" cy="559613"/>
+            <a:off x="7799832" y="2039112"/>
+            <a:ext cx="3678631" cy="510235"/>
           </a:xfrm>
           <a:prstGeom prst="rect">
             <a:avLst/>
@@ -10949,7 +11602,7 @@
                 <a:ea typeface="Calibri" pitchFamily="34" charset="-122"/>
                 <a:cs typeface="Calibri" pitchFamily="34" charset="-120"/>
               </a:rPr>
-              <a:t>MAX LOAD, n=16 — POWER 2 / 3 / 4</a:t>
+              <a:t>MAX LOAD, n=16  (RANDOM → POWER-2)</a:t>
             </a:r>
             <a:endParaRPr lang="en-US" sz="1050" dirty="0"/>
           </a:p>
@@ -10957,57 +11610,18 @@
       </p:sp>
       <p:sp>
         <p:nvSpPr>
-          <p:cNvPr id="8" name="Text 5"/>
-          <p:cNvSpPr/>
-          <p:nvPr/>
-        </p:nvSpPr>
-        <p:spPr>
-          <a:xfrm>
-            <a:off x="7799832" y="2395728"/>
-            <a:ext cx="3678631" cy="274320"/>
-          </a:xfrm>
-          <a:prstGeom prst="rect">
-            <a:avLst/>
-          </a:prstGeom>
-          <a:noFill/>
-          <a:ln/>
-        </p:spPr>
-        <p:txBody>
-          <a:bodyPr wrap="square" lIns="0" tIns="0" rIns="0" bIns="0" rtlCol="0" anchor="ctr"/>
-          <a:lstStyle/>
-          <a:p>
-            <a:pPr marL="0" indent="0">
-              <a:buNone/>
-            </a:pPr>
-            <a:r>
-              <a:rPr lang="en-US" sz="1150" dirty="0">
-                <a:solidFill>
-                  <a:srgbClr val="64748B"/>
-                </a:solidFill>
-                <a:latin typeface="Calibri" pitchFamily="34" charset="0"/>
-                <a:ea typeface="Calibri" pitchFamily="34" charset="-122"/>
-                <a:cs typeface="Calibri" pitchFamily="34" charset="-120"/>
-              </a:rPr>
-              <a:t>Cost per ball: 9 / 14 / 19</a:t>
-            </a:r>
-            <a:endParaRPr lang="en-US" sz="1150" dirty="0"/>
-          </a:p>
-        </p:txBody>
-      </p:sp>
-      <p:sp>
-        <p:nvSpPr>
-          <p:cNvPr id="9" name="Shape 6"/>
-          <p:cNvSpPr/>
-          <p:nvPr/>
-        </p:nvSpPr>
-        <p:spPr>
-          <a:xfrm>
-            <a:off x="7635240" y="2926080"/>
-            <a:ext cx="4007815" cy="1554480"/>
+          <p:cNvPr id="8" name="Shape 5"/>
+          <p:cNvSpPr/>
+          <p:nvPr/>
+        </p:nvSpPr>
+        <p:spPr>
+          <a:xfrm>
+            <a:off x="7635240" y="2743200"/>
+            <a:ext cx="4007815" cy="1417320"/>
           </a:xfrm>
           <a:prstGeom prst="roundRect">
             <a:avLst>
-              <a:gd name="adj" fmla="val 4706"/>
+              <a:gd name="adj" fmla="val 5161"/>
             </a:avLst>
           </a:prstGeom>
           <a:solidFill>
@@ -11025,14 +11639,14 @@
       </p:sp>
       <p:sp>
         <p:nvSpPr>
-          <p:cNvPr id="10" name="Text 7"/>
-          <p:cNvSpPr/>
-          <p:nvPr/>
-        </p:nvSpPr>
-        <p:spPr>
-          <a:xfrm>
-            <a:off x="7799832" y="2999232"/>
-            <a:ext cx="3678631" cy="901598"/>
+          <p:cNvPr id="9" name="Text 6"/>
+          <p:cNvSpPr/>
+          <p:nvPr/>
+        </p:nvSpPr>
+        <p:spPr>
+          <a:xfrm>
+            <a:off x="7799832" y="2816352"/>
+            <a:ext cx="3678631" cy="822046"/>
           </a:xfrm>
           <a:prstGeom prst="rect">
             <a:avLst/>
@@ -11056,7 +11670,7 @@
                 <a:ea typeface="Cambria" pitchFamily="34" charset="-122"/>
                 <a:cs typeface="Cambria" pitchFamily="34" charset="-120"/>
               </a:rPr>
-              <a:t>313.9 / 313.6 / 313.0</a:t>
+              <a:t>345.3 → 313.9</a:t>
             </a:r>
             <a:endParaRPr lang="en-US" sz="2200" dirty="0"/>
           </a:p>
@@ -11064,14 +11678,53 @@
       </p:sp>
       <p:sp>
         <p:nvSpPr>
+          <p:cNvPr id="10" name="Text 7"/>
+          <p:cNvSpPr/>
+          <p:nvPr/>
+        </p:nvSpPr>
+        <p:spPr>
+          <a:xfrm>
+            <a:off x="7799832" y="3593592"/>
+            <a:ext cx="3678631" cy="510235"/>
+          </a:xfrm>
+          <a:prstGeom prst="rect">
+            <a:avLst/>
+          </a:prstGeom>
+          <a:noFill/>
+          <a:ln/>
+        </p:spPr>
+        <p:txBody>
+          <a:bodyPr wrap="square" lIns="0" tIns="0" rIns="0" bIns="0" rtlCol="0" anchor="t"/>
+          <a:lstStyle/>
+          <a:p>
+            <a:pPr marL="0" indent="0" algn="l">
+              <a:buNone/>
+            </a:pPr>
+            <a:r>
+              <a:rPr lang="en-US" sz="1050" dirty="0">
+                <a:solidFill>
+                  <a:srgbClr val="64748B"/>
+                </a:solidFill>
+                <a:latin typeface="Calibri" pitchFamily="34" charset="0"/>
+                <a:ea typeface="Calibri" pitchFamily="34" charset="-122"/>
+                <a:cs typeface="Calibri" pitchFamily="34" charset="-120"/>
+              </a:rPr>
+              <a:t>MAX LOAD, n=32  (RANDOM → POWER-2)</a:t>
+            </a:r>
+            <a:endParaRPr lang="en-US" sz="1050" dirty="0"/>
+          </a:p>
+        </p:txBody>
+      </p:sp>
+      <p:sp>
+        <p:nvSpPr>
           <p:cNvPr id="11" name="Text 8"/>
           <p:cNvSpPr/>
           <p:nvPr/>
         </p:nvSpPr>
         <p:spPr>
           <a:xfrm>
-            <a:off x="7799832" y="3858768"/>
-            <a:ext cx="3678631" cy="559613"/>
+            <a:off x="7635240" y="4343400"/>
+            <a:ext cx="4007815" cy="1097280"/>
           </a:xfrm>
           <a:prstGeom prst="rect">
             <a:avLst/>
@@ -11083,11 +11736,11 @@
           <a:bodyPr wrap="square" lIns="0" tIns="0" rIns="0" bIns="0" rtlCol="0" anchor="t"/>
           <a:lstStyle/>
           <a:p>
-            <a:pPr marL="0" indent="0" algn="l">
-              <a:buNone/>
-            </a:pPr>
-            <a:r>
-              <a:rPr lang="en-US" sz="1050" dirty="0">
+            <a:pPr marL="0" indent="0">
+              <a:buNone/>
+            </a:pPr>
+            <a:r>
+              <a:rPr lang="en-US" sz="1250" i="1" dirty="0">
                 <a:solidFill>
                   <a:srgbClr val="64748B"/>
                 </a:solidFill>
@@ -11095,85 +11748,7 @@
                 <a:ea typeface="Calibri" pitchFamily="34" charset="-122"/>
                 <a:cs typeface="Calibri" pitchFamily="34" charset="-120"/>
               </a:rPr>
-              <a:t>MAX LOAD, n=32 — POWER 2 / 3 / 4</a:t>
-            </a:r>
-            <a:endParaRPr lang="en-US" sz="1050" dirty="0"/>
-          </a:p>
-        </p:txBody>
-      </p:sp>
-      <p:sp>
-        <p:nvSpPr>
-          <p:cNvPr id="12" name="Text 9"/>
-          <p:cNvSpPr/>
-          <p:nvPr/>
-        </p:nvSpPr>
-        <p:spPr>
-          <a:xfrm>
-            <a:off x="7799832" y="4133088"/>
-            <a:ext cx="3678631" cy="274320"/>
-          </a:xfrm>
-          <a:prstGeom prst="rect">
-            <a:avLst/>
-          </a:prstGeom>
-          <a:noFill/>
-          <a:ln/>
-        </p:spPr>
-        <p:txBody>
-          <a:bodyPr wrap="square" lIns="0" tIns="0" rIns="0" bIns="0" rtlCol="0" anchor="ctr"/>
-          <a:lstStyle/>
-          <a:p>
-            <a:pPr marL="0" indent="0">
-              <a:buNone/>
-            </a:pPr>
-            <a:r>
-              <a:rPr lang="en-US" sz="1150" dirty="0">
-                <a:solidFill>
-                  <a:srgbClr val="64748B"/>
-                </a:solidFill>
-                <a:latin typeface="Calibri" pitchFamily="34" charset="0"/>
-                <a:ea typeface="Calibri" pitchFamily="34" charset="-122"/>
-                <a:cs typeface="Calibri" pitchFamily="34" charset="-120"/>
-              </a:rPr>
-              <a:t>Cost per ball: 9 / 14 / 19</a:t>
-            </a:r>
-            <a:endParaRPr lang="en-US" sz="1150" dirty="0"/>
-          </a:p>
-        </p:txBody>
-      </p:sp>
-      <p:sp>
-        <p:nvSpPr>
-          <p:cNvPr id="13" name="Text 10"/>
-          <p:cNvSpPr/>
-          <p:nvPr/>
-        </p:nvSpPr>
-        <p:spPr>
-          <a:xfrm>
-            <a:off x="7635240" y="4709160"/>
-            <a:ext cx="4007815" cy="731520"/>
-          </a:xfrm>
-          <a:prstGeom prst="rect">
-            <a:avLst/>
-          </a:prstGeom>
-          <a:noFill/>
-          <a:ln/>
-        </p:spPr>
-        <p:txBody>
-          <a:bodyPr wrap="square" lIns="0" tIns="0" rIns="0" bIns="0" rtlCol="0" anchor="t"/>
-          <a:lstStyle/>
-          <a:p>
-            <a:pPr marL="0" indent="0">
-              <a:buNone/>
-            </a:pPr>
-            <a:r>
-              <a:rPr lang="en-US" sz="1250" i="1" dirty="0">
-                <a:solidFill>
-                  <a:srgbClr val="64748B"/>
-                </a:solidFill>
-                <a:latin typeface="Calibri" pitchFamily="34" charset="0"/>
-                <a:ea typeface="Calibri" pitchFamily="34" charset="-122"/>
-                <a:cs typeface="Calibri" pitchFamily="34" charset="-120"/>
-              </a:rPr>
-              <a:t>Cost grows roughly linearly with k — quality gain does not.</a:t>
+              <a:t>Absolute minimum adds only a small improvement beyond Power-2 — at much higher cost.</a:t>
             </a:r>
             <a:endParaRPr lang="en-US" sz="1250" dirty="0"/>
           </a:p>
@@ -11181,7 +11756,7 @@
       </p:sp>
       <p:sp>
         <p:nvSpPr>
-          <p:cNvPr id="14" name="Shape 11"/>
+          <p:cNvPr id="12" name="Shape 9"/>
           <p:cNvSpPr/>
           <p:nvPr/>
         </p:nvSpPr>
@@ -11210,7 +11785,7 @@
       </p:sp>
       <p:sp>
         <p:nvSpPr>
-          <p:cNvPr id="15" name="Text 12"/>
+          <p:cNvPr id="13" name="Text 10"/>
           <p:cNvSpPr/>
           <p:nvPr/>
         </p:nvSpPr>
@@ -11241,7 +11816,7 @@
                 <a:ea typeface="Calibri" pitchFamily="34" charset="-122"/>
                 <a:cs typeface="Calibri" pitchFamily="34" charset="-120"/>
               </a:rPr>
-              <a:t>The big improvement is k=1 → k=2. Larger k mostly increases cost.</a:t>
+              <a:t>Power-2 nearly closes the gap to the ideal policy in the clean, unweighted case.</a:t>
             </a:r>
             <a:endParaRPr lang="en-US" sz="1350" dirty="0"/>
           </a:p>
@@ -11313,7 +11888,7 @@
                 <a:ea typeface="Cambria" pitchFamily="34" charset="-122"/>
                 <a:cs typeface="Cambria" pitchFamily="34" charset="-120"/>
               </a:rPr>
-              <a:t>Cost–Quality Tradeoff</a:t>
+              <a:t>Diminishing Returns of k</a:t>
             </a:r>
             <a:endParaRPr lang="en-US" sz="2900" dirty="0"/>
           </a:p>
@@ -11360,7 +11935,7 @@
       </p:sp>
       <p:pic>
         <p:nvPicPr>
-          <p:cNvPr id="4" name="Image 0" descr="/home/claude/work/assets/plot_cost_quality_clean.png"/>
+          <p:cNvPr id="4" name="Image 0" descr="/home/claude/work/assets/plot_diminishing_returns.png"/>
           <p:cNvPicPr>
             <a:picLocks noChangeAspect="1"/>
           </p:cNvPicPr>
@@ -11374,8 +11949,8 @@
         </p:blipFill>
         <p:spPr>
           <a:xfrm>
-            <a:off x="1340968" y="1143000"/>
-            <a:ext cx="9509760" cy="4075611"/>
+            <a:off x="548640" y="1188720"/>
+            <a:ext cx="6858000" cy="4572000"/>
           </a:xfrm>
           <a:prstGeom prst="rect">
             <a:avLst/>
@@ -11390,12 +11965,12 @@
         </p:nvSpPr>
         <p:spPr>
           <a:xfrm>
-            <a:off x="548640" y="5440680"/>
-            <a:ext cx="3576218" cy="502920"/>
+            <a:off x="7635240" y="1188720"/>
+            <a:ext cx="4007815" cy="1554480"/>
           </a:xfrm>
           <a:prstGeom prst="roundRect">
             <a:avLst>
-              <a:gd name="adj" fmla="val 10909"/>
+              <a:gd name="adj" fmla="val 4706"/>
             </a:avLst>
           </a:prstGeom>
           <a:solidFill>
@@ -11419,8 +11994,86 @@
         </p:nvSpPr>
         <p:spPr>
           <a:xfrm>
-            <a:off x="713232" y="5440680"/>
-            <a:ext cx="3247034" cy="502920"/>
+            <a:off x="7799832" y="1261872"/>
+            <a:ext cx="3678631" cy="901598"/>
+          </a:xfrm>
+          <a:prstGeom prst="rect">
+            <a:avLst/>
+          </a:prstGeom>
+          <a:noFill/>
+          <a:ln/>
+        </p:spPr>
+        <p:txBody>
+          <a:bodyPr wrap="square" lIns="0" tIns="0" rIns="0" bIns="0" rtlCol="0" anchor="b"/>
+          <a:lstStyle/>
+          <a:p>
+            <a:pPr marL="0" indent="0" algn="l">
+              <a:buNone/>
+            </a:pPr>
+            <a:r>
+              <a:rPr lang="en-US" sz="2200" b="1" dirty="0">
+                <a:solidFill>
+                  <a:srgbClr val="2563EB"/>
+                </a:solidFill>
+                <a:latin typeface="Cambria" pitchFamily="34" charset="0"/>
+                <a:ea typeface="Cambria" pitchFamily="34" charset="-122"/>
+                <a:cs typeface="Cambria" pitchFamily="34" charset="-120"/>
+              </a:rPr>
+              <a:t>626.4 / 626.0 / 625.9</a:t>
+            </a:r>
+            <a:endParaRPr lang="en-US" sz="2200" dirty="0"/>
+          </a:p>
+        </p:txBody>
+      </p:sp>
+      <p:sp>
+        <p:nvSpPr>
+          <p:cNvPr id="7" name="Text 4"/>
+          <p:cNvSpPr/>
+          <p:nvPr/>
+        </p:nvSpPr>
+        <p:spPr>
+          <a:xfrm>
+            <a:off x="7799832" y="2121408"/>
+            <a:ext cx="3678631" cy="559613"/>
+          </a:xfrm>
+          <a:prstGeom prst="rect">
+            <a:avLst/>
+          </a:prstGeom>
+          <a:noFill/>
+          <a:ln/>
+        </p:spPr>
+        <p:txBody>
+          <a:bodyPr wrap="square" lIns="0" tIns="0" rIns="0" bIns="0" rtlCol="0" anchor="t"/>
+          <a:lstStyle/>
+          <a:p>
+            <a:pPr marL="0" indent="0" algn="l">
+              <a:buNone/>
+            </a:pPr>
+            <a:r>
+              <a:rPr lang="en-US" sz="1050" dirty="0">
+                <a:solidFill>
+                  <a:srgbClr val="64748B"/>
+                </a:solidFill>
+                <a:latin typeface="Calibri" pitchFamily="34" charset="0"/>
+                <a:ea typeface="Calibri" pitchFamily="34" charset="-122"/>
+                <a:cs typeface="Calibri" pitchFamily="34" charset="-120"/>
+              </a:rPr>
+              <a:t>MAX LOAD, n=16 — POWER 2 / 3 / 4</a:t>
+            </a:r>
+            <a:endParaRPr lang="en-US" sz="1050" dirty="0"/>
+          </a:p>
+        </p:txBody>
+      </p:sp>
+      <p:sp>
+        <p:nvSpPr>
+          <p:cNvPr id="8" name="Text 5"/>
+          <p:cNvSpPr/>
+          <p:nvPr/>
+        </p:nvSpPr>
+        <p:spPr>
+          <a:xfrm>
+            <a:off x="7799832" y="2395728"/>
+            <a:ext cx="3678631" cy="274320"/>
           </a:xfrm>
           <a:prstGeom prst="rect">
             <a:avLst/>
@@ -11436,17 +12089,6 @@
               <a:buNone/>
             </a:pPr>
             <a:r>
-              <a:rPr lang="en-US" sz="1150" b="1" dirty="0">
-                <a:solidFill>
-                  <a:srgbClr val="2563EB"/>
-                </a:solidFill>
-                <a:latin typeface="Calibri" pitchFamily="34" charset="0"/>
-                <a:ea typeface="Calibri" pitchFamily="34" charset="-122"/>
-                <a:cs typeface="Calibri" pitchFamily="34" charset="-120"/>
-              </a:rPr>
-              <a:t>Absolute minimum  </a:t>
-            </a:r>
-            <a:r>
               <a:rPr lang="en-US" sz="1150" dirty="0">
                 <a:solidFill>
                   <a:srgbClr val="64748B"/>
@@ -11455,7 +12097,7 @@
                 <a:ea typeface="Calibri" pitchFamily="34" charset="-122"/>
                 <a:cs typeface="Calibri" pitchFamily="34" charset="-120"/>
               </a:rPr>
-              <a:t>Near-optimal — but expensive</a:t>
+              <a:t>Cost per ball: 9 / 14 / 19</a:t>
             </a:r>
             <a:endParaRPr lang="en-US" sz="1150" dirty="0"/>
           </a:p>
@@ -11463,18 +12105,18 @@
       </p:sp>
       <p:sp>
         <p:nvSpPr>
-          <p:cNvPr id="7" name="Shape 4"/>
-          <p:cNvSpPr/>
-          <p:nvPr/>
-        </p:nvSpPr>
-        <p:spPr>
-          <a:xfrm>
-            <a:off x="4307738" y="5440680"/>
-            <a:ext cx="3576218" cy="502920"/>
+          <p:cNvPr id="9" name="Shape 6"/>
+          <p:cNvSpPr/>
+          <p:nvPr/>
+        </p:nvSpPr>
+        <p:spPr>
+          <a:xfrm>
+            <a:off x="7635240" y="2926080"/>
+            <a:ext cx="4007815" cy="1554480"/>
           </a:xfrm>
           <a:prstGeom prst="roundRect">
             <a:avLst>
-              <a:gd name="adj" fmla="val 10909"/>
+              <a:gd name="adj" fmla="val 4706"/>
             </a:avLst>
           </a:prstGeom>
           <a:solidFill>
@@ -11492,14 +12134,92 @@
       </p:sp>
       <p:sp>
         <p:nvSpPr>
-          <p:cNvPr id="8" name="Text 5"/>
-          <p:cNvSpPr/>
-          <p:nvPr/>
-        </p:nvSpPr>
-        <p:spPr>
-          <a:xfrm>
-            <a:off x="4472330" y="5440680"/>
-            <a:ext cx="3247034" cy="502920"/>
+          <p:cNvPr id="10" name="Text 7"/>
+          <p:cNvSpPr/>
+          <p:nvPr/>
+        </p:nvSpPr>
+        <p:spPr>
+          <a:xfrm>
+            <a:off x="7799832" y="2999232"/>
+            <a:ext cx="3678631" cy="901598"/>
+          </a:xfrm>
+          <a:prstGeom prst="rect">
+            <a:avLst/>
+          </a:prstGeom>
+          <a:noFill/>
+          <a:ln/>
+        </p:spPr>
+        <p:txBody>
+          <a:bodyPr wrap="square" lIns="0" tIns="0" rIns="0" bIns="0" rtlCol="0" anchor="b"/>
+          <a:lstStyle/>
+          <a:p>
+            <a:pPr marL="0" indent="0" algn="l">
+              <a:buNone/>
+            </a:pPr>
+            <a:r>
+              <a:rPr lang="en-US" sz="2200" b="1" dirty="0">
+                <a:solidFill>
+                  <a:srgbClr val="2563EB"/>
+                </a:solidFill>
+                <a:latin typeface="Cambria" pitchFamily="34" charset="0"/>
+                <a:ea typeface="Cambria" pitchFamily="34" charset="-122"/>
+                <a:cs typeface="Cambria" pitchFamily="34" charset="-120"/>
+              </a:rPr>
+              <a:t>313.9 / 313.6 / 313.0</a:t>
+            </a:r>
+            <a:endParaRPr lang="en-US" sz="2200" dirty="0"/>
+          </a:p>
+        </p:txBody>
+      </p:sp>
+      <p:sp>
+        <p:nvSpPr>
+          <p:cNvPr id="11" name="Text 8"/>
+          <p:cNvSpPr/>
+          <p:nvPr/>
+        </p:nvSpPr>
+        <p:spPr>
+          <a:xfrm>
+            <a:off x="7799832" y="3858768"/>
+            <a:ext cx="3678631" cy="559613"/>
+          </a:xfrm>
+          <a:prstGeom prst="rect">
+            <a:avLst/>
+          </a:prstGeom>
+          <a:noFill/>
+          <a:ln/>
+        </p:spPr>
+        <p:txBody>
+          <a:bodyPr wrap="square" lIns="0" tIns="0" rIns="0" bIns="0" rtlCol="0" anchor="t"/>
+          <a:lstStyle/>
+          <a:p>
+            <a:pPr marL="0" indent="0" algn="l">
+              <a:buNone/>
+            </a:pPr>
+            <a:r>
+              <a:rPr lang="en-US" sz="1050" dirty="0">
+                <a:solidFill>
+                  <a:srgbClr val="64748B"/>
+                </a:solidFill>
+                <a:latin typeface="Calibri" pitchFamily="34" charset="0"/>
+                <a:ea typeface="Calibri" pitchFamily="34" charset="-122"/>
+                <a:cs typeface="Calibri" pitchFamily="34" charset="-120"/>
+              </a:rPr>
+              <a:t>MAX LOAD, n=32 — POWER 2 / 3 / 4</a:t>
+            </a:r>
+            <a:endParaRPr lang="en-US" sz="1050" dirty="0"/>
+          </a:p>
+        </p:txBody>
+      </p:sp>
+      <p:sp>
+        <p:nvSpPr>
+          <p:cNvPr id="12" name="Text 9"/>
+          <p:cNvSpPr/>
+          <p:nvPr/>
+        </p:nvSpPr>
+        <p:spPr>
+          <a:xfrm>
+            <a:off x="7799832" y="4133088"/>
+            <a:ext cx="3678631" cy="274320"/>
           </a:xfrm>
           <a:prstGeom prst="rect">
             <a:avLst/>
@@ -11515,17 +12235,6 @@
               <a:buNone/>
             </a:pPr>
             <a:r>
-              <a:rPr lang="en-US" sz="1150" b="1" dirty="0">
-                <a:solidFill>
-                  <a:srgbClr val="15803D"/>
-                </a:solidFill>
-                <a:latin typeface="Calibri" pitchFamily="34" charset="0"/>
-                <a:ea typeface="Calibri" pitchFamily="34" charset="-122"/>
-                <a:cs typeface="Calibri" pitchFamily="34" charset="-120"/>
-              </a:rPr>
-              <a:t>Round-robin  </a:t>
-            </a:r>
-            <a:r>
               <a:rPr lang="en-US" sz="1150" dirty="0">
                 <a:solidFill>
                   <a:srgbClr val="64748B"/>
@@ -11534,7 +12243,7 @@
                 <a:ea typeface="Calibri" pitchFamily="34" charset="-122"/>
                 <a:cs typeface="Calibri" pitchFamily="34" charset="-120"/>
               </a:rPr>
-              <a:t>Looks excellent here — but fragile</a:t>
+              <a:t>Cost per ball: 9 / 14 / 19</a:t>
             </a:r>
             <a:endParaRPr lang="en-US" sz="1150" dirty="0"/>
           </a:p>
@@ -11542,70 +12251,30 @@
       </p:sp>
       <p:sp>
         <p:nvSpPr>
-          <p:cNvPr id="9" name="Shape 6"/>
-          <p:cNvSpPr/>
-          <p:nvPr/>
-        </p:nvSpPr>
-        <p:spPr>
-          <a:xfrm>
-            <a:off x="8066837" y="5440680"/>
-            <a:ext cx="3576218" cy="502920"/>
-          </a:xfrm>
-          <a:prstGeom prst="roundRect">
-            <a:avLst>
-              <a:gd name="adj" fmla="val 10909"/>
-            </a:avLst>
-          </a:prstGeom>
-          <a:solidFill>
-            <a:srgbClr val="F1F5F9"/>
-          </a:solidFill>
-          <a:ln/>
-        </p:spPr>
-        <p:txBody>
-          <a:bodyPr/>
-          <a:lstStyle/>
-          <a:p>
-            <a:endParaRPr lang="en-IL"/>
-          </a:p>
-        </p:txBody>
-      </p:sp>
-      <p:sp>
-        <p:nvSpPr>
-          <p:cNvPr id="10" name="Text 7"/>
-          <p:cNvSpPr/>
-          <p:nvPr/>
-        </p:nvSpPr>
-        <p:spPr>
-          <a:xfrm>
-            <a:off x="8231429" y="5440680"/>
-            <a:ext cx="3247034" cy="502920"/>
-          </a:xfrm>
-          <a:prstGeom prst="rect">
-            <a:avLst/>
-          </a:prstGeom>
-          <a:noFill/>
-          <a:ln/>
-        </p:spPr>
-        <p:txBody>
-          <a:bodyPr wrap="square" lIns="0" tIns="0" rIns="0" bIns="0" rtlCol="0" anchor="ctr"/>
+          <p:cNvPr id="13" name="Text 10"/>
+          <p:cNvSpPr/>
+          <p:nvPr/>
+        </p:nvSpPr>
+        <p:spPr>
+          <a:xfrm>
+            <a:off x="7635240" y="4709160"/>
+            <a:ext cx="4007815" cy="731520"/>
+          </a:xfrm>
+          <a:prstGeom prst="rect">
+            <a:avLst/>
+          </a:prstGeom>
+          <a:noFill/>
+          <a:ln/>
+        </p:spPr>
+        <p:txBody>
+          <a:bodyPr wrap="square" lIns="0" tIns="0" rIns="0" bIns="0" rtlCol="0" anchor="t"/>
           <a:lstStyle/>
           <a:p>
             <a:pPr marL="0" indent="0">
               <a:buNone/>
             </a:pPr>
             <a:r>
-              <a:rPr lang="en-US" sz="1150" b="1" dirty="0">
-                <a:solidFill>
-                  <a:srgbClr val="C2660D"/>
-                </a:solidFill>
-                <a:latin typeface="Calibri" pitchFamily="34" charset="0"/>
-                <a:ea typeface="Calibri" pitchFamily="34" charset="-122"/>
-                <a:cs typeface="Calibri" pitchFamily="34" charset="-120"/>
-              </a:rPr>
-              <a:t>Power-2  </a:t>
-            </a:r>
-            <a:r>
-              <a:rPr lang="en-US" sz="1150" dirty="0">
+              <a:rPr lang="en-US" sz="1250" i="1" dirty="0">
                 <a:solidFill>
                   <a:srgbClr val="64748B"/>
                 </a:solidFill>
@@ -11613,15 +12282,15 @@
                 <a:ea typeface="Calibri" pitchFamily="34" charset="-122"/>
                 <a:cs typeface="Calibri" pitchFamily="34" charset="-120"/>
               </a:rPr>
-              <a:t>The knee of the curve</a:t>
-            </a:r>
-            <a:endParaRPr lang="en-US" sz="1150" dirty="0"/>
-          </a:p>
-        </p:txBody>
-      </p:sp>
-      <p:sp>
-        <p:nvSpPr>
-          <p:cNvPr id="11" name="Shape 8"/>
+              <a:t>Cost grows roughly linearly with k — quality gain does not.</a:t>
+            </a:r>
+            <a:endParaRPr lang="en-US" sz="1250" dirty="0"/>
+          </a:p>
+        </p:txBody>
+      </p:sp>
+      <p:sp>
+        <p:nvSpPr>
+          <p:cNvPr id="14" name="Shape 11"/>
           <p:cNvSpPr/>
           <p:nvPr/>
         </p:nvSpPr>
@@ -11650,7 +12319,7 @@
       </p:sp>
       <p:sp>
         <p:nvSpPr>
-          <p:cNvPr id="12" name="Text 9"/>
+          <p:cNvPr id="15" name="Text 12"/>
           <p:cNvSpPr/>
           <p:nvPr/>
         </p:nvSpPr>
@@ -11681,7 +12350,7 @@
                 <a:ea typeface="Calibri" pitchFamily="34" charset="-122"/>
                 <a:cs typeface="Calibri" pitchFamily="34" charset="-120"/>
               </a:rPr>
-              <a:t>Power-2 delivers most of the achievable quality for a small, flat cost — the knee of the curve.</a:t>
+              <a:t>The big improvement is k=1 → k=2. Larger k mostly increases cost.</a:t>
             </a:r>
             <a:endParaRPr lang="en-US" sz="1350" dirty="0"/>
           </a:p>
@@ -11753,7 +12422,7 @@
                 <a:ea typeface="Cambria" pitchFamily="34" charset="-122"/>
                 <a:cs typeface="Cambria" pitchFamily="34" charset="-120"/>
               </a:rPr>
-              <a:t>Weighted Balls Break Count Fairness</a:t>
+              <a:t>Cost–Quality Tradeoff</a:t>
             </a:r>
             <a:endParaRPr lang="en-US" sz="2900" dirty="0"/>
           </a:p>
@@ -11800,7 +12469,7 @@
       </p:sp>
       <p:pic>
         <p:nvPicPr>
-          <p:cNvPr id="4" name="Image 0" descr="/home/claude/work/assets/plot_weighted_breaks.png"/>
+          <p:cNvPr id="4" name="Image 0" descr="/home/claude/work/assets/plot_cost_quality_clean.png"/>
           <p:cNvPicPr>
             <a:picLocks noChangeAspect="1"/>
           </p:cNvPicPr>
@@ -11814,8 +12483,8 @@
         </p:blipFill>
         <p:spPr>
           <a:xfrm>
-            <a:off x="548640" y="1188720"/>
-            <a:ext cx="6858000" cy="4572000"/>
+            <a:off x="1340968" y="1143000"/>
+            <a:ext cx="9509760" cy="4075611"/>
           </a:xfrm>
           <a:prstGeom prst="rect">
             <a:avLst/>
@@ -11830,12 +12499,12 @@
         </p:nvSpPr>
         <p:spPr>
           <a:xfrm>
-            <a:off x="7635240" y="1188720"/>
-            <a:ext cx="4007815" cy="1417320"/>
+            <a:off x="548640" y="5440680"/>
+            <a:ext cx="3576218" cy="502920"/>
           </a:xfrm>
           <a:prstGeom prst="roundRect">
             <a:avLst>
-              <a:gd name="adj" fmla="val 5161"/>
+              <a:gd name="adj" fmla="val 10909"/>
             </a:avLst>
           </a:prstGeom>
           <a:solidFill>
@@ -11859,63 +12528,114 @@
         </p:nvSpPr>
         <p:spPr>
           <a:xfrm>
-            <a:off x="7799832" y="1261872"/>
-            <a:ext cx="3678631" cy="822046"/>
-          </a:xfrm>
-          <a:prstGeom prst="rect">
-            <a:avLst/>
-          </a:prstGeom>
-          <a:noFill/>
-          <a:ln/>
-        </p:spPr>
-        <p:txBody>
-          <a:bodyPr wrap="square" lIns="0" tIns="0" rIns="0" bIns="0" rtlCol="0" anchor="b"/>
-          <a:lstStyle/>
-          <a:p>
-            <a:pPr marL="0" indent="0" algn="l">
-              <a:buNone/>
-            </a:pPr>
-            <a:r>
-              <a:rPr lang="en-US" sz="2200" b="1" dirty="0">
+            <a:off x="713232" y="5440680"/>
+            <a:ext cx="3247034" cy="502920"/>
+          </a:xfrm>
+          <a:prstGeom prst="rect">
+            <a:avLst/>
+          </a:prstGeom>
+          <a:noFill/>
+          <a:ln/>
+        </p:spPr>
+        <p:txBody>
+          <a:bodyPr wrap="square" lIns="0" tIns="0" rIns="0" bIns="0" rtlCol="0" anchor="ctr"/>
+          <a:lstStyle/>
+          <a:p>
+            <a:pPr marL="0" indent="0">
+              <a:buNone/>
+            </a:pPr>
+            <a:r>
+              <a:rPr lang="en-US" sz="1150" b="1" dirty="0">
+                <a:solidFill>
+                  <a:srgbClr val="2563EB"/>
+                </a:solidFill>
+                <a:latin typeface="Calibri" pitchFamily="34" charset="0"/>
+                <a:ea typeface="Calibri" pitchFamily="34" charset="-122"/>
+                <a:cs typeface="Calibri" pitchFamily="34" charset="-120"/>
+              </a:rPr>
+              <a:t>Absolute minimum  </a:t>
+            </a:r>
+            <a:r>
+              <a:rPr lang="en-US" sz="1150" dirty="0">
+                <a:solidFill>
+                  <a:srgbClr val="64748B"/>
+                </a:solidFill>
+                <a:latin typeface="Calibri" pitchFamily="34" charset="0"/>
+                <a:ea typeface="Calibri" pitchFamily="34" charset="-122"/>
+                <a:cs typeface="Calibri" pitchFamily="34" charset="-120"/>
+              </a:rPr>
+              <a:t>Near-optimal — but expensive</a:t>
+            </a:r>
+            <a:endParaRPr lang="en-US" sz="1150" dirty="0"/>
+          </a:p>
+        </p:txBody>
+      </p:sp>
+      <p:sp>
+        <p:nvSpPr>
+          <p:cNvPr id="7" name="Shape 4"/>
+          <p:cNvSpPr/>
+          <p:nvPr/>
+        </p:nvSpPr>
+        <p:spPr>
+          <a:xfrm>
+            <a:off x="4307738" y="5440680"/>
+            <a:ext cx="3576218" cy="502920"/>
+          </a:xfrm>
+          <a:prstGeom prst="roundRect">
+            <a:avLst>
+              <a:gd name="adj" fmla="val 10909"/>
+            </a:avLst>
+          </a:prstGeom>
+          <a:solidFill>
+            <a:srgbClr val="F1F5F9"/>
+          </a:solidFill>
+          <a:ln/>
+        </p:spPr>
+        <p:txBody>
+          <a:bodyPr/>
+          <a:lstStyle/>
+          <a:p>
+            <a:endParaRPr lang="en-IL"/>
+          </a:p>
+        </p:txBody>
+      </p:sp>
+      <p:sp>
+        <p:nvSpPr>
+          <p:cNvPr id="8" name="Text 5"/>
+          <p:cNvSpPr/>
+          <p:nvPr/>
+        </p:nvSpPr>
+        <p:spPr>
+          <a:xfrm>
+            <a:off x="4472330" y="5440680"/>
+            <a:ext cx="3247034" cy="502920"/>
+          </a:xfrm>
+          <a:prstGeom prst="rect">
+            <a:avLst/>
+          </a:prstGeom>
+          <a:noFill/>
+          <a:ln/>
+        </p:spPr>
+        <p:txBody>
+          <a:bodyPr wrap="square" lIns="0" tIns="0" rIns="0" bIns="0" rtlCol="0" anchor="ctr"/>
+          <a:lstStyle/>
+          <a:p>
+            <a:pPr marL="0" indent="0">
+              <a:buNone/>
+            </a:pPr>
+            <a:r>
+              <a:rPr lang="en-US" sz="1150" b="1" dirty="0">
                 <a:solidFill>
                   <a:srgbClr val="15803D"/>
                 </a:solidFill>
-                <a:latin typeface="Cambria" pitchFamily="34" charset="0"/>
-                <a:ea typeface="Cambria" pitchFamily="34" charset="-122"/>
-                <a:cs typeface="Cambria" pitchFamily="34" charset="-120"/>
-              </a:rPr>
-              <a:t>1812.6  vs  1731.6</a:t>
-            </a:r>
-            <a:endParaRPr lang="en-US" sz="2200" dirty="0"/>
-          </a:p>
-        </p:txBody>
-      </p:sp>
-      <p:sp>
-        <p:nvSpPr>
-          <p:cNvPr id="7" name="Text 4"/>
-          <p:cNvSpPr/>
-          <p:nvPr/>
-        </p:nvSpPr>
-        <p:spPr>
-          <a:xfrm>
-            <a:off x="7799832" y="2039112"/>
-            <a:ext cx="3678631" cy="510235"/>
-          </a:xfrm>
-          <a:prstGeom prst="rect">
-            <a:avLst/>
-          </a:prstGeom>
-          <a:noFill/>
-          <a:ln/>
-        </p:spPr>
-        <p:txBody>
-          <a:bodyPr wrap="square" lIns="0" tIns="0" rIns="0" bIns="0" rtlCol="0" anchor="t"/>
-          <a:lstStyle/>
-          <a:p>
-            <a:pPr marL="0" indent="0" algn="l">
-              <a:buNone/>
-            </a:pPr>
-            <a:r>
-              <a:rPr lang="en-US" sz="1050" dirty="0">
+                <a:latin typeface="Calibri" pitchFamily="34" charset="0"/>
+                <a:ea typeface="Calibri" pitchFamily="34" charset="-122"/>
+                <a:cs typeface="Calibri" pitchFamily="34" charset="-120"/>
+              </a:rPr>
+              <a:t>Round-robin  </a:t>
+            </a:r>
+            <a:r>
+              <a:rPr lang="en-US" sz="1150" dirty="0">
                 <a:solidFill>
                   <a:srgbClr val="64748B"/>
                 </a:solidFill>
@@ -11923,83 +12643,78 @@
                 <a:ea typeface="Calibri" pitchFamily="34" charset="-122"/>
                 <a:cs typeface="Calibri" pitchFamily="34" charset="-120"/>
               </a:rPr>
-              <a:t>MAX LOAD, WEIGHTED n=32 — ROUND-ROBIN vs POWER-2</a:t>
-            </a:r>
-            <a:endParaRPr lang="en-US" sz="1050" dirty="0"/>
-          </a:p>
-        </p:txBody>
-      </p:sp>
-      <p:sp>
-        <p:nvSpPr>
-          <p:cNvPr id="8" name="Text 5"/>
-          <p:cNvSpPr/>
-          <p:nvPr/>
-        </p:nvSpPr>
-        <p:spPr>
-          <a:xfrm>
-            <a:off x="7635240" y="2788920"/>
-            <a:ext cx="4007815" cy="1005840"/>
-          </a:xfrm>
-          <a:prstGeom prst="rect">
-            <a:avLst/>
-          </a:prstGeom>
-          <a:noFill/>
-          <a:ln/>
-        </p:spPr>
-        <p:txBody>
-          <a:bodyPr wrap="square" lIns="0" tIns="0" rIns="0" bIns="0" rtlCol="0" anchor="t"/>
+              <a:t>Looks excellent here — but fragile</a:t>
+            </a:r>
+            <a:endParaRPr lang="en-US" sz="1150" dirty="0"/>
+          </a:p>
+        </p:txBody>
+      </p:sp>
+      <p:sp>
+        <p:nvSpPr>
+          <p:cNvPr id="9" name="Shape 6"/>
+          <p:cNvSpPr/>
+          <p:nvPr/>
+        </p:nvSpPr>
+        <p:spPr>
+          <a:xfrm>
+            <a:off x="8066837" y="5440680"/>
+            <a:ext cx="3576218" cy="502920"/>
+          </a:xfrm>
+          <a:prstGeom prst="roundRect">
+            <a:avLst>
+              <a:gd name="adj" fmla="val 10909"/>
+            </a:avLst>
+          </a:prstGeom>
+          <a:solidFill>
+            <a:srgbClr val="F1F5F9"/>
+          </a:solidFill>
+          <a:ln/>
+        </p:spPr>
+        <p:txBody>
+          <a:bodyPr/>
+          <a:lstStyle/>
+          <a:p>
+            <a:endParaRPr lang="en-IL"/>
+          </a:p>
+        </p:txBody>
+      </p:sp>
+      <p:sp>
+        <p:nvSpPr>
+          <p:cNvPr id="10" name="Text 7"/>
+          <p:cNvSpPr/>
+          <p:nvPr/>
+        </p:nvSpPr>
+        <p:spPr>
+          <a:xfrm>
+            <a:off x="8231429" y="5440680"/>
+            <a:ext cx="3247034" cy="502920"/>
+          </a:xfrm>
+          <a:prstGeom prst="rect">
+            <a:avLst/>
+          </a:prstGeom>
+          <a:noFill/>
+          <a:ln/>
+        </p:spPr>
+        <p:txBody>
+          <a:bodyPr wrap="square" lIns="0" tIns="0" rIns="0" bIns="0" rtlCol="0" anchor="ctr"/>
           <a:lstStyle/>
           <a:p>
             <a:pPr marL="0" indent="0">
-              <a:lnSpc>
-                <a:spcPct val="115000"/>
-              </a:lnSpc>
-              <a:buNone/>
-            </a:pPr>
-            <a:r>
-              <a:rPr lang="en-US" sz="1300" dirty="0">
-                <a:solidFill>
-                  <a:srgbClr val="1E293B"/>
-                </a:solidFill>
-                <a:latin typeface="Calibri" pitchFamily="34" charset="0"/>
-                <a:ea typeface="Calibri" pitchFamily="34" charset="-122"/>
-                <a:cs typeface="Calibri" pitchFamily="34" charset="-120"/>
-              </a:rPr>
-              <a:t>Fair by count can still be bad by load. Power-2 reads current load and adapts; round-robin does not.</a:t>
-            </a:r>
-            <a:endParaRPr lang="en-US" sz="1300" dirty="0"/>
-          </a:p>
-        </p:txBody>
-      </p:sp>
-      <p:sp>
-        <p:nvSpPr>
-          <p:cNvPr id="9" name="Text 6"/>
-          <p:cNvSpPr/>
-          <p:nvPr/>
-        </p:nvSpPr>
-        <p:spPr>
-          <a:xfrm>
-            <a:off x="7635240" y="3977640"/>
-            <a:ext cx="4007815" cy="1005840"/>
-          </a:xfrm>
-          <a:prstGeom prst="rect">
-            <a:avLst/>
-          </a:prstGeom>
-          <a:noFill/>
-          <a:ln/>
-        </p:spPr>
-        <p:txBody>
-          <a:bodyPr wrap="square" lIns="0" tIns="0" rIns="0" bIns="0" rtlCol="0" anchor="t"/>
-          <a:lstStyle/>
-          <a:p>
-            <a:pPr marL="0" indent="0">
-              <a:lnSpc>
-                <a:spcPct val="115000"/>
-              </a:lnSpc>
-              <a:buNone/>
-            </a:pPr>
-            <a:r>
-              <a:rPr lang="en-US" sz="1250" i="1" dirty="0">
+              <a:buNone/>
+            </a:pPr>
+            <a:r>
+              <a:rPr lang="en-US" sz="1150" b="1" dirty="0">
+                <a:solidFill>
+                  <a:srgbClr val="C2660D"/>
+                </a:solidFill>
+                <a:latin typeface="Calibri" pitchFamily="34" charset="0"/>
+                <a:ea typeface="Calibri" pitchFamily="34" charset="-122"/>
+                <a:cs typeface="Calibri" pitchFamily="34" charset="-120"/>
+              </a:rPr>
+              <a:t>Power-2  </a:t>
+            </a:r>
+            <a:r>
+              <a:rPr lang="en-US" sz="1150" dirty="0">
                 <a:solidFill>
                   <a:srgbClr val="64748B"/>
                 </a:solidFill>
@@ -12007,15 +12722,15 @@
                 <a:ea typeface="Calibri" pitchFamily="34" charset="-122"/>
                 <a:cs typeface="Calibri" pitchFamily="34" charset="-120"/>
               </a:rPr>
-              <a:t>The same pattern appears at n=16: round-robin's clean-case advantage disappears once balls carry weight.</a:t>
-            </a:r>
-            <a:endParaRPr lang="en-US" sz="1250" dirty="0"/>
-          </a:p>
-        </p:txBody>
-      </p:sp>
-      <p:sp>
-        <p:nvSpPr>
-          <p:cNvPr id="10" name="Shape 7"/>
+              <a:t>The knee of the curve</a:t>
+            </a:r>
+            <a:endParaRPr lang="en-US" sz="1150" dirty="0"/>
+          </a:p>
+        </p:txBody>
+      </p:sp>
+      <p:sp>
+        <p:nvSpPr>
+          <p:cNvPr id="11" name="Shape 8"/>
           <p:cNvSpPr/>
           <p:nvPr/>
         </p:nvSpPr>
@@ -12044,7 +12759,7 @@
       </p:sp>
       <p:sp>
         <p:nvSpPr>
-          <p:cNvPr id="11" name="Text 8"/>
+          <p:cNvPr id="12" name="Text 9"/>
           <p:cNvSpPr/>
           <p:nvPr/>
         </p:nvSpPr>
@@ -12075,7 +12790,7 @@
                 <a:ea typeface="Calibri" pitchFamily="34" charset="-122"/>
                 <a:cs typeface="Calibri" pitchFamily="34" charset="-120"/>
               </a:rPr>
-              <a:t>Round-robin balances counts, not load — weighted balls expose that weakness.</a:t>
+              <a:t>Power-2 delivers most of the achievable quality for a small, flat cost — the knee of the curve.</a:t>
             </a:r>
             <a:endParaRPr lang="en-US" sz="1350" dirty="0"/>
           </a:p>
